--- a/Ad_Auction_Simulator_Dashboard.pptx
+++ b/Ad_Auction_Simulator_Dashboard.pptx
@@ -16,6 +16,7 @@
     <p:sldId id="264" r:id="rId15"/>
     <p:sldId id="265" r:id="rId16"/>
     <p:sldId id="266" r:id="rId17"/>
+    <p:sldId id="267" r:id="rId18"/>
   </p:sldIdLst>
   <p:sldSz cx="12191695" cy="6858000" type="screen4x3"/>
   <p:notesSz cx="6858000" cy="9144000"/>
@@ -3521,7 +3522,7 @@
               </a:defRPr>
             </a:pPr>
             <a:r>
-              <a:t>Quality Feedback</a:t>
+              <a:t>Thompson Sampling</a:t>
             </a:r>
           </a:p>
         </p:txBody>
@@ -3598,7 +3599,7 @@
               </a:defRPr>
             </a:pPr>
             <a:r>
-              <a:t>Thompson Sampling</a:t>
+              <a:t>Latency-Aware Cascade</a:t>
             </a:r>
           </a:p>
         </p:txBody>
@@ -3675,7 +3676,7 @@
               </a:defRPr>
             </a:pPr>
             <a:r>
-              <a:t>Latency-Aware Cascade</a:t>
+              <a:t>Model Strategy</a:t>
             </a:r>
           </a:p>
         </p:txBody>
@@ -3752,7 +3753,7 @@
               </a:defRPr>
             </a:pPr>
             <a:r>
-              <a:t>Model Strategy</a:t>
+              <a:t>Finance Scenario</a:t>
             </a:r>
           </a:p>
         </p:txBody>
@@ -6291,6 +6292,14 @@
 <file path=ppt/slides/slide11.xml><?xml version="1.0" encoding="utf-8"?>
 <p:sld xmlns:a="http://schemas.openxmlformats.org/drawingml/2006/main" xmlns:p="http://schemas.openxmlformats.org/presentationml/2006/main" xmlns:r="http://schemas.openxmlformats.org/officeDocument/2006/relationships">
   <p:cSld>
+    <p:bg>
+      <p:bgPr>
+        <a:solidFill>
+          <a:srgbClr val="F8FAFC"/>
+        </a:solidFill>
+        <a:effectLst/>
+      </p:bgPr>
+    </p:bg>
     <p:spTree>
       <p:nvGrpSpPr>
         <p:cNvPr id="1" name=""/>
@@ -6300,6 +6309,3124 @@
       <p:grpSpPr/>
       <p:sp>
         <p:nvSpPr>
+          <p:cNvPr id="2" name="TextBox 1"/>
+          <p:cNvSpPr txBox="1"/>
+          <p:nvPr/>
+        </p:nvSpPr>
+        <p:spPr>
+          <a:xfrm>
+            <a:off x="548640" y="365760"/>
+            <a:ext cx="9144000" cy="457200"/>
+          </a:xfrm>
+          <a:prstGeom prst="rect">
+            <a:avLst/>
+          </a:prstGeom>
+          <a:noFill/>
+        </p:spPr>
+        <p:txBody>
+          <a:bodyPr wrap="square"/>
+          <a:lstStyle/>
+          <a:p>
+            <a:pPr algn="l">
+              <a:defRPr sz="2800" b="1">
+                <a:solidFill>
+                  <a:srgbClr val="111827"/>
+                </a:solidFill>
+                <a:latin typeface="Calibri"/>
+              </a:defRPr>
+            </a:pPr>
+            <a:r>
+              <a:t>Financial Services Scenario</a:t>
+            </a:r>
+          </a:p>
+        </p:txBody>
+      </p:sp>
+      <p:sp>
+        <p:nvSpPr>
+          <p:cNvPr id="3" name="TextBox 2"/>
+          <p:cNvSpPr txBox="1"/>
+          <p:nvPr/>
+        </p:nvSpPr>
+        <p:spPr>
+          <a:xfrm>
+            <a:off x="548640" y="822960"/>
+            <a:ext cx="9144000" cy="274320"/>
+          </a:xfrm>
+          <a:prstGeom prst="rect">
+            <a:avLst/>
+          </a:prstGeom>
+          <a:noFill/>
+        </p:spPr>
+        <p:txBody>
+          <a:bodyPr wrap="square"/>
+          <a:lstStyle/>
+          <a:p>
+            <a:pPr algn="l">
+              <a:defRPr sz="1200" b="0">
+                <a:solidFill>
+                  <a:srgbClr val="6B7280"/>
+                </a:solidFill>
+                <a:latin typeface="Calibri"/>
+              </a:defRPr>
+            </a:pPr>
+            <a:r>
+              <a:t>30-day simulation comparing 6 recommender algorithms for high-stakes financial advertising</a:t>
+            </a:r>
+          </a:p>
+        </p:txBody>
+      </p:sp>
+      <p:sp>
+        <p:nvSpPr>
+          <p:cNvPr id="4" name="Rectangle 3"/>
+          <p:cNvSpPr/>
+          <p:nvPr/>
+        </p:nvSpPr>
+        <p:spPr>
+          <a:xfrm>
+            <a:off x="548640" y="1371600"/>
+            <a:ext cx="6583680" cy="2926080"/>
+          </a:xfrm>
+          <a:prstGeom prst="rect">
+            <a:avLst/>
+          </a:prstGeom>
+          <a:solidFill>
+            <a:srgbClr val="FFFFFF"/>
+          </a:solidFill>
+          <a:ln>
+            <a:noFill/>
+          </a:ln>
+        </p:spPr>
+        <p:style>
+          <a:lnRef idx="1">
+            <a:schemeClr val="accent1"/>
+          </a:lnRef>
+          <a:fillRef idx="3">
+            <a:schemeClr val="accent1"/>
+          </a:fillRef>
+          <a:effectRef idx="2">
+            <a:schemeClr val="accent1"/>
+          </a:effectRef>
+          <a:fontRef idx="minor">
+            <a:schemeClr val="lt1"/>
+          </a:fontRef>
+        </p:style>
+        <p:txBody>
+          <a:bodyPr rtlCol="0" anchor="ctr"/>
+          <a:lstStyle/>
+          <a:p>
+            <a:pPr algn="ctr"/>
+          </a:p>
+        </p:txBody>
+      </p:sp>
+      <p:sp>
+        <p:nvSpPr>
+          <p:cNvPr id="5" name="TextBox 4"/>
+          <p:cNvSpPr txBox="1"/>
+          <p:nvPr/>
+        </p:nvSpPr>
+        <p:spPr>
+          <a:xfrm>
+            <a:off x="731520" y="1463040"/>
+            <a:ext cx="6217920" cy="274320"/>
+          </a:xfrm>
+          <a:prstGeom prst="rect">
+            <a:avLst/>
+          </a:prstGeom>
+          <a:noFill/>
+        </p:spPr>
+        <p:txBody>
+          <a:bodyPr wrap="square"/>
+          <a:lstStyle/>
+          <a:p>
+            <a:pPr algn="l">
+              <a:defRPr sz="1200" b="1">
+                <a:solidFill>
+                  <a:srgbClr val="111827"/>
+                </a:solidFill>
+                <a:latin typeface="Calibri"/>
+              </a:defRPr>
+            </a:pPr>
+            <a:r>
+              <a:t>Algorithm Rankings (Credit Cards Sub-Vertical)</a:t>
+            </a:r>
+          </a:p>
+        </p:txBody>
+      </p:sp>
+      <p:sp>
+        <p:nvSpPr>
+          <p:cNvPr id="6" name="Rectangle 5"/>
+          <p:cNvSpPr/>
+          <p:nvPr/>
+        </p:nvSpPr>
+        <p:spPr>
+          <a:xfrm>
+            <a:off x="640080" y="1783080"/>
+            <a:ext cx="6400800" cy="256032"/>
+          </a:xfrm>
+          <a:prstGeom prst="rect">
+            <a:avLst/>
+          </a:prstGeom>
+          <a:solidFill>
+            <a:srgbClr val="DBEAFE"/>
+          </a:solidFill>
+          <a:ln>
+            <a:noFill/>
+          </a:ln>
+        </p:spPr>
+        <p:style>
+          <a:lnRef idx="1">
+            <a:schemeClr val="accent1"/>
+          </a:lnRef>
+          <a:fillRef idx="3">
+            <a:schemeClr val="accent1"/>
+          </a:fillRef>
+          <a:effectRef idx="2">
+            <a:schemeClr val="accent1"/>
+          </a:effectRef>
+          <a:fontRef idx="minor">
+            <a:schemeClr val="lt1"/>
+          </a:fontRef>
+        </p:style>
+        <p:txBody>
+          <a:bodyPr rtlCol="0" anchor="ctr"/>
+          <a:lstStyle/>
+          <a:p>
+            <a:pPr algn="ctr"/>
+          </a:p>
+        </p:txBody>
+      </p:sp>
+      <p:sp>
+        <p:nvSpPr>
+          <p:cNvPr id="7" name="TextBox 6"/>
+          <p:cNvSpPr txBox="1"/>
+          <p:nvPr/>
+        </p:nvSpPr>
+        <p:spPr>
+          <a:xfrm>
+            <a:off x="685800" y="1801368"/>
+            <a:ext cx="1051560" cy="256032"/>
+          </a:xfrm>
+          <a:prstGeom prst="rect">
+            <a:avLst/>
+          </a:prstGeom>
+          <a:noFill/>
+        </p:spPr>
+        <p:txBody>
+          <a:bodyPr wrap="square"/>
+          <a:lstStyle/>
+          <a:p>
+            <a:pPr algn="l">
+              <a:defRPr sz="800" b="1">
+                <a:solidFill>
+                  <a:srgbClr val="1D4ED8"/>
+                </a:solidFill>
+                <a:latin typeface="Calibri"/>
+              </a:defRPr>
+            </a:pPr>
+            <a:r>
+              <a:t>Algorithm</a:t>
+            </a:r>
+          </a:p>
+        </p:txBody>
+      </p:sp>
+      <p:sp>
+        <p:nvSpPr>
+          <p:cNvPr id="8" name="TextBox 7"/>
+          <p:cNvSpPr txBox="1"/>
+          <p:nvPr/>
+        </p:nvSpPr>
+        <p:spPr>
+          <a:xfrm>
+            <a:off x="1737360" y="1801368"/>
+            <a:ext cx="1051560" cy="256032"/>
+          </a:xfrm>
+          <a:prstGeom prst="rect">
+            <a:avLst/>
+          </a:prstGeom>
+          <a:noFill/>
+        </p:spPr>
+        <p:txBody>
+          <a:bodyPr wrap="square"/>
+          <a:lstStyle/>
+          <a:p>
+            <a:pPr algn="l">
+              <a:defRPr sz="800" b="1">
+                <a:solidFill>
+                  <a:srgbClr val="1D4ED8"/>
+                </a:solidFill>
+                <a:latin typeface="Calibri"/>
+              </a:defRPr>
+            </a:pPr>
+            <a:r>
+              <a:t>Revenue</a:t>
+            </a:r>
+          </a:p>
+        </p:txBody>
+      </p:sp>
+      <p:sp>
+        <p:nvSpPr>
+          <p:cNvPr id="9" name="TextBox 8"/>
+          <p:cNvSpPr txBox="1"/>
+          <p:nvPr/>
+        </p:nvSpPr>
+        <p:spPr>
+          <a:xfrm>
+            <a:off x="2788920" y="1801368"/>
+            <a:ext cx="1051560" cy="256032"/>
+          </a:xfrm>
+          <a:prstGeom prst="rect">
+            <a:avLst/>
+          </a:prstGeom>
+          <a:noFill/>
+        </p:spPr>
+        <p:txBody>
+          <a:bodyPr wrap="square"/>
+          <a:lstStyle/>
+          <a:p>
+            <a:pPr algn="l">
+              <a:defRPr sz="800" b="1">
+                <a:solidFill>
+                  <a:srgbClr val="1D4ED8"/>
+                </a:solidFill>
+                <a:latin typeface="Calibri"/>
+              </a:defRPr>
+            </a:pPr>
+            <a:r>
+              <a:t>Trust</a:t>
+            </a:r>
+          </a:p>
+        </p:txBody>
+      </p:sp>
+      <p:sp>
+        <p:nvSpPr>
+          <p:cNvPr id="10" name="TextBox 9"/>
+          <p:cNvSpPr txBox="1"/>
+          <p:nvPr/>
+        </p:nvSpPr>
+        <p:spPr>
+          <a:xfrm>
+            <a:off x="3840480" y="1801368"/>
+            <a:ext cx="1051560" cy="256032"/>
+          </a:xfrm>
+          <a:prstGeom prst="rect">
+            <a:avLst/>
+          </a:prstGeom>
+          <a:noFill/>
+        </p:spPr>
+        <p:txBody>
+          <a:bodyPr wrap="square"/>
+          <a:lstStyle/>
+          <a:p>
+            <a:pPr algn="l">
+              <a:defRPr sz="800" b="1">
+                <a:solidFill>
+                  <a:srgbClr val="1D4ED8"/>
+                </a:solidFill>
+                <a:latin typeface="Calibri"/>
+              </a:defRPr>
+            </a:pPr>
+            <a:r>
+              <a:t>Risk</a:t>
+            </a:r>
+          </a:p>
+        </p:txBody>
+      </p:sp>
+      <p:sp>
+        <p:nvSpPr>
+          <p:cNvPr id="11" name="TextBox 10"/>
+          <p:cNvSpPr txBox="1"/>
+          <p:nvPr/>
+        </p:nvSpPr>
+        <p:spPr>
+          <a:xfrm>
+            <a:off x="4892040" y="1801368"/>
+            <a:ext cx="1051560" cy="256032"/>
+          </a:xfrm>
+          <a:prstGeom prst="rect">
+            <a:avLst/>
+          </a:prstGeom>
+          <a:noFill/>
+        </p:spPr>
+        <p:txBody>
+          <a:bodyPr wrap="square"/>
+          <a:lstStyle/>
+          <a:p>
+            <a:pPr algn="l">
+              <a:defRPr sz="800" b="1">
+                <a:solidFill>
+                  <a:srgbClr val="1D4ED8"/>
+                </a:solidFill>
+                <a:latin typeface="Calibri"/>
+              </a:defRPr>
+            </a:pPr>
+            <a:r>
+              <a:t>CPA</a:t>
+            </a:r>
+          </a:p>
+        </p:txBody>
+      </p:sp>
+      <p:sp>
+        <p:nvSpPr>
+          <p:cNvPr id="12" name="TextBox 11"/>
+          <p:cNvSpPr txBox="1"/>
+          <p:nvPr/>
+        </p:nvSpPr>
+        <p:spPr>
+          <a:xfrm>
+            <a:off x="5943600" y="1801368"/>
+            <a:ext cx="1051560" cy="256032"/>
+          </a:xfrm>
+          <a:prstGeom prst="rect">
+            <a:avLst/>
+          </a:prstGeom>
+          <a:noFill/>
+        </p:spPr>
+        <p:txBody>
+          <a:bodyPr wrap="square"/>
+          <a:lstStyle/>
+          <a:p>
+            <a:pPr algn="l">
+              <a:defRPr sz="800" b="1">
+                <a:solidFill>
+                  <a:srgbClr val="1D4ED8"/>
+                </a:solidFill>
+                <a:latin typeface="Calibri"/>
+              </a:defRPr>
+            </a:pPr>
+            <a:r>
+              <a:t>Composite</a:t>
+            </a:r>
+          </a:p>
+        </p:txBody>
+      </p:sp>
+      <p:sp>
+        <p:nvSpPr>
+          <p:cNvPr id="13" name="TextBox 12"/>
+          <p:cNvSpPr txBox="1"/>
+          <p:nvPr/>
+        </p:nvSpPr>
+        <p:spPr>
+          <a:xfrm>
+            <a:off x="685800" y="2057400"/>
+            <a:ext cx="1051560" cy="256032"/>
+          </a:xfrm>
+          <a:prstGeom prst="rect">
+            <a:avLst/>
+          </a:prstGeom>
+          <a:noFill/>
+        </p:spPr>
+        <p:txBody>
+          <a:bodyPr wrap="square"/>
+          <a:lstStyle/>
+          <a:p>
+            <a:pPr algn="l">
+              <a:defRPr sz="900" b="0">
+                <a:solidFill>
+                  <a:srgbClr val="374151"/>
+                </a:solidFill>
+                <a:latin typeface="Calibri"/>
+              </a:defRPr>
+            </a:pPr>
+            <a:r>
+              <a:t>Risk-Adjusted Ranker</a:t>
+            </a:r>
+          </a:p>
+        </p:txBody>
+      </p:sp>
+      <p:sp>
+        <p:nvSpPr>
+          <p:cNvPr id="14" name="TextBox 13"/>
+          <p:cNvSpPr txBox="1"/>
+          <p:nvPr/>
+        </p:nvSpPr>
+        <p:spPr>
+          <a:xfrm>
+            <a:off x="1737360" y="2057400"/>
+            <a:ext cx="1051560" cy="256032"/>
+          </a:xfrm>
+          <a:prstGeom prst="rect">
+            <a:avLst/>
+          </a:prstGeom>
+          <a:noFill/>
+        </p:spPr>
+        <p:txBody>
+          <a:bodyPr wrap="square"/>
+          <a:lstStyle/>
+          <a:p>
+            <a:pPr algn="l">
+              <a:defRPr sz="900" b="0">
+                <a:solidFill>
+                  <a:srgbClr val="374151"/>
+                </a:solidFill>
+                <a:latin typeface="Calibri"/>
+              </a:defRPr>
+            </a:pPr>
+            <a:r>
+              <a:t>$48.2K</a:t>
+            </a:r>
+          </a:p>
+        </p:txBody>
+      </p:sp>
+      <p:sp>
+        <p:nvSpPr>
+          <p:cNvPr id="15" name="TextBox 14"/>
+          <p:cNvSpPr txBox="1"/>
+          <p:nvPr/>
+        </p:nvSpPr>
+        <p:spPr>
+          <a:xfrm>
+            <a:off x="2788920" y="2057400"/>
+            <a:ext cx="1051560" cy="256032"/>
+          </a:xfrm>
+          <a:prstGeom prst="rect">
+            <a:avLst/>
+          </a:prstGeom>
+          <a:noFill/>
+        </p:spPr>
+        <p:txBody>
+          <a:bodyPr wrap="square"/>
+          <a:lstStyle/>
+          <a:p>
+            <a:pPr algn="l">
+              <a:defRPr sz="900" b="0">
+                <a:solidFill>
+                  <a:srgbClr val="374151"/>
+                </a:solidFill>
+                <a:latin typeface="Calibri"/>
+              </a:defRPr>
+            </a:pPr>
+            <a:r>
+              <a:t>87%</a:t>
+            </a:r>
+          </a:p>
+        </p:txBody>
+      </p:sp>
+      <p:sp>
+        <p:nvSpPr>
+          <p:cNvPr id="16" name="TextBox 15"/>
+          <p:cNvSpPr txBox="1"/>
+          <p:nvPr/>
+        </p:nvSpPr>
+        <p:spPr>
+          <a:xfrm>
+            <a:off x="3840480" y="2057400"/>
+            <a:ext cx="1051560" cy="256032"/>
+          </a:xfrm>
+          <a:prstGeom prst="rect">
+            <a:avLst/>
+          </a:prstGeom>
+          <a:noFill/>
+        </p:spPr>
+        <p:txBody>
+          <a:bodyPr wrap="square"/>
+          <a:lstStyle/>
+          <a:p>
+            <a:pPr algn="l">
+              <a:defRPr sz="900" b="0">
+                <a:solidFill>
+                  <a:srgbClr val="374151"/>
+                </a:solidFill>
+                <a:latin typeface="Calibri"/>
+              </a:defRPr>
+            </a:pPr>
+            <a:r>
+              <a:t>3</a:t>
+            </a:r>
+          </a:p>
+        </p:txBody>
+      </p:sp>
+      <p:sp>
+        <p:nvSpPr>
+          <p:cNvPr id="17" name="TextBox 16"/>
+          <p:cNvSpPr txBox="1"/>
+          <p:nvPr/>
+        </p:nvSpPr>
+        <p:spPr>
+          <a:xfrm>
+            <a:off x="4892040" y="2057400"/>
+            <a:ext cx="1051560" cy="256032"/>
+          </a:xfrm>
+          <a:prstGeom prst="rect">
+            <a:avLst/>
+          </a:prstGeom>
+          <a:noFill/>
+        </p:spPr>
+        <p:txBody>
+          <a:bodyPr wrap="square"/>
+          <a:lstStyle/>
+          <a:p>
+            <a:pPr algn="l">
+              <a:defRPr sz="900" b="0">
+                <a:solidFill>
+                  <a:srgbClr val="374151"/>
+                </a:solidFill>
+                <a:latin typeface="Calibri"/>
+              </a:defRPr>
+            </a:pPr>
+            <a:r>
+              <a:t>$42</a:t>
+            </a:r>
+          </a:p>
+        </p:txBody>
+      </p:sp>
+      <p:sp>
+        <p:nvSpPr>
+          <p:cNvPr id="18" name="TextBox 17"/>
+          <p:cNvSpPr txBox="1"/>
+          <p:nvPr/>
+        </p:nvSpPr>
+        <p:spPr>
+          <a:xfrm>
+            <a:off x="5943600" y="2057400"/>
+            <a:ext cx="1051560" cy="256032"/>
+          </a:xfrm>
+          <a:prstGeom prst="rect">
+            <a:avLst/>
+          </a:prstGeom>
+          <a:noFill/>
+        </p:spPr>
+        <p:txBody>
+          <a:bodyPr wrap="square"/>
+          <a:lstStyle/>
+          <a:p>
+            <a:pPr algn="l">
+              <a:defRPr sz="900" b="0">
+                <a:solidFill>
+                  <a:srgbClr val="374151"/>
+                </a:solidFill>
+                <a:latin typeface="Calibri"/>
+              </a:defRPr>
+            </a:pPr>
+            <a:r>
+              <a:t>82.4%</a:t>
+            </a:r>
+          </a:p>
+        </p:txBody>
+      </p:sp>
+      <p:sp>
+        <p:nvSpPr>
+          <p:cNvPr id="19" name="Rectangle 18"/>
+          <p:cNvSpPr/>
+          <p:nvPr/>
+        </p:nvSpPr>
+        <p:spPr>
+          <a:xfrm>
+            <a:off x="685800" y="2286000"/>
+            <a:ext cx="6309360" cy="4572"/>
+          </a:xfrm>
+          <a:prstGeom prst="rect">
+            <a:avLst/>
+          </a:prstGeom>
+          <a:solidFill>
+            <a:srgbClr val="F3F4F6"/>
+          </a:solidFill>
+          <a:ln>
+            <a:noFill/>
+          </a:ln>
+        </p:spPr>
+        <p:style>
+          <a:lnRef idx="1">
+            <a:schemeClr val="accent1"/>
+          </a:lnRef>
+          <a:fillRef idx="3">
+            <a:schemeClr val="accent1"/>
+          </a:fillRef>
+          <a:effectRef idx="2">
+            <a:schemeClr val="accent1"/>
+          </a:effectRef>
+          <a:fontRef idx="minor">
+            <a:schemeClr val="lt1"/>
+          </a:fontRef>
+        </p:style>
+        <p:txBody>
+          <a:bodyPr rtlCol="0" anchor="ctr"/>
+          <a:lstStyle/>
+          <a:p>
+            <a:pPr algn="ctr"/>
+          </a:p>
+        </p:txBody>
+      </p:sp>
+      <p:sp>
+        <p:nvSpPr>
+          <p:cNvPr id="20" name="TextBox 19"/>
+          <p:cNvSpPr txBox="1"/>
+          <p:nvPr/>
+        </p:nvSpPr>
+        <p:spPr>
+          <a:xfrm>
+            <a:off x="685800" y="2313432"/>
+            <a:ext cx="1051560" cy="256032"/>
+          </a:xfrm>
+          <a:prstGeom prst="rect">
+            <a:avLst/>
+          </a:prstGeom>
+          <a:noFill/>
+        </p:spPr>
+        <p:txBody>
+          <a:bodyPr wrap="square"/>
+          <a:lstStyle/>
+          <a:p>
+            <a:pPr algn="l">
+              <a:defRPr sz="900" b="0">
+                <a:solidFill>
+                  <a:srgbClr val="374151"/>
+                </a:solidFill>
+                <a:latin typeface="Calibri"/>
+              </a:defRPr>
+            </a:pPr>
+            <a:r>
+              <a:t>Hybrid Ensemble</a:t>
+            </a:r>
+          </a:p>
+        </p:txBody>
+      </p:sp>
+      <p:sp>
+        <p:nvSpPr>
+          <p:cNvPr id="21" name="TextBox 20"/>
+          <p:cNvSpPr txBox="1"/>
+          <p:nvPr/>
+        </p:nvSpPr>
+        <p:spPr>
+          <a:xfrm>
+            <a:off x="1737360" y="2313432"/>
+            <a:ext cx="1051560" cy="256032"/>
+          </a:xfrm>
+          <a:prstGeom prst="rect">
+            <a:avLst/>
+          </a:prstGeom>
+          <a:noFill/>
+        </p:spPr>
+        <p:txBody>
+          <a:bodyPr wrap="square"/>
+          <a:lstStyle/>
+          <a:p>
+            <a:pPr algn="l">
+              <a:defRPr sz="900" b="0">
+                <a:solidFill>
+                  <a:srgbClr val="374151"/>
+                </a:solidFill>
+                <a:latin typeface="Calibri"/>
+              </a:defRPr>
+            </a:pPr>
+            <a:r>
+              <a:t>$51.0K</a:t>
+            </a:r>
+          </a:p>
+        </p:txBody>
+      </p:sp>
+      <p:sp>
+        <p:nvSpPr>
+          <p:cNvPr id="22" name="TextBox 21"/>
+          <p:cNvSpPr txBox="1"/>
+          <p:nvPr/>
+        </p:nvSpPr>
+        <p:spPr>
+          <a:xfrm>
+            <a:off x="2788920" y="2313432"/>
+            <a:ext cx="1051560" cy="256032"/>
+          </a:xfrm>
+          <a:prstGeom prst="rect">
+            <a:avLst/>
+          </a:prstGeom>
+          <a:noFill/>
+        </p:spPr>
+        <p:txBody>
+          <a:bodyPr wrap="square"/>
+          <a:lstStyle/>
+          <a:p>
+            <a:pPr algn="l">
+              <a:defRPr sz="900" b="0">
+                <a:solidFill>
+                  <a:srgbClr val="374151"/>
+                </a:solidFill>
+                <a:latin typeface="Calibri"/>
+              </a:defRPr>
+            </a:pPr>
+            <a:r>
+              <a:t>83%</a:t>
+            </a:r>
+          </a:p>
+        </p:txBody>
+      </p:sp>
+      <p:sp>
+        <p:nvSpPr>
+          <p:cNvPr id="23" name="TextBox 22"/>
+          <p:cNvSpPr txBox="1"/>
+          <p:nvPr/>
+        </p:nvSpPr>
+        <p:spPr>
+          <a:xfrm>
+            <a:off x="3840480" y="2313432"/>
+            <a:ext cx="1051560" cy="256032"/>
+          </a:xfrm>
+          <a:prstGeom prst="rect">
+            <a:avLst/>
+          </a:prstGeom>
+          <a:noFill/>
+        </p:spPr>
+        <p:txBody>
+          <a:bodyPr wrap="square"/>
+          <a:lstStyle/>
+          <a:p>
+            <a:pPr algn="l">
+              <a:defRPr sz="900" b="0">
+                <a:solidFill>
+                  <a:srgbClr val="374151"/>
+                </a:solidFill>
+                <a:latin typeface="Calibri"/>
+              </a:defRPr>
+            </a:pPr>
+            <a:r>
+              <a:t>5</a:t>
+            </a:r>
+          </a:p>
+        </p:txBody>
+      </p:sp>
+      <p:sp>
+        <p:nvSpPr>
+          <p:cNvPr id="24" name="TextBox 23"/>
+          <p:cNvSpPr txBox="1"/>
+          <p:nvPr/>
+        </p:nvSpPr>
+        <p:spPr>
+          <a:xfrm>
+            <a:off x="4892040" y="2313432"/>
+            <a:ext cx="1051560" cy="256032"/>
+          </a:xfrm>
+          <a:prstGeom prst="rect">
+            <a:avLst/>
+          </a:prstGeom>
+          <a:noFill/>
+        </p:spPr>
+        <p:txBody>
+          <a:bodyPr wrap="square"/>
+          <a:lstStyle/>
+          <a:p>
+            <a:pPr algn="l">
+              <a:defRPr sz="900" b="0">
+                <a:solidFill>
+                  <a:srgbClr val="374151"/>
+                </a:solidFill>
+                <a:latin typeface="Calibri"/>
+              </a:defRPr>
+            </a:pPr>
+            <a:r>
+              <a:t>$38</a:t>
+            </a:r>
+          </a:p>
+        </p:txBody>
+      </p:sp>
+      <p:sp>
+        <p:nvSpPr>
+          <p:cNvPr id="25" name="TextBox 24"/>
+          <p:cNvSpPr txBox="1"/>
+          <p:nvPr/>
+        </p:nvSpPr>
+        <p:spPr>
+          <a:xfrm>
+            <a:off x="5943600" y="2313432"/>
+            <a:ext cx="1051560" cy="256032"/>
+          </a:xfrm>
+          <a:prstGeom prst="rect">
+            <a:avLst/>
+          </a:prstGeom>
+          <a:noFill/>
+        </p:spPr>
+        <p:txBody>
+          <a:bodyPr wrap="square"/>
+          <a:lstStyle/>
+          <a:p>
+            <a:pPr algn="l">
+              <a:defRPr sz="900" b="0">
+                <a:solidFill>
+                  <a:srgbClr val="374151"/>
+                </a:solidFill>
+                <a:latin typeface="Calibri"/>
+              </a:defRPr>
+            </a:pPr>
+            <a:r>
+              <a:t>79.1%</a:t>
+            </a:r>
+          </a:p>
+        </p:txBody>
+      </p:sp>
+      <p:sp>
+        <p:nvSpPr>
+          <p:cNvPr id="26" name="Rectangle 25"/>
+          <p:cNvSpPr/>
+          <p:nvPr/>
+        </p:nvSpPr>
+        <p:spPr>
+          <a:xfrm>
+            <a:off x="685800" y="2542032"/>
+            <a:ext cx="6309360" cy="4572"/>
+          </a:xfrm>
+          <a:prstGeom prst="rect">
+            <a:avLst/>
+          </a:prstGeom>
+          <a:solidFill>
+            <a:srgbClr val="F3F4F6"/>
+          </a:solidFill>
+          <a:ln>
+            <a:noFill/>
+          </a:ln>
+        </p:spPr>
+        <p:style>
+          <a:lnRef idx="1">
+            <a:schemeClr val="accent1"/>
+          </a:lnRef>
+          <a:fillRef idx="3">
+            <a:schemeClr val="accent1"/>
+          </a:fillRef>
+          <a:effectRef idx="2">
+            <a:schemeClr val="accent1"/>
+          </a:effectRef>
+          <a:fontRef idx="minor">
+            <a:schemeClr val="lt1"/>
+          </a:fontRef>
+        </p:style>
+        <p:txBody>
+          <a:bodyPr rtlCol="0" anchor="ctr"/>
+          <a:lstStyle/>
+          <a:p>
+            <a:pPr algn="ctr"/>
+          </a:p>
+        </p:txBody>
+      </p:sp>
+      <p:sp>
+        <p:nvSpPr>
+          <p:cNvPr id="27" name="TextBox 26"/>
+          <p:cNvSpPr txBox="1"/>
+          <p:nvPr/>
+        </p:nvSpPr>
+        <p:spPr>
+          <a:xfrm>
+            <a:off x="685800" y="2569464"/>
+            <a:ext cx="1051560" cy="256032"/>
+          </a:xfrm>
+          <a:prstGeom prst="rect">
+            <a:avLst/>
+          </a:prstGeom>
+          <a:noFill/>
+        </p:spPr>
+        <p:txBody>
+          <a:bodyPr wrap="square"/>
+          <a:lstStyle/>
+          <a:p>
+            <a:pPr algn="l">
+              <a:defRPr sz="900" b="0">
+                <a:solidFill>
+                  <a:srgbClr val="374151"/>
+                </a:solidFill>
+                <a:latin typeface="Calibri"/>
+              </a:defRPr>
+            </a:pPr>
+            <a:r>
+              <a:t>GBDT Ranker</a:t>
+            </a:r>
+          </a:p>
+        </p:txBody>
+      </p:sp>
+      <p:sp>
+        <p:nvSpPr>
+          <p:cNvPr id="28" name="TextBox 27"/>
+          <p:cNvSpPr txBox="1"/>
+          <p:nvPr/>
+        </p:nvSpPr>
+        <p:spPr>
+          <a:xfrm>
+            <a:off x="1737360" y="2569464"/>
+            <a:ext cx="1051560" cy="256032"/>
+          </a:xfrm>
+          <a:prstGeom prst="rect">
+            <a:avLst/>
+          </a:prstGeom>
+          <a:noFill/>
+        </p:spPr>
+        <p:txBody>
+          <a:bodyPr wrap="square"/>
+          <a:lstStyle/>
+          <a:p>
+            <a:pPr algn="l">
+              <a:defRPr sz="900" b="0">
+                <a:solidFill>
+                  <a:srgbClr val="374151"/>
+                </a:solidFill>
+                <a:latin typeface="Calibri"/>
+              </a:defRPr>
+            </a:pPr>
+            <a:r>
+              <a:t>$45.8K</a:t>
+            </a:r>
+          </a:p>
+        </p:txBody>
+      </p:sp>
+      <p:sp>
+        <p:nvSpPr>
+          <p:cNvPr id="29" name="TextBox 28"/>
+          <p:cNvSpPr txBox="1"/>
+          <p:nvPr/>
+        </p:nvSpPr>
+        <p:spPr>
+          <a:xfrm>
+            <a:off x="2788920" y="2569464"/>
+            <a:ext cx="1051560" cy="256032"/>
+          </a:xfrm>
+          <a:prstGeom prst="rect">
+            <a:avLst/>
+          </a:prstGeom>
+          <a:noFill/>
+        </p:spPr>
+        <p:txBody>
+          <a:bodyPr wrap="square"/>
+          <a:lstStyle/>
+          <a:p>
+            <a:pPr algn="l">
+              <a:defRPr sz="900" b="0">
+                <a:solidFill>
+                  <a:srgbClr val="374151"/>
+                </a:solidFill>
+                <a:latin typeface="Calibri"/>
+              </a:defRPr>
+            </a:pPr>
+            <a:r>
+              <a:t>85%</a:t>
+            </a:r>
+          </a:p>
+        </p:txBody>
+      </p:sp>
+      <p:sp>
+        <p:nvSpPr>
+          <p:cNvPr id="30" name="TextBox 29"/>
+          <p:cNvSpPr txBox="1"/>
+          <p:nvPr/>
+        </p:nvSpPr>
+        <p:spPr>
+          <a:xfrm>
+            <a:off x="3840480" y="2569464"/>
+            <a:ext cx="1051560" cy="256032"/>
+          </a:xfrm>
+          <a:prstGeom prst="rect">
+            <a:avLst/>
+          </a:prstGeom>
+          <a:noFill/>
+        </p:spPr>
+        <p:txBody>
+          <a:bodyPr wrap="square"/>
+          <a:lstStyle/>
+          <a:p>
+            <a:pPr algn="l">
+              <a:defRPr sz="900" b="0">
+                <a:solidFill>
+                  <a:srgbClr val="374151"/>
+                </a:solidFill>
+                <a:latin typeface="Calibri"/>
+              </a:defRPr>
+            </a:pPr>
+            <a:r>
+              <a:t>4</a:t>
+            </a:r>
+          </a:p>
+        </p:txBody>
+      </p:sp>
+      <p:sp>
+        <p:nvSpPr>
+          <p:cNvPr id="31" name="TextBox 30"/>
+          <p:cNvSpPr txBox="1"/>
+          <p:nvPr/>
+        </p:nvSpPr>
+        <p:spPr>
+          <a:xfrm>
+            <a:off x="4892040" y="2569464"/>
+            <a:ext cx="1051560" cy="256032"/>
+          </a:xfrm>
+          <a:prstGeom prst="rect">
+            <a:avLst/>
+          </a:prstGeom>
+          <a:noFill/>
+        </p:spPr>
+        <p:txBody>
+          <a:bodyPr wrap="square"/>
+          <a:lstStyle/>
+          <a:p>
+            <a:pPr algn="l">
+              <a:defRPr sz="900" b="0">
+                <a:solidFill>
+                  <a:srgbClr val="374151"/>
+                </a:solidFill>
+                <a:latin typeface="Calibri"/>
+              </a:defRPr>
+            </a:pPr>
+            <a:r>
+              <a:t>$44</a:t>
+            </a:r>
+          </a:p>
+        </p:txBody>
+      </p:sp>
+      <p:sp>
+        <p:nvSpPr>
+          <p:cNvPr id="32" name="TextBox 31"/>
+          <p:cNvSpPr txBox="1"/>
+          <p:nvPr/>
+        </p:nvSpPr>
+        <p:spPr>
+          <a:xfrm>
+            <a:off x="5943600" y="2569464"/>
+            <a:ext cx="1051560" cy="256032"/>
+          </a:xfrm>
+          <a:prstGeom prst="rect">
+            <a:avLst/>
+          </a:prstGeom>
+          <a:noFill/>
+        </p:spPr>
+        <p:txBody>
+          <a:bodyPr wrap="square"/>
+          <a:lstStyle/>
+          <a:p>
+            <a:pPr algn="l">
+              <a:defRPr sz="900" b="0">
+                <a:solidFill>
+                  <a:srgbClr val="374151"/>
+                </a:solidFill>
+                <a:latin typeface="Calibri"/>
+              </a:defRPr>
+            </a:pPr>
+            <a:r>
+              <a:t>76.3%</a:t>
+            </a:r>
+          </a:p>
+        </p:txBody>
+      </p:sp>
+      <p:sp>
+        <p:nvSpPr>
+          <p:cNvPr id="33" name="Rectangle 32"/>
+          <p:cNvSpPr/>
+          <p:nvPr/>
+        </p:nvSpPr>
+        <p:spPr>
+          <a:xfrm>
+            <a:off x="685800" y="2798064"/>
+            <a:ext cx="6309360" cy="4572"/>
+          </a:xfrm>
+          <a:prstGeom prst="rect">
+            <a:avLst/>
+          </a:prstGeom>
+          <a:solidFill>
+            <a:srgbClr val="F3F4F6"/>
+          </a:solidFill>
+          <a:ln>
+            <a:noFill/>
+          </a:ln>
+        </p:spPr>
+        <p:style>
+          <a:lnRef idx="1">
+            <a:schemeClr val="accent1"/>
+          </a:lnRef>
+          <a:fillRef idx="3">
+            <a:schemeClr val="accent1"/>
+          </a:fillRef>
+          <a:effectRef idx="2">
+            <a:schemeClr val="accent1"/>
+          </a:effectRef>
+          <a:fontRef idx="minor">
+            <a:schemeClr val="lt1"/>
+          </a:fontRef>
+        </p:style>
+        <p:txBody>
+          <a:bodyPr rtlCol="0" anchor="ctr"/>
+          <a:lstStyle/>
+          <a:p>
+            <a:pPr algn="ctr"/>
+          </a:p>
+        </p:txBody>
+      </p:sp>
+      <p:sp>
+        <p:nvSpPr>
+          <p:cNvPr id="34" name="TextBox 33"/>
+          <p:cNvSpPr txBox="1"/>
+          <p:nvPr/>
+        </p:nvSpPr>
+        <p:spPr>
+          <a:xfrm>
+            <a:off x="685800" y="2825496"/>
+            <a:ext cx="1051560" cy="256032"/>
+          </a:xfrm>
+          <a:prstGeom prst="rect">
+            <a:avLst/>
+          </a:prstGeom>
+          <a:noFill/>
+        </p:spPr>
+        <p:txBody>
+          <a:bodyPr wrap="square"/>
+          <a:lstStyle/>
+          <a:p>
+            <a:pPr algn="l">
+              <a:defRPr sz="900" b="0">
+                <a:solidFill>
+                  <a:srgbClr val="374151"/>
+                </a:solidFill>
+                <a:latin typeface="Calibri"/>
+              </a:defRPr>
+            </a:pPr>
+            <a:r>
+              <a:t>DLRM Deep Model</a:t>
+            </a:r>
+          </a:p>
+        </p:txBody>
+      </p:sp>
+      <p:sp>
+        <p:nvSpPr>
+          <p:cNvPr id="35" name="TextBox 34"/>
+          <p:cNvSpPr txBox="1"/>
+          <p:nvPr/>
+        </p:nvSpPr>
+        <p:spPr>
+          <a:xfrm>
+            <a:off x="1737360" y="2825496"/>
+            <a:ext cx="1051560" cy="256032"/>
+          </a:xfrm>
+          <a:prstGeom prst="rect">
+            <a:avLst/>
+          </a:prstGeom>
+          <a:noFill/>
+        </p:spPr>
+        <p:txBody>
+          <a:bodyPr wrap="square"/>
+          <a:lstStyle/>
+          <a:p>
+            <a:pPr algn="l">
+              <a:defRPr sz="900" b="0">
+                <a:solidFill>
+                  <a:srgbClr val="374151"/>
+                </a:solidFill>
+                <a:latin typeface="Calibri"/>
+              </a:defRPr>
+            </a:pPr>
+            <a:r>
+              <a:t>$52.1K</a:t>
+            </a:r>
+          </a:p>
+        </p:txBody>
+      </p:sp>
+      <p:sp>
+        <p:nvSpPr>
+          <p:cNvPr id="36" name="TextBox 35"/>
+          <p:cNvSpPr txBox="1"/>
+          <p:nvPr/>
+        </p:nvSpPr>
+        <p:spPr>
+          <a:xfrm>
+            <a:off x="2788920" y="2825496"/>
+            <a:ext cx="1051560" cy="256032"/>
+          </a:xfrm>
+          <a:prstGeom prst="rect">
+            <a:avLst/>
+          </a:prstGeom>
+          <a:noFill/>
+        </p:spPr>
+        <p:txBody>
+          <a:bodyPr wrap="square"/>
+          <a:lstStyle/>
+          <a:p>
+            <a:pPr algn="l">
+              <a:defRPr sz="900" b="0">
+                <a:solidFill>
+                  <a:srgbClr val="374151"/>
+                </a:solidFill>
+                <a:latin typeface="Calibri"/>
+              </a:defRPr>
+            </a:pPr>
+            <a:r>
+              <a:t>78%</a:t>
+            </a:r>
+          </a:p>
+        </p:txBody>
+      </p:sp>
+      <p:sp>
+        <p:nvSpPr>
+          <p:cNvPr id="37" name="TextBox 36"/>
+          <p:cNvSpPr txBox="1"/>
+          <p:nvPr/>
+        </p:nvSpPr>
+        <p:spPr>
+          <a:xfrm>
+            <a:off x="3840480" y="2825496"/>
+            <a:ext cx="1051560" cy="256032"/>
+          </a:xfrm>
+          <a:prstGeom prst="rect">
+            <a:avLst/>
+          </a:prstGeom>
+          <a:noFill/>
+        </p:spPr>
+        <p:txBody>
+          <a:bodyPr wrap="square"/>
+          <a:lstStyle/>
+          <a:p>
+            <a:pPr algn="l">
+              <a:defRPr sz="900" b="0">
+                <a:solidFill>
+                  <a:srgbClr val="374151"/>
+                </a:solidFill>
+                <a:latin typeface="Calibri"/>
+              </a:defRPr>
+            </a:pPr>
+            <a:r>
+              <a:t>7</a:t>
+            </a:r>
+          </a:p>
+        </p:txBody>
+      </p:sp>
+      <p:sp>
+        <p:nvSpPr>
+          <p:cNvPr id="38" name="TextBox 37"/>
+          <p:cNvSpPr txBox="1"/>
+          <p:nvPr/>
+        </p:nvSpPr>
+        <p:spPr>
+          <a:xfrm>
+            <a:off x="4892040" y="2825496"/>
+            <a:ext cx="1051560" cy="256032"/>
+          </a:xfrm>
+          <a:prstGeom prst="rect">
+            <a:avLst/>
+          </a:prstGeom>
+          <a:noFill/>
+        </p:spPr>
+        <p:txBody>
+          <a:bodyPr wrap="square"/>
+          <a:lstStyle/>
+          <a:p>
+            <a:pPr algn="l">
+              <a:defRPr sz="900" b="0">
+                <a:solidFill>
+                  <a:srgbClr val="374151"/>
+                </a:solidFill>
+                <a:latin typeface="Calibri"/>
+              </a:defRPr>
+            </a:pPr>
+            <a:r>
+              <a:t>$36</a:t>
+            </a:r>
+          </a:p>
+        </p:txBody>
+      </p:sp>
+      <p:sp>
+        <p:nvSpPr>
+          <p:cNvPr id="39" name="TextBox 38"/>
+          <p:cNvSpPr txBox="1"/>
+          <p:nvPr/>
+        </p:nvSpPr>
+        <p:spPr>
+          <a:xfrm>
+            <a:off x="5943600" y="2825496"/>
+            <a:ext cx="1051560" cy="256032"/>
+          </a:xfrm>
+          <a:prstGeom prst="rect">
+            <a:avLst/>
+          </a:prstGeom>
+          <a:noFill/>
+        </p:spPr>
+        <p:txBody>
+          <a:bodyPr wrap="square"/>
+          <a:lstStyle/>
+          <a:p>
+            <a:pPr algn="l">
+              <a:defRPr sz="900" b="0">
+                <a:solidFill>
+                  <a:srgbClr val="374151"/>
+                </a:solidFill>
+                <a:latin typeface="Calibri"/>
+              </a:defRPr>
+            </a:pPr>
+            <a:r>
+              <a:t>73.8%</a:t>
+            </a:r>
+          </a:p>
+        </p:txBody>
+      </p:sp>
+      <p:sp>
+        <p:nvSpPr>
+          <p:cNvPr id="40" name="Rectangle 39"/>
+          <p:cNvSpPr/>
+          <p:nvPr/>
+        </p:nvSpPr>
+        <p:spPr>
+          <a:xfrm>
+            <a:off x="685800" y="3054096"/>
+            <a:ext cx="6309360" cy="4572"/>
+          </a:xfrm>
+          <a:prstGeom prst="rect">
+            <a:avLst/>
+          </a:prstGeom>
+          <a:solidFill>
+            <a:srgbClr val="F3F4F6"/>
+          </a:solidFill>
+          <a:ln>
+            <a:noFill/>
+          </a:ln>
+        </p:spPr>
+        <p:style>
+          <a:lnRef idx="1">
+            <a:schemeClr val="accent1"/>
+          </a:lnRef>
+          <a:fillRef idx="3">
+            <a:schemeClr val="accent1"/>
+          </a:fillRef>
+          <a:effectRef idx="2">
+            <a:schemeClr val="accent1"/>
+          </a:effectRef>
+          <a:fontRef idx="minor">
+            <a:schemeClr val="lt1"/>
+          </a:fontRef>
+        </p:style>
+        <p:txBody>
+          <a:bodyPr rtlCol="0" anchor="ctr"/>
+          <a:lstStyle/>
+          <a:p>
+            <a:pPr algn="ctr"/>
+          </a:p>
+        </p:txBody>
+      </p:sp>
+      <p:sp>
+        <p:nvSpPr>
+          <p:cNvPr id="41" name="TextBox 40"/>
+          <p:cNvSpPr txBox="1"/>
+          <p:nvPr/>
+        </p:nvSpPr>
+        <p:spPr>
+          <a:xfrm>
+            <a:off x="685800" y="3081528"/>
+            <a:ext cx="1051560" cy="256032"/>
+          </a:xfrm>
+          <a:prstGeom prst="rect">
+            <a:avLst/>
+          </a:prstGeom>
+          <a:noFill/>
+        </p:spPr>
+        <p:txBody>
+          <a:bodyPr wrap="square"/>
+          <a:lstStyle/>
+          <a:p>
+            <a:pPr algn="l">
+              <a:defRPr sz="900" b="0">
+                <a:solidFill>
+                  <a:srgbClr val="374151"/>
+                </a:solidFill>
+                <a:latin typeface="Calibri"/>
+              </a:defRPr>
+            </a:pPr>
+            <a:r>
+              <a:t>Contextual Bandit</a:t>
+            </a:r>
+          </a:p>
+        </p:txBody>
+      </p:sp>
+      <p:sp>
+        <p:nvSpPr>
+          <p:cNvPr id="42" name="TextBox 41"/>
+          <p:cNvSpPr txBox="1"/>
+          <p:nvPr/>
+        </p:nvSpPr>
+        <p:spPr>
+          <a:xfrm>
+            <a:off x="1737360" y="3081528"/>
+            <a:ext cx="1051560" cy="256032"/>
+          </a:xfrm>
+          <a:prstGeom prst="rect">
+            <a:avLst/>
+          </a:prstGeom>
+          <a:noFill/>
+        </p:spPr>
+        <p:txBody>
+          <a:bodyPr wrap="square"/>
+          <a:lstStyle/>
+          <a:p>
+            <a:pPr algn="l">
+              <a:defRPr sz="900" b="0">
+                <a:solidFill>
+                  <a:srgbClr val="374151"/>
+                </a:solidFill>
+                <a:latin typeface="Calibri"/>
+              </a:defRPr>
+            </a:pPr>
+            <a:r>
+              <a:t>$38.4K</a:t>
+            </a:r>
+          </a:p>
+        </p:txBody>
+      </p:sp>
+      <p:sp>
+        <p:nvSpPr>
+          <p:cNvPr id="43" name="TextBox 42"/>
+          <p:cNvSpPr txBox="1"/>
+          <p:nvPr/>
+        </p:nvSpPr>
+        <p:spPr>
+          <a:xfrm>
+            <a:off x="2788920" y="3081528"/>
+            <a:ext cx="1051560" cy="256032"/>
+          </a:xfrm>
+          <a:prstGeom prst="rect">
+            <a:avLst/>
+          </a:prstGeom>
+          <a:noFill/>
+        </p:spPr>
+        <p:txBody>
+          <a:bodyPr wrap="square"/>
+          <a:lstStyle/>
+          <a:p>
+            <a:pPr algn="l">
+              <a:defRPr sz="900" b="0">
+                <a:solidFill>
+                  <a:srgbClr val="374151"/>
+                </a:solidFill>
+                <a:latin typeface="Calibri"/>
+              </a:defRPr>
+            </a:pPr>
+            <a:r>
+              <a:t>81%</a:t>
+            </a:r>
+          </a:p>
+        </p:txBody>
+      </p:sp>
+      <p:sp>
+        <p:nvSpPr>
+          <p:cNvPr id="44" name="TextBox 43"/>
+          <p:cNvSpPr txBox="1"/>
+          <p:nvPr/>
+        </p:nvSpPr>
+        <p:spPr>
+          <a:xfrm>
+            <a:off x="3840480" y="3081528"/>
+            <a:ext cx="1051560" cy="256032"/>
+          </a:xfrm>
+          <a:prstGeom prst="rect">
+            <a:avLst/>
+          </a:prstGeom>
+          <a:noFill/>
+        </p:spPr>
+        <p:txBody>
+          <a:bodyPr wrap="square"/>
+          <a:lstStyle/>
+          <a:p>
+            <a:pPr algn="l">
+              <a:defRPr sz="900" b="0">
+                <a:solidFill>
+                  <a:srgbClr val="374151"/>
+                </a:solidFill>
+                <a:latin typeface="Calibri"/>
+              </a:defRPr>
+            </a:pPr>
+            <a:r>
+              <a:t>6</a:t>
+            </a:r>
+          </a:p>
+        </p:txBody>
+      </p:sp>
+      <p:sp>
+        <p:nvSpPr>
+          <p:cNvPr id="45" name="TextBox 44"/>
+          <p:cNvSpPr txBox="1"/>
+          <p:nvPr/>
+        </p:nvSpPr>
+        <p:spPr>
+          <a:xfrm>
+            <a:off x="4892040" y="3081528"/>
+            <a:ext cx="1051560" cy="256032"/>
+          </a:xfrm>
+          <a:prstGeom prst="rect">
+            <a:avLst/>
+          </a:prstGeom>
+          <a:noFill/>
+        </p:spPr>
+        <p:txBody>
+          <a:bodyPr wrap="square"/>
+          <a:lstStyle/>
+          <a:p>
+            <a:pPr algn="l">
+              <a:defRPr sz="900" b="0">
+                <a:solidFill>
+                  <a:srgbClr val="374151"/>
+                </a:solidFill>
+                <a:latin typeface="Calibri"/>
+              </a:defRPr>
+            </a:pPr>
+            <a:r>
+              <a:t>$51</a:t>
+            </a:r>
+          </a:p>
+        </p:txBody>
+      </p:sp>
+      <p:sp>
+        <p:nvSpPr>
+          <p:cNvPr id="46" name="TextBox 45"/>
+          <p:cNvSpPr txBox="1"/>
+          <p:nvPr/>
+        </p:nvSpPr>
+        <p:spPr>
+          <a:xfrm>
+            <a:off x="5943600" y="3081528"/>
+            <a:ext cx="1051560" cy="256032"/>
+          </a:xfrm>
+          <a:prstGeom prst="rect">
+            <a:avLst/>
+          </a:prstGeom>
+          <a:noFill/>
+        </p:spPr>
+        <p:txBody>
+          <a:bodyPr wrap="square"/>
+          <a:lstStyle/>
+          <a:p>
+            <a:pPr algn="l">
+              <a:defRPr sz="900" b="0">
+                <a:solidFill>
+                  <a:srgbClr val="374151"/>
+                </a:solidFill>
+                <a:latin typeface="Calibri"/>
+              </a:defRPr>
+            </a:pPr>
+            <a:r>
+              <a:t>68.5%</a:t>
+            </a:r>
+          </a:p>
+        </p:txBody>
+      </p:sp>
+      <p:sp>
+        <p:nvSpPr>
+          <p:cNvPr id="47" name="Rectangle 46"/>
+          <p:cNvSpPr/>
+          <p:nvPr/>
+        </p:nvSpPr>
+        <p:spPr>
+          <a:xfrm>
+            <a:off x="685800" y="3310128"/>
+            <a:ext cx="6309360" cy="4572"/>
+          </a:xfrm>
+          <a:prstGeom prst="rect">
+            <a:avLst/>
+          </a:prstGeom>
+          <a:solidFill>
+            <a:srgbClr val="F3F4F6"/>
+          </a:solidFill>
+          <a:ln>
+            <a:noFill/>
+          </a:ln>
+        </p:spPr>
+        <p:style>
+          <a:lnRef idx="1">
+            <a:schemeClr val="accent1"/>
+          </a:lnRef>
+          <a:fillRef idx="3">
+            <a:schemeClr val="accent1"/>
+          </a:fillRef>
+          <a:effectRef idx="2">
+            <a:schemeClr val="accent1"/>
+          </a:effectRef>
+          <a:fontRef idx="minor">
+            <a:schemeClr val="lt1"/>
+          </a:fontRef>
+        </p:style>
+        <p:txBody>
+          <a:bodyPr rtlCol="0" anchor="ctr"/>
+          <a:lstStyle/>
+          <a:p>
+            <a:pPr algn="ctr"/>
+          </a:p>
+        </p:txBody>
+      </p:sp>
+      <p:sp>
+        <p:nvSpPr>
+          <p:cNvPr id="48" name="TextBox 47"/>
+          <p:cNvSpPr txBox="1"/>
+          <p:nvPr/>
+        </p:nvSpPr>
+        <p:spPr>
+          <a:xfrm>
+            <a:off x="685800" y="3337560"/>
+            <a:ext cx="1051560" cy="256032"/>
+          </a:xfrm>
+          <a:prstGeom prst="rect">
+            <a:avLst/>
+          </a:prstGeom>
+          <a:noFill/>
+        </p:spPr>
+        <p:txBody>
+          <a:bodyPr wrap="square"/>
+          <a:lstStyle/>
+          <a:p>
+            <a:pPr algn="l">
+              <a:defRPr sz="900" b="0">
+                <a:solidFill>
+                  <a:srgbClr val="374151"/>
+                </a:solidFill>
+                <a:latin typeface="Calibri"/>
+              </a:defRPr>
+            </a:pPr>
+            <a:r>
+              <a:t>Two-Tower (ANN)</a:t>
+            </a:r>
+          </a:p>
+        </p:txBody>
+      </p:sp>
+      <p:sp>
+        <p:nvSpPr>
+          <p:cNvPr id="49" name="TextBox 48"/>
+          <p:cNvSpPr txBox="1"/>
+          <p:nvPr/>
+        </p:nvSpPr>
+        <p:spPr>
+          <a:xfrm>
+            <a:off x="1737360" y="3337560"/>
+            <a:ext cx="1051560" cy="256032"/>
+          </a:xfrm>
+          <a:prstGeom prst="rect">
+            <a:avLst/>
+          </a:prstGeom>
+          <a:noFill/>
+        </p:spPr>
+        <p:txBody>
+          <a:bodyPr wrap="square"/>
+          <a:lstStyle/>
+          <a:p>
+            <a:pPr algn="l">
+              <a:defRPr sz="900" b="0">
+                <a:solidFill>
+                  <a:srgbClr val="374151"/>
+                </a:solidFill>
+                <a:latin typeface="Calibri"/>
+              </a:defRPr>
+            </a:pPr>
+            <a:r>
+              <a:t>$35.9K</a:t>
+            </a:r>
+          </a:p>
+        </p:txBody>
+      </p:sp>
+      <p:sp>
+        <p:nvSpPr>
+          <p:cNvPr id="50" name="TextBox 49"/>
+          <p:cNvSpPr txBox="1"/>
+          <p:nvPr/>
+        </p:nvSpPr>
+        <p:spPr>
+          <a:xfrm>
+            <a:off x="2788920" y="3337560"/>
+            <a:ext cx="1051560" cy="256032"/>
+          </a:xfrm>
+          <a:prstGeom prst="rect">
+            <a:avLst/>
+          </a:prstGeom>
+          <a:noFill/>
+        </p:spPr>
+        <p:txBody>
+          <a:bodyPr wrap="square"/>
+          <a:lstStyle/>
+          <a:p>
+            <a:pPr algn="l">
+              <a:defRPr sz="900" b="0">
+                <a:solidFill>
+                  <a:srgbClr val="374151"/>
+                </a:solidFill>
+                <a:latin typeface="Calibri"/>
+              </a:defRPr>
+            </a:pPr>
+            <a:r>
+              <a:t>79%</a:t>
+            </a:r>
+          </a:p>
+        </p:txBody>
+      </p:sp>
+      <p:sp>
+        <p:nvSpPr>
+          <p:cNvPr id="51" name="TextBox 50"/>
+          <p:cNvSpPr txBox="1"/>
+          <p:nvPr/>
+        </p:nvSpPr>
+        <p:spPr>
+          <a:xfrm>
+            <a:off x="3840480" y="3337560"/>
+            <a:ext cx="1051560" cy="256032"/>
+          </a:xfrm>
+          <a:prstGeom prst="rect">
+            <a:avLst/>
+          </a:prstGeom>
+          <a:noFill/>
+        </p:spPr>
+        <p:txBody>
+          <a:bodyPr wrap="square"/>
+          <a:lstStyle/>
+          <a:p>
+            <a:pPr algn="l">
+              <a:defRPr sz="900" b="0">
+                <a:solidFill>
+                  <a:srgbClr val="374151"/>
+                </a:solidFill>
+                <a:latin typeface="Calibri"/>
+              </a:defRPr>
+            </a:pPr>
+            <a:r>
+              <a:t>8</a:t>
+            </a:r>
+          </a:p>
+        </p:txBody>
+      </p:sp>
+      <p:sp>
+        <p:nvSpPr>
+          <p:cNvPr id="52" name="TextBox 51"/>
+          <p:cNvSpPr txBox="1"/>
+          <p:nvPr/>
+        </p:nvSpPr>
+        <p:spPr>
+          <a:xfrm>
+            <a:off x="4892040" y="3337560"/>
+            <a:ext cx="1051560" cy="256032"/>
+          </a:xfrm>
+          <a:prstGeom prst="rect">
+            <a:avLst/>
+          </a:prstGeom>
+          <a:noFill/>
+        </p:spPr>
+        <p:txBody>
+          <a:bodyPr wrap="square"/>
+          <a:lstStyle/>
+          <a:p>
+            <a:pPr algn="l">
+              <a:defRPr sz="900" b="0">
+                <a:solidFill>
+                  <a:srgbClr val="374151"/>
+                </a:solidFill>
+                <a:latin typeface="Calibri"/>
+              </a:defRPr>
+            </a:pPr>
+            <a:r>
+              <a:t>$55</a:t>
+            </a:r>
+          </a:p>
+        </p:txBody>
+      </p:sp>
+      <p:sp>
+        <p:nvSpPr>
+          <p:cNvPr id="53" name="TextBox 52"/>
+          <p:cNvSpPr txBox="1"/>
+          <p:nvPr/>
+        </p:nvSpPr>
+        <p:spPr>
+          <a:xfrm>
+            <a:off x="5943600" y="3337560"/>
+            <a:ext cx="1051560" cy="256032"/>
+          </a:xfrm>
+          <a:prstGeom prst="rect">
+            <a:avLst/>
+          </a:prstGeom>
+          <a:noFill/>
+        </p:spPr>
+        <p:txBody>
+          <a:bodyPr wrap="square"/>
+          <a:lstStyle/>
+          <a:p>
+            <a:pPr algn="l">
+              <a:defRPr sz="900" b="0">
+                <a:solidFill>
+                  <a:srgbClr val="374151"/>
+                </a:solidFill>
+                <a:latin typeface="Calibri"/>
+              </a:defRPr>
+            </a:pPr>
+            <a:r>
+              <a:t>62.1%</a:t>
+            </a:r>
+          </a:p>
+        </p:txBody>
+      </p:sp>
+      <p:sp>
+        <p:nvSpPr>
+          <p:cNvPr id="54" name="Rectangle 53"/>
+          <p:cNvSpPr/>
+          <p:nvPr/>
+        </p:nvSpPr>
+        <p:spPr>
+          <a:xfrm>
+            <a:off x="685800" y="3566160"/>
+            <a:ext cx="6309360" cy="4572"/>
+          </a:xfrm>
+          <a:prstGeom prst="rect">
+            <a:avLst/>
+          </a:prstGeom>
+          <a:solidFill>
+            <a:srgbClr val="F3F4F6"/>
+          </a:solidFill>
+          <a:ln>
+            <a:noFill/>
+          </a:ln>
+        </p:spPr>
+        <p:style>
+          <a:lnRef idx="1">
+            <a:schemeClr val="accent1"/>
+          </a:lnRef>
+          <a:fillRef idx="3">
+            <a:schemeClr val="accent1"/>
+          </a:fillRef>
+          <a:effectRef idx="2">
+            <a:schemeClr val="accent1"/>
+          </a:effectRef>
+          <a:fontRef idx="minor">
+            <a:schemeClr val="lt1"/>
+          </a:fontRef>
+        </p:style>
+        <p:txBody>
+          <a:bodyPr rtlCol="0" anchor="ctr"/>
+          <a:lstStyle/>
+          <a:p>
+            <a:pPr algn="ctr"/>
+          </a:p>
+        </p:txBody>
+      </p:sp>
+      <p:sp>
+        <p:nvSpPr>
+          <p:cNvPr id="55" name="Rectangle 54"/>
+          <p:cNvSpPr/>
+          <p:nvPr/>
+        </p:nvSpPr>
+        <p:spPr>
+          <a:xfrm>
+            <a:off x="7498079" y="1371600"/>
+            <a:ext cx="4114800" cy="2926080"/>
+          </a:xfrm>
+          <a:prstGeom prst="rect">
+            <a:avLst/>
+          </a:prstGeom>
+          <a:solidFill>
+            <a:srgbClr val="FFFFFF"/>
+          </a:solidFill>
+          <a:ln>
+            <a:noFill/>
+          </a:ln>
+        </p:spPr>
+        <p:style>
+          <a:lnRef idx="1">
+            <a:schemeClr val="accent1"/>
+          </a:lnRef>
+          <a:fillRef idx="3">
+            <a:schemeClr val="accent1"/>
+          </a:fillRef>
+          <a:effectRef idx="2">
+            <a:schemeClr val="accent1"/>
+          </a:effectRef>
+          <a:fontRef idx="minor">
+            <a:schemeClr val="lt1"/>
+          </a:fontRef>
+        </p:style>
+        <p:txBody>
+          <a:bodyPr rtlCol="0" anchor="ctr"/>
+          <a:lstStyle/>
+          <a:p>
+            <a:pPr algn="ctr"/>
+          </a:p>
+        </p:txBody>
+      </p:sp>
+      <p:sp>
+        <p:nvSpPr>
+          <p:cNvPr id="56" name="TextBox 55"/>
+          <p:cNvSpPr txBox="1"/>
+          <p:nvPr/>
+        </p:nvSpPr>
+        <p:spPr>
+          <a:xfrm>
+            <a:off x="7680960" y="1463040"/>
+            <a:ext cx="3657600" cy="274320"/>
+          </a:xfrm>
+          <a:prstGeom prst="rect">
+            <a:avLst/>
+          </a:prstGeom>
+          <a:noFill/>
+        </p:spPr>
+        <p:txBody>
+          <a:bodyPr wrap="square"/>
+          <a:lstStyle/>
+          <a:p>
+            <a:pPr algn="l">
+              <a:defRPr sz="1200" b="1">
+                <a:solidFill>
+                  <a:srgbClr val="111827"/>
+                </a:solidFill>
+                <a:latin typeface="Calibri"/>
+              </a:defRPr>
+            </a:pPr>
+            <a:r>
+              <a:t>Finance Sub-Verticals</a:t>
+            </a:r>
+          </a:p>
+        </p:txBody>
+      </p:sp>
+      <p:sp>
+        <p:nvSpPr>
+          <p:cNvPr id="57" name="Rectangle 56"/>
+          <p:cNvSpPr/>
+          <p:nvPr/>
+        </p:nvSpPr>
+        <p:spPr>
+          <a:xfrm>
+            <a:off x="7680960" y="1920240"/>
+            <a:ext cx="54864" cy="320040"/>
+          </a:xfrm>
+          <a:prstGeom prst="rect">
+            <a:avLst/>
+          </a:prstGeom>
+          <a:solidFill>
+            <a:srgbClr val="1D4ED8"/>
+          </a:solidFill>
+          <a:ln>
+            <a:noFill/>
+          </a:ln>
+        </p:spPr>
+        <p:style>
+          <a:lnRef idx="1">
+            <a:schemeClr val="accent1"/>
+          </a:lnRef>
+          <a:fillRef idx="3">
+            <a:schemeClr val="accent1"/>
+          </a:fillRef>
+          <a:effectRef idx="2">
+            <a:schemeClr val="accent1"/>
+          </a:effectRef>
+          <a:fontRef idx="minor">
+            <a:schemeClr val="lt1"/>
+          </a:fontRef>
+        </p:style>
+        <p:txBody>
+          <a:bodyPr rtlCol="0" anchor="ctr"/>
+          <a:lstStyle/>
+          <a:p>
+            <a:pPr algn="ctr"/>
+          </a:p>
+        </p:txBody>
+      </p:sp>
+      <p:sp>
+        <p:nvSpPr>
+          <p:cNvPr id="58" name="TextBox 57"/>
+          <p:cNvSpPr txBox="1"/>
+          <p:nvPr/>
+        </p:nvSpPr>
+        <p:spPr>
+          <a:xfrm>
+            <a:off x="7863840" y="1920240"/>
+            <a:ext cx="1828800" cy="182880"/>
+          </a:xfrm>
+          <a:prstGeom prst="rect">
+            <a:avLst/>
+          </a:prstGeom>
+          <a:noFill/>
+        </p:spPr>
+        <p:txBody>
+          <a:bodyPr wrap="square"/>
+          <a:lstStyle/>
+          <a:p>
+            <a:pPr algn="l">
+              <a:defRPr sz="1000" b="1">
+                <a:solidFill>
+                  <a:srgbClr val="1D4ED8"/>
+                </a:solidFill>
+                <a:latin typeface="Calibri"/>
+              </a:defRPr>
+            </a:pPr>
+            <a:r>
+              <a:t>Credit Cards</a:t>
+            </a:r>
+          </a:p>
+        </p:txBody>
+      </p:sp>
+      <p:sp>
+        <p:nvSpPr>
+          <p:cNvPr id="59" name="TextBox 58"/>
+          <p:cNvSpPr txBox="1"/>
+          <p:nvPr/>
+        </p:nvSpPr>
+        <p:spPr>
+          <a:xfrm>
+            <a:off x="7863840" y="2103120"/>
+            <a:ext cx="3474720" cy="182880"/>
+          </a:xfrm>
+          <a:prstGeom prst="rect">
+            <a:avLst/>
+          </a:prstGeom>
+          <a:noFill/>
+        </p:spPr>
+        <p:txBody>
+          <a:bodyPr wrap="square"/>
+          <a:lstStyle/>
+          <a:p>
+            <a:pPr algn="l">
+              <a:defRPr sz="800" b="0">
+                <a:solidFill>
+                  <a:srgbClr val="6B7280"/>
+                </a:solidFill>
+                <a:latin typeface="Calibri"/>
+              </a:defRPr>
+            </a:pPr>
+            <a:r>
+              <a:t>Trust: 85% · Reg Risk: 40% · Window: 21d</a:t>
+            </a:r>
+          </a:p>
+        </p:txBody>
+      </p:sp>
+      <p:sp>
+        <p:nvSpPr>
+          <p:cNvPr id="60" name="Rectangle 59"/>
+          <p:cNvSpPr/>
+          <p:nvPr/>
+        </p:nvSpPr>
+        <p:spPr>
+          <a:xfrm>
+            <a:off x="7680960" y="2377440"/>
+            <a:ext cx="54864" cy="320040"/>
+          </a:xfrm>
+          <a:prstGeom prst="rect">
+            <a:avLst/>
+          </a:prstGeom>
+          <a:solidFill>
+            <a:srgbClr val="0891B2"/>
+          </a:solidFill>
+          <a:ln>
+            <a:noFill/>
+          </a:ln>
+        </p:spPr>
+        <p:style>
+          <a:lnRef idx="1">
+            <a:schemeClr val="accent1"/>
+          </a:lnRef>
+          <a:fillRef idx="3">
+            <a:schemeClr val="accent1"/>
+          </a:fillRef>
+          <a:effectRef idx="2">
+            <a:schemeClr val="accent1"/>
+          </a:effectRef>
+          <a:fontRef idx="minor">
+            <a:schemeClr val="lt1"/>
+          </a:fontRef>
+        </p:style>
+        <p:txBody>
+          <a:bodyPr rtlCol="0" anchor="ctr"/>
+          <a:lstStyle/>
+          <a:p>
+            <a:pPr algn="ctr"/>
+          </a:p>
+        </p:txBody>
+      </p:sp>
+      <p:sp>
+        <p:nvSpPr>
+          <p:cNvPr id="61" name="TextBox 60"/>
+          <p:cNvSpPr txBox="1"/>
+          <p:nvPr/>
+        </p:nvSpPr>
+        <p:spPr>
+          <a:xfrm>
+            <a:off x="7863840" y="2377440"/>
+            <a:ext cx="1828800" cy="182880"/>
+          </a:xfrm>
+          <a:prstGeom prst="rect">
+            <a:avLst/>
+          </a:prstGeom>
+          <a:noFill/>
+        </p:spPr>
+        <p:txBody>
+          <a:bodyPr wrap="square"/>
+          <a:lstStyle/>
+          <a:p>
+            <a:pPr algn="l">
+              <a:defRPr sz="1000" b="1">
+                <a:solidFill>
+                  <a:srgbClr val="0891B2"/>
+                </a:solidFill>
+                <a:latin typeface="Calibri"/>
+              </a:defRPr>
+            </a:pPr>
+            <a:r>
+              <a:t>Personal Loans</a:t>
+            </a:r>
+          </a:p>
+        </p:txBody>
+      </p:sp>
+      <p:sp>
+        <p:nvSpPr>
+          <p:cNvPr id="62" name="TextBox 61"/>
+          <p:cNvSpPr txBox="1"/>
+          <p:nvPr/>
+        </p:nvSpPr>
+        <p:spPr>
+          <a:xfrm>
+            <a:off x="7863840" y="2560320"/>
+            <a:ext cx="3474720" cy="182880"/>
+          </a:xfrm>
+          <a:prstGeom prst="rect">
+            <a:avLst/>
+          </a:prstGeom>
+          <a:noFill/>
+        </p:spPr>
+        <p:txBody>
+          <a:bodyPr wrap="square"/>
+          <a:lstStyle/>
+          <a:p>
+            <a:pPr algn="l">
+              <a:defRPr sz="800" b="0">
+                <a:solidFill>
+                  <a:srgbClr val="6B7280"/>
+                </a:solidFill>
+                <a:latin typeface="Calibri"/>
+              </a:defRPr>
+            </a:pPr>
+            <a:r>
+              <a:t>Trust: 90% · Reg Risk: 55% · Window: 30d</a:t>
+            </a:r>
+          </a:p>
+        </p:txBody>
+      </p:sp>
+      <p:sp>
+        <p:nvSpPr>
+          <p:cNvPr id="63" name="Rectangle 62"/>
+          <p:cNvSpPr/>
+          <p:nvPr/>
+        </p:nvSpPr>
+        <p:spPr>
+          <a:xfrm>
+            <a:off x="7680960" y="2834640"/>
+            <a:ext cx="54864" cy="320040"/>
+          </a:xfrm>
+          <a:prstGeom prst="rect">
+            <a:avLst/>
+          </a:prstGeom>
+          <a:solidFill>
+            <a:srgbClr val="16A34A"/>
+          </a:solidFill>
+          <a:ln>
+            <a:noFill/>
+          </a:ln>
+        </p:spPr>
+        <p:style>
+          <a:lnRef idx="1">
+            <a:schemeClr val="accent1"/>
+          </a:lnRef>
+          <a:fillRef idx="3">
+            <a:schemeClr val="accent1"/>
+          </a:fillRef>
+          <a:effectRef idx="2">
+            <a:schemeClr val="accent1"/>
+          </a:effectRef>
+          <a:fontRef idx="minor">
+            <a:schemeClr val="lt1"/>
+          </a:fontRef>
+        </p:style>
+        <p:txBody>
+          <a:bodyPr rtlCol="0" anchor="ctr"/>
+          <a:lstStyle/>
+          <a:p>
+            <a:pPr algn="ctr"/>
+          </a:p>
+        </p:txBody>
+      </p:sp>
+      <p:sp>
+        <p:nvSpPr>
+          <p:cNvPr id="64" name="TextBox 63"/>
+          <p:cNvSpPr txBox="1"/>
+          <p:nvPr/>
+        </p:nvSpPr>
+        <p:spPr>
+          <a:xfrm>
+            <a:off x="7863840" y="2834640"/>
+            <a:ext cx="1828800" cy="182880"/>
+          </a:xfrm>
+          <a:prstGeom prst="rect">
+            <a:avLst/>
+          </a:prstGeom>
+          <a:noFill/>
+        </p:spPr>
+        <p:txBody>
+          <a:bodyPr wrap="square"/>
+          <a:lstStyle/>
+          <a:p>
+            <a:pPr algn="l">
+              <a:defRPr sz="1000" b="1">
+                <a:solidFill>
+                  <a:srgbClr val="16A34A"/>
+                </a:solidFill>
+                <a:latin typeface="Calibri"/>
+              </a:defRPr>
+            </a:pPr>
+            <a:r>
+              <a:t>Insurance</a:t>
+            </a:r>
+          </a:p>
+        </p:txBody>
+      </p:sp>
+      <p:sp>
+        <p:nvSpPr>
+          <p:cNvPr id="65" name="TextBox 64"/>
+          <p:cNvSpPr txBox="1"/>
+          <p:nvPr/>
+        </p:nvSpPr>
+        <p:spPr>
+          <a:xfrm>
+            <a:off x="7863840" y="3017520"/>
+            <a:ext cx="3474720" cy="182880"/>
+          </a:xfrm>
+          <a:prstGeom prst="rect">
+            <a:avLst/>
+          </a:prstGeom>
+          <a:noFill/>
+        </p:spPr>
+        <p:txBody>
+          <a:bodyPr wrap="square"/>
+          <a:lstStyle/>
+          <a:p>
+            <a:pPr algn="l">
+              <a:defRPr sz="800" b="0">
+                <a:solidFill>
+                  <a:srgbClr val="6B7280"/>
+                </a:solidFill>
+                <a:latin typeface="Calibri"/>
+              </a:defRPr>
+            </a:pPr>
+            <a:r>
+              <a:t>Trust: 80% · Reg Risk: 45% · Window: 14d</a:t>
+            </a:r>
+          </a:p>
+        </p:txBody>
+      </p:sp>
+      <p:sp>
+        <p:nvSpPr>
+          <p:cNvPr id="66" name="Rectangle 65"/>
+          <p:cNvSpPr/>
+          <p:nvPr/>
+        </p:nvSpPr>
+        <p:spPr>
+          <a:xfrm>
+            <a:off x="7680960" y="3291840"/>
+            <a:ext cx="54864" cy="320040"/>
+          </a:xfrm>
+          <a:prstGeom prst="rect">
+            <a:avLst/>
+          </a:prstGeom>
+          <a:solidFill>
+            <a:srgbClr val="7C3AED"/>
+          </a:solidFill>
+          <a:ln>
+            <a:noFill/>
+          </a:ln>
+        </p:spPr>
+        <p:style>
+          <a:lnRef idx="1">
+            <a:schemeClr val="accent1"/>
+          </a:lnRef>
+          <a:fillRef idx="3">
+            <a:schemeClr val="accent1"/>
+          </a:fillRef>
+          <a:effectRef idx="2">
+            <a:schemeClr val="accent1"/>
+          </a:effectRef>
+          <a:fontRef idx="minor">
+            <a:schemeClr val="lt1"/>
+          </a:fontRef>
+        </p:style>
+        <p:txBody>
+          <a:bodyPr rtlCol="0" anchor="ctr"/>
+          <a:lstStyle/>
+          <a:p>
+            <a:pPr algn="ctr"/>
+          </a:p>
+        </p:txBody>
+      </p:sp>
+      <p:sp>
+        <p:nvSpPr>
+          <p:cNvPr id="67" name="TextBox 66"/>
+          <p:cNvSpPr txBox="1"/>
+          <p:nvPr/>
+        </p:nvSpPr>
+        <p:spPr>
+          <a:xfrm>
+            <a:off x="7863840" y="3291840"/>
+            <a:ext cx="1828800" cy="182880"/>
+          </a:xfrm>
+          <a:prstGeom prst="rect">
+            <a:avLst/>
+          </a:prstGeom>
+          <a:noFill/>
+        </p:spPr>
+        <p:txBody>
+          <a:bodyPr wrap="square"/>
+          <a:lstStyle/>
+          <a:p>
+            <a:pPr algn="l">
+              <a:defRPr sz="1000" b="1">
+                <a:solidFill>
+                  <a:srgbClr val="7C3AED"/>
+                </a:solidFill>
+                <a:latin typeface="Calibri"/>
+              </a:defRPr>
+            </a:pPr>
+            <a:r>
+              <a:t>Investment Platforms</a:t>
+            </a:r>
+          </a:p>
+        </p:txBody>
+      </p:sp>
+      <p:sp>
+        <p:nvSpPr>
+          <p:cNvPr id="68" name="TextBox 67"/>
+          <p:cNvSpPr txBox="1"/>
+          <p:nvPr/>
+        </p:nvSpPr>
+        <p:spPr>
+          <a:xfrm>
+            <a:off x="7863840" y="3474720"/>
+            <a:ext cx="3474720" cy="182880"/>
+          </a:xfrm>
+          <a:prstGeom prst="rect">
+            <a:avLst/>
+          </a:prstGeom>
+          <a:noFill/>
+        </p:spPr>
+        <p:txBody>
+          <a:bodyPr wrap="square"/>
+          <a:lstStyle/>
+          <a:p>
+            <a:pPr algn="l">
+              <a:defRPr sz="800" b="0">
+                <a:solidFill>
+                  <a:srgbClr val="6B7280"/>
+                </a:solidFill>
+                <a:latin typeface="Calibri"/>
+              </a:defRPr>
+            </a:pPr>
+            <a:r>
+              <a:t>Trust: 95% · Reg Risk: 65% · Window: 45d</a:t>
+            </a:r>
+          </a:p>
+        </p:txBody>
+      </p:sp>
+      <p:sp>
+        <p:nvSpPr>
+          <p:cNvPr id="69" name="Rectangle 68"/>
+          <p:cNvSpPr/>
+          <p:nvPr/>
+        </p:nvSpPr>
+        <p:spPr>
+          <a:xfrm>
+            <a:off x="7680960" y="3749039"/>
+            <a:ext cx="54864" cy="320040"/>
+          </a:xfrm>
+          <a:prstGeom prst="rect">
+            <a:avLst/>
+          </a:prstGeom>
+          <a:solidFill>
+            <a:srgbClr val="CA8A04"/>
+          </a:solidFill>
+          <a:ln>
+            <a:noFill/>
+          </a:ln>
+        </p:spPr>
+        <p:style>
+          <a:lnRef idx="1">
+            <a:schemeClr val="accent1"/>
+          </a:lnRef>
+          <a:fillRef idx="3">
+            <a:schemeClr val="accent1"/>
+          </a:fillRef>
+          <a:effectRef idx="2">
+            <a:schemeClr val="accent1"/>
+          </a:effectRef>
+          <a:fontRef idx="minor">
+            <a:schemeClr val="lt1"/>
+          </a:fontRef>
+        </p:style>
+        <p:txBody>
+          <a:bodyPr rtlCol="0" anchor="ctr"/>
+          <a:lstStyle/>
+          <a:p>
+            <a:pPr algn="ctr"/>
+          </a:p>
+        </p:txBody>
+      </p:sp>
+      <p:sp>
+        <p:nvSpPr>
+          <p:cNvPr id="70" name="TextBox 69"/>
+          <p:cNvSpPr txBox="1"/>
+          <p:nvPr/>
+        </p:nvSpPr>
+        <p:spPr>
+          <a:xfrm>
+            <a:off x="7863840" y="3749039"/>
+            <a:ext cx="1828800" cy="182880"/>
+          </a:xfrm>
+          <a:prstGeom prst="rect">
+            <a:avLst/>
+          </a:prstGeom>
+          <a:noFill/>
+        </p:spPr>
+        <p:txBody>
+          <a:bodyPr wrap="square"/>
+          <a:lstStyle/>
+          <a:p>
+            <a:pPr algn="l">
+              <a:defRPr sz="1000" b="1">
+                <a:solidFill>
+                  <a:srgbClr val="CA8A04"/>
+                </a:solidFill>
+                <a:latin typeface="Calibri"/>
+              </a:defRPr>
+            </a:pPr>
+            <a:r>
+              <a:t>Neobanks</a:t>
+            </a:r>
+          </a:p>
+        </p:txBody>
+      </p:sp>
+      <p:sp>
+        <p:nvSpPr>
+          <p:cNvPr id="71" name="TextBox 70"/>
+          <p:cNvSpPr txBox="1"/>
+          <p:nvPr/>
+        </p:nvSpPr>
+        <p:spPr>
+          <a:xfrm>
+            <a:off x="7863840" y="3931920"/>
+            <a:ext cx="3474720" cy="182880"/>
+          </a:xfrm>
+          <a:prstGeom prst="rect">
+            <a:avLst/>
+          </a:prstGeom>
+          <a:noFill/>
+        </p:spPr>
+        <p:txBody>
+          <a:bodyPr wrap="square"/>
+          <a:lstStyle/>
+          <a:p>
+            <a:pPr algn="l">
+              <a:defRPr sz="800" b="0">
+                <a:solidFill>
+                  <a:srgbClr val="6B7280"/>
+                </a:solidFill>
+                <a:latin typeface="Calibri"/>
+              </a:defRPr>
+            </a:pPr>
+            <a:r>
+              <a:t>Trust: 70% · Reg Risk: 30% · Window: 14d</a:t>
+            </a:r>
+          </a:p>
+        </p:txBody>
+      </p:sp>
+      <p:sp>
+        <p:nvSpPr>
+          <p:cNvPr id="72" name="Rectangle 71"/>
+          <p:cNvSpPr/>
+          <p:nvPr/>
+        </p:nvSpPr>
+        <p:spPr>
+          <a:xfrm>
+            <a:off x="548640" y="4572000"/>
+            <a:ext cx="3520440" cy="1005840"/>
+          </a:xfrm>
+          <a:prstGeom prst="rect">
+            <a:avLst/>
+          </a:prstGeom>
+          <a:solidFill>
+            <a:srgbClr val="FFFFFF"/>
+          </a:solidFill>
+          <a:ln>
+            <a:noFill/>
+          </a:ln>
+        </p:spPr>
+        <p:style>
+          <a:lnRef idx="1">
+            <a:schemeClr val="accent1"/>
+          </a:lnRef>
+          <a:fillRef idx="3">
+            <a:schemeClr val="accent1"/>
+          </a:fillRef>
+          <a:effectRef idx="2">
+            <a:schemeClr val="accent1"/>
+          </a:effectRef>
+          <a:fontRef idx="minor">
+            <a:schemeClr val="lt1"/>
+          </a:fontRef>
+        </p:style>
+        <p:txBody>
+          <a:bodyPr rtlCol="0" anchor="ctr"/>
+          <a:lstStyle/>
+          <a:p>
+            <a:pPr algn="ctr"/>
+          </a:p>
+        </p:txBody>
+      </p:sp>
+      <p:sp>
+        <p:nvSpPr>
+          <p:cNvPr id="73" name="Rectangle 72"/>
+          <p:cNvSpPr/>
+          <p:nvPr/>
+        </p:nvSpPr>
+        <p:spPr>
+          <a:xfrm>
+            <a:off x="548640" y="4572000"/>
+            <a:ext cx="3520440" cy="54864"/>
+          </a:xfrm>
+          <a:prstGeom prst="rect">
+            <a:avLst/>
+          </a:prstGeom>
+          <a:solidFill>
+            <a:srgbClr val="1D4ED8"/>
+          </a:solidFill>
+          <a:ln>
+            <a:noFill/>
+          </a:ln>
+        </p:spPr>
+        <p:style>
+          <a:lnRef idx="1">
+            <a:schemeClr val="accent1"/>
+          </a:lnRef>
+          <a:fillRef idx="3">
+            <a:schemeClr val="accent1"/>
+          </a:fillRef>
+          <a:effectRef idx="2">
+            <a:schemeClr val="accent1"/>
+          </a:effectRef>
+          <a:fontRef idx="minor">
+            <a:schemeClr val="lt1"/>
+          </a:fontRef>
+        </p:style>
+        <p:txBody>
+          <a:bodyPr rtlCol="0" anchor="ctr"/>
+          <a:lstStyle/>
+          <a:p>
+            <a:pPr algn="ctr"/>
+          </a:p>
+        </p:txBody>
+      </p:sp>
+      <p:sp>
+        <p:nvSpPr>
+          <p:cNvPr id="74" name="TextBox 73"/>
+          <p:cNvSpPr txBox="1"/>
+          <p:nvPr/>
+        </p:nvSpPr>
+        <p:spPr>
+          <a:xfrm>
+            <a:off x="731520" y="4754880"/>
+            <a:ext cx="3108960" cy="228600"/>
+          </a:xfrm>
+          <a:prstGeom prst="rect">
+            <a:avLst/>
+          </a:prstGeom>
+          <a:noFill/>
+        </p:spPr>
+        <p:txBody>
+          <a:bodyPr wrap="square"/>
+          <a:lstStyle/>
+          <a:p>
+            <a:pPr algn="l">
+              <a:defRPr sz="1100" b="1">
+                <a:solidFill>
+                  <a:srgbClr val="1D4ED8"/>
+                </a:solidFill>
+                <a:latin typeface="Calibri"/>
+              </a:defRPr>
+            </a:pPr>
+            <a:r>
+              <a:t>Trust-Weighted Scoring</a:t>
+            </a:r>
+          </a:p>
+        </p:txBody>
+      </p:sp>
+      <p:sp>
+        <p:nvSpPr>
+          <p:cNvPr id="75" name="TextBox 74"/>
+          <p:cNvSpPr txBox="1"/>
+          <p:nvPr/>
+        </p:nvSpPr>
+        <p:spPr>
+          <a:xfrm>
+            <a:off x="731520" y="5029200"/>
+            <a:ext cx="3108960" cy="457200"/>
+          </a:xfrm>
+          <a:prstGeom prst="rect">
+            <a:avLst/>
+          </a:prstGeom>
+          <a:noFill/>
+        </p:spPr>
+        <p:txBody>
+          <a:bodyPr wrap="square"/>
+          <a:lstStyle/>
+          <a:p>
+            <a:pPr algn="l">
+              <a:defRPr sz="900" b="0">
+                <a:solidFill>
+                  <a:srgbClr val="374151"/>
+                </a:solidFill>
+                <a:latin typeface="Calibri"/>
+              </a:defRPr>
+            </a:pPr>
+            <a:r>
+              <a:t>35% quality weight captures</a:t>
+            </a:r>
+            <a:br/>
+            <a:r>
+              <a:t>trust erosion from bad matches</a:t>
+            </a:r>
+          </a:p>
+        </p:txBody>
+      </p:sp>
+      <p:sp>
+        <p:nvSpPr>
+          <p:cNvPr id="76" name="Rectangle 75"/>
+          <p:cNvSpPr/>
+          <p:nvPr/>
+        </p:nvSpPr>
+        <p:spPr>
+          <a:xfrm>
+            <a:off x="4343400" y="4572000"/>
+            <a:ext cx="3520440" cy="1005840"/>
+          </a:xfrm>
+          <a:prstGeom prst="rect">
+            <a:avLst/>
+          </a:prstGeom>
+          <a:solidFill>
+            <a:srgbClr val="FFFFFF"/>
+          </a:solidFill>
+          <a:ln>
+            <a:noFill/>
+          </a:ln>
+        </p:spPr>
+        <p:style>
+          <a:lnRef idx="1">
+            <a:schemeClr val="accent1"/>
+          </a:lnRef>
+          <a:fillRef idx="3">
+            <a:schemeClr val="accent1"/>
+          </a:fillRef>
+          <a:effectRef idx="2">
+            <a:schemeClr val="accent1"/>
+          </a:effectRef>
+          <a:fontRef idx="minor">
+            <a:schemeClr val="lt1"/>
+          </a:fontRef>
+        </p:style>
+        <p:txBody>
+          <a:bodyPr rtlCol="0" anchor="ctr"/>
+          <a:lstStyle/>
+          <a:p>
+            <a:pPr algn="ctr"/>
+          </a:p>
+        </p:txBody>
+      </p:sp>
+      <p:sp>
+        <p:nvSpPr>
+          <p:cNvPr id="77" name="Rectangle 76"/>
+          <p:cNvSpPr/>
+          <p:nvPr/>
+        </p:nvSpPr>
+        <p:spPr>
+          <a:xfrm>
+            <a:off x="4343400" y="4572000"/>
+            <a:ext cx="3520440" cy="54864"/>
+          </a:xfrm>
+          <a:prstGeom prst="rect">
+            <a:avLst/>
+          </a:prstGeom>
+          <a:solidFill>
+            <a:srgbClr val="DC2626"/>
+          </a:solidFill>
+          <a:ln>
+            <a:noFill/>
+          </a:ln>
+        </p:spPr>
+        <p:style>
+          <a:lnRef idx="1">
+            <a:schemeClr val="accent1"/>
+          </a:lnRef>
+          <a:fillRef idx="3">
+            <a:schemeClr val="accent1"/>
+          </a:fillRef>
+          <a:effectRef idx="2">
+            <a:schemeClr val="accent1"/>
+          </a:effectRef>
+          <a:fontRef idx="minor">
+            <a:schemeClr val="lt1"/>
+          </a:fontRef>
+        </p:style>
+        <p:txBody>
+          <a:bodyPr rtlCol="0" anchor="ctr"/>
+          <a:lstStyle/>
+          <a:p>
+            <a:pPr algn="ctr"/>
+          </a:p>
+        </p:txBody>
+      </p:sp>
+      <p:sp>
+        <p:nvSpPr>
+          <p:cNvPr id="78" name="TextBox 77"/>
+          <p:cNvSpPr txBox="1"/>
+          <p:nvPr/>
+        </p:nvSpPr>
+        <p:spPr>
+          <a:xfrm>
+            <a:off x="4526280" y="4754880"/>
+            <a:ext cx="3108960" cy="228600"/>
+          </a:xfrm>
+          <a:prstGeom prst="rect">
+            <a:avLst/>
+          </a:prstGeom>
+          <a:noFill/>
+        </p:spPr>
+        <p:txBody>
+          <a:bodyPr wrap="square"/>
+          <a:lstStyle/>
+          <a:p>
+            <a:pPr algn="l">
+              <a:defRPr sz="1100" b="1">
+                <a:solidFill>
+                  <a:srgbClr val="DC2626"/>
+                </a:solidFill>
+                <a:latin typeface="Calibri"/>
+              </a:defRPr>
+            </a:pPr>
+            <a:r>
+              <a:t>Risk Incident Tracking</a:t>
+            </a:r>
+          </a:p>
+        </p:txBody>
+      </p:sp>
+      <p:sp>
+        <p:nvSpPr>
+          <p:cNvPr id="79" name="TextBox 78"/>
+          <p:cNvSpPr txBox="1"/>
+          <p:nvPr/>
+        </p:nvSpPr>
+        <p:spPr>
+          <a:xfrm>
+            <a:off x="4526280" y="5029200"/>
+            <a:ext cx="3108960" cy="457200"/>
+          </a:xfrm>
+          <a:prstGeom prst="rect">
+            <a:avLst/>
+          </a:prstGeom>
+          <a:noFill/>
+        </p:spPr>
+        <p:txBody>
+          <a:bodyPr wrap="square"/>
+          <a:lstStyle/>
+          <a:p>
+            <a:pPr algn="l">
+              <a:defRPr sz="900" b="0">
+                <a:solidFill>
+                  <a:srgbClr val="374151"/>
+                </a:solidFill>
+                <a:latin typeface="Calibri"/>
+              </a:defRPr>
+            </a:pPr>
+            <a:r>
+              <a:t>Regulatory risk events modeled</a:t>
+            </a:r>
+            <a:br/>
+            <a:r>
+              <a:t>per algorithm over 30 days</a:t>
+            </a:r>
+          </a:p>
+        </p:txBody>
+      </p:sp>
+      <p:sp>
+        <p:nvSpPr>
+          <p:cNvPr id="80" name="Rectangle 79"/>
+          <p:cNvSpPr/>
+          <p:nvPr/>
+        </p:nvSpPr>
+        <p:spPr>
+          <a:xfrm>
+            <a:off x="8138160" y="4572000"/>
+            <a:ext cx="3520440" cy="1005840"/>
+          </a:xfrm>
+          <a:prstGeom prst="rect">
+            <a:avLst/>
+          </a:prstGeom>
+          <a:solidFill>
+            <a:srgbClr val="FFFFFF"/>
+          </a:solidFill>
+          <a:ln>
+            <a:noFill/>
+          </a:ln>
+        </p:spPr>
+        <p:style>
+          <a:lnRef idx="1">
+            <a:schemeClr val="accent1"/>
+          </a:lnRef>
+          <a:fillRef idx="3">
+            <a:schemeClr val="accent1"/>
+          </a:fillRef>
+          <a:effectRef idx="2">
+            <a:schemeClr val="accent1"/>
+          </a:effectRef>
+          <a:fontRef idx="minor">
+            <a:schemeClr val="lt1"/>
+          </a:fontRef>
+        </p:style>
+        <p:txBody>
+          <a:bodyPr rtlCol="0" anchor="ctr"/>
+          <a:lstStyle/>
+          <a:p>
+            <a:pPr algn="ctr"/>
+          </a:p>
+        </p:txBody>
+      </p:sp>
+      <p:sp>
+        <p:nvSpPr>
+          <p:cNvPr id="81" name="Rectangle 80"/>
+          <p:cNvSpPr/>
+          <p:nvPr/>
+        </p:nvSpPr>
+        <p:spPr>
+          <a:xfrm>
+            <a:off x="8138160" y="4572000"/>
+            <a:ext cx="3520440" cy="54864"/>
+          </a:xfrm>
+          <a:prstGeom prst="rect">
+            <a:avLst/>
+          </a:prstGeom>
+          <a:solidFill>
+            <a:srgbClr val="16A34A"/>
+          </a:solidFill>
+          <a:ln>
+            <a:noFill/>
+          </a:ln>
+        </p:spPr>
+        <p:style>
+          <a:lnRef idx="1">
+            <a:schemeClr val="accent1"/>
+          </a:lnRef>
+          <a:fillRef idx="3">
+            <a:schemeClr val="accent1"/>
+          </a:fillRef>
+          <a:effectRef idx="2">
+            <a:schemeClr val="accent1"/>
+          </a:effectRef>
+          <a:fontRef idx="minor">
+            <a:schemeClr val="lt1"/>
+          </a:fontRef>
+        </p:style>
+        <p:txBody>
+          <a:bodyPr rtlCol="0" anchor="ctr"/>
+          <a:lstStyle/>
+          <a:p>
+            <a:pPr algn="ctr"/>
+          </a:p>
+        </p:txBody>
+      </p:sp>
+      <p:sp>
+        <p:nvSpPr>
+          <p:cNvPr id="82" name="TextBox 81"/>
+          <p:cNvSpPr txBox="1"/>
+          <p:nvPr/>
+        </p:nvSpPr>
+        <p:spPr>
+          <a:xfrm>
+            <a:off x="8321040" y="4754880"/>
+            <a:ext cx="3108960" cy="228600"/>
+          </a:xfrm>
+          <a:prstGeom prst="rect">
+            <a:avLst/>
+          </a:prstGeom>
+          <a:noFill/>
+        </p:spPr>
+        <p:txBody>
+          <a:bodyPr wrap="square"/>
+          <a:lstStyle/>
+          <a:p>
+            <a:pPr algn="l">
+              <a:defRPr sz="1100" b="1">
+                <a:solidFill>
+                  <a:srgbClr val="16A34A"/>
+                </a:solidFill>
+                <a:latin typeface="Calibri"/>
+              </a:defRPr>
+            </a:pPr>
+            <a:r>
+              <a:t>Lifecycle CPA Analysis</a:t>
+            </a:r>
+          </a:p>
+        </p:txBody>
+      </p:sp>
+      <p:sp>
+        <p:nvSpPr>
+          <p:cNvPr id="83" name="TextBox 82"/>
+          <p:cNvSpPr txBox="1"/>
+          <p:nvPr/>
+        </p:nvSpPr>
+        <p:spPr>
+          <a:xfrm>
+            <a:off x="8321040" y="5029200"/>
+            <a:ext cx="3108960" cy="457200"/>
+          </a:xfrm>
+          <a:prstGeom prst="rect">
+            <a:avLst/>
+          </a:prstGeom>
+          <a:noFill/>
+        </p:spPr>
+        <p:txBody>
+          <a:bodyPr wrap="square"/>
+          <a:lstStyle/>
+          <a:p>
+            <a:pPr algn="l">
+              <a:defRPr sz="900" b="0">
+                <a:solidFill>
+                  <a:srgbClr val="374151"/>
+                </a:solidFill>
+                <a:latin typeface="Calibri"/>
+              </a:defRPr>
+            </a:pPr>
+            <a:r>
+              <a:t>Conversion windows from 14-45d</a:t>
+            </a:r>
+            <a:br/>
+            <a:r>
+              <a:t>by sub-vertical complexity</a:t>
+            </a:r>
+          </a:p>
+        </p:txBody>
+      </p:sp>
+      <p:sp>
+        <p:nvSpPr>
+          <p:cNvPr id="84" name="Rectangle 83"/>
+          <p:cNvSpPr/>
+          <p:nvPr/>
+        </p:nvSpPr>
+        <p:spPr>
+          <a:xfrm>
+            <a:off x="548640" y="5760720"/>
+            <a:ext cx="11064240" cy="777240"/>
+          </a:xfrm>
+          <a:prstGeom prst="rect">
+            <a:avLst/>
+          </a:prstGeom>
+          <a:solidFill>
+            <a:srgbClr val="F5F3FF"/>
+          </a:solidFill>
+          <a:ln>
+            <a:noFill/>
+          </a:ln>
+        </p:spPr>
+        <p:style>
+          <a:lnRef idx="1">
+            <a:schemeClr val="accent1"/>
+          </a:lnRef>
+          <a:fillRef idx="3">
+            <a:schemeClr val="accent1"/>
+          </a:fillRef>
+          <a:effectRef idx="2">
+            <a:schemeClr val="accent1"/>
+          </a:effectRef>
+          <a:fontRef idx="minor">
+            <a:schemeClr val="lt1"/>
+          </a:fontRef>
+        </p:style>
+        <p:txBody>
+          <a:bodyPr rtlCol="0" anchor="ctr"/>
+          <a:lstStyle/>
+          <a:p>
+            <a:pPr algn="ctr"/>
+          </a:p>
+        </p:txBody>
+      </p:sp>
+      <p:sp>
+        <p:nvSpPr>
+          <p:cNvPr id="85" name="Rectangle 84"/>
+          <p:cNvSpPr/>
+          <p:nvPr/>
+        </p:nvSpPr>
+        <p:spPr>
+          <a:xfrm>
+            <a:off x="548640" y="5760720"/>
+            <a:ext cx="54864" cy="777240"/>
+          </a:xfrm>
+          <a:prstGeom prst="rect">
+            <a:avLst/>
+          </a:prstGeom>
+          <a:solidFill>
+            <a:srgbClr val="7C3AED"/>
+          </a:solidFill>
+          <a:ln>
+            <a:noFill/>
+          </a:ln>
+        </p:spPr>
+        <p:style>
+          <a:lnRef idx="1">
+            <a:schemeClr val="accent1"/>
+          </a:lnRef>
+          <a:fillRef idx="3">
+            <a:schemeClr val="accent1"/>
+          </a:fillRef>
+          <a:effectRef idx="2">
+            <a:schemeClr val="accent1"/>
+          </a:effectRef>
+          <a:fontRef idx="minor">
+            <a:schemeClr val="lt1"/>
+          </a:fontRef>
+        </p:style>
+        <p:txBody>
+          <a:bodyPr rtlCol="0" anchor="ctr"/>
+          <a:lstStyle/>
+          <a:p>
+            <a:pPr algn="ctr"/>
+          </a:p>
+        </p:txBody>
+      </p:sp>
+      <p:sp>
+        <p:nvSpPr>
+          <p:cNvPr id="86" name="TextBox 85"/>
+          <p:cNvSpPr txBox="1"/>
+          <p:nvPr/>
+        </p:nvSpPr>
+        <p:spPr>
+          <a:xfrm>
+            <a:off x="777240" y="5852160"/>
+            <a:ext cx="10515600" cy="548640"/>
+          </a:xfrm>
+          <a:prstGeom prst="rect">
+            <a:avLst/>
+          </a:prstGeom>
+          <a:noFill/>
+        </p:spPr>
+        <p:txBody>
+          <a:bodyPr wrap="square"/>
+          <a:lstStyle/>
+          <a:p>
+            <a:pPr algn="l">
+              <a:defRPr sz="1000" b="0">
+                <a:solidFill>
+                  <a:srgbClr val="4C1D95"/>
+                </a:solidFill>
+                <a:latin typeface="Calibri"/>
+              </a:defRPr>
+            </a:pPr>
+            <a:r>
+              <a:t>In financial services, the revenue-maximizing algorithm (DLRM) is NOT the optimal choice. The Risk-Adjusted Ranker wins by maintaining 87% user trust with only 3 risk incidents — critical in a domain where a single bad ad recommendation can destroy months of trust-building. This demonstrates why multi-objective optimization with domain-specific weights outperforms raw CTR/revenue optimization.</a:t>
+            </a:r>
+          </a:p>
+        </p:txBody>
+      </p:sp>
+    </p:spTree>
+  </p:cSld>
+  <p:clrMapOvr>
+    <a:masterClrMapping/>
+  </p:clrMapOvr>
+</p:sld>
+</file>
+
+<file path=ppt/slides/slide12.xml><?xml version="1.0" encoding="utf-8"?>
+<p:sld xmlns:a="http://schemas.openxmlformats.org/drawingml/2006/main" xmlns:p="http://schemas.openxmlformats.org/presentationml/2006/main" xmlns:r="http://schemas.openxmlformats.org/officeDocument/2006/relationships">
+  <p:cSld>
+    <p:spTree>
+      <p:nvGrpSpPr>
+        <p:cNvPr id="1" name=""/>
+        <p:cNvGrpSpPr/>
+        <p:nvPr/>
+      </p:nvGrpSpPr>
+      <p:grpSpPr/>
+      <p:sp>
+        <p:nvSpPr>
           <p:cNvPr id="2" name="Rectangle 1"/>
           <p:cNvSpPr/>
           <p:nvPr/>
@@ -6796,7 +9923,7 @@
               </a:defRPr>
             </a:pPr>
             <a:r>
-              <a:t>9</a:t>
+              <a:t>10</a:t>
             </a:r>
           </a:p>
         </p:txBody>

--- a/Ad_Auction_Simulator_Dashboard.pptx
+++ b/Ad_Auction_Simulator_Dashboard.pptx
@@ -17,6 +17,7 @@
     <p:sldId id="265" r:id="rId16"/>
     <p:sldId id="266" r:id="rId17"/>
     <p:sldId id="267" r:id="rId18"/>
+    <p:sldId id="268" r:id="rId19"/>
   </p:sldIdLst>
   <p:sldSz cx="12191695" cy="6858000" type="screen4x3"/>
   <p:notesSz cx="6858000" cy="9144000"/>
@@ -3305,7 +3306,7 @@
         <p:spPr>
           <a:xfrm>
             <a:off x="1097280" y="3840480"/>
-            <a:ext cx="1554480" cy="320040"/>
+            <a:ext cx="1371600" cy="320040"/>
           </a:xfrm>
           <a:prstGeom prst="rect">
             <a:avLst/>
@@ -3347,8 +3348,8 @@
         </p:nvSpPr>
         <p:spPr>
           <a:xfrm>
-            <a:off x="1188720" y="3877056"/>
-            <a:ext cx="1371600" cy="274320"/>
+            <a:off x="1143000" y="3877056"/>
+            <a:ext cx="1280160" cy="274320"/>
           </a:xfrm>
           <a:prstGeom prst="rect">
             <a:avLst/>
@@ -3360,7 +3361,7 @@
           <a:lstStyle/>
           <a:p>
             <a:pPr algn="ctr">
-              <a:defRPr sz="900" b="1">
+              <a:defRPr sz="800" b="1">
                 <a:solidFill>
                   <a:srgbClr val="60A5FA"/>
                 </a:solidFill>
@@ -3381,8 +3382,8 @@
         </p:nvSpPr>
         <p:spPr>
           <a:xfrm>
-            <a:off x="2834639" y="3840480"/>
-            <a:ext cx="1554480" cy="320040"/>
+            <a:off x="2606039" y="3840480"/>
+            <a:ext cx="1371600" cy="320040"/>
           </a:xfrm>
           <a:prstGeom prst="rect">
             <a:avLst/>
@@ -3424,8 +3425,8 @@
         </p:nvSpPr>
         <p:spPr>
           <a:xfrm>
-            <a:off x="2926079" y="3877056"/>
-            <a:ext cx="1371600" cy="274320"/>
+            <a:off x="2651759" y="3877056"/>
+            <a:ext cx="1280160" cy="274320"/>
           </a:xfrm>
           <a:prstGeom prst="rect">
             <a:avLst/>
@@ -3437,7 +3438,7 @@
           <a:lstStyle/>
           <a:p>
             <a:pPr algn="ctr">
-              <a:defRPr sz="900" b="1">
+              <a:defRPr sz="800" b="1">
                 <a:solidFill>
                   <a:srgbClr val="60A5FA"/>
                 </a:solidFill>
@@ -3458,8 +3459,8 @@
         </p:nvSpPr>
         <p:spPr>
           <a:xfrm>
-            <a:off x="4572000" y="3840480"/>
-            <a:ext cx="1554480" cy="320040"/>
+            <a:off x="4114800" y="3840480"/>
+            <a:ext cx="1371600" cy="320040"/>
           </a:xfrm>
           <a:prstGeom prst="rect">
             <a:avLst/>
@@ -3501,8 +3502,8 @@
         </p:nvSpPr>
         <p:spPr>
           <a:xfrm>
-            <a:off x="4663440" y="3877056"/>
-            <a:ext cx="1371600" cy="274320"/>
+            <a:off x="4160520" y="3877056"/>
+            <a:ext cx="1280160" cy="274320"/>
           </a:xfrm>
           <a:prstGeom prst="rect">
             <a:avLst/>
@@ -3514,7 +3515,7 @@
           <a:lstStyle/>
           <a:p>
             <a:pPr algn="ctr">
-              <a:defRPr sz="900" b="1">
+              <a:defRPr sz="800" b="1">
                 <a:solidFill>
                   <a:srgbClr val="60A5FA"/>
                 </a:solidFill>
@@ -3535,8 +3536,8 @@
         </p:nvSpPr>
         <p:spPr>
           <a:xfrm>
-            <a:off x="6309359" y="3840480"/>
-            <a:ext cx="1554480" cy="320040"/>
+            <a:off x="5623559" y="3840480"/>
+            <a:ext cx="1371600" cy="320040"/>
           </a:xfrm>
           <a:prstGeom prst="rect">
             <a:avLst/>
@@ -3578,8 +3579,8 @@
         </p:nvSpPr>
         <p:spPr>
           <a:xfrm>
-            <a:off x="6400799" y="3877056"/>
-            <a:ext cx="1371600" cy="274320"/>
+            <a:off x="5669279" y="3877056"/>
+            <a:ext cx="1280160" cy="274320"/>
           </a:xfrm>
           <a:prstGeom prst="rect">
             <a:avLst/>
@@ -3591,7 +3592,7 @@
           <a:lstStyle/>
           <a:p>
             <a:pPr algn="ctr">
-              <a:defRPr sz="900" b="1">
+              <a:defRPr sz="800" b="1">
                 <a:solidFill>
                   <a:srgbClr val="60A5FA"/>
                 </a:solidFill>
@@ -3599,7 +3600,7 @@
               </a:defRPr>
             </a:pPr>
             <a:r>
-              <a:t>Latency-Aware Cascade</a:t>
+              <a:t>Cascade Ranking</a:t>
             </a:r>
           </a:p>
         </p:txBody>
@@ -3612,8 +3613,8 @@
         </p:nvSpPr>
         <p:spPr>
           <a:xfrm>
-            <a:off x="8046719" y="3840480"/>
-            <a:ext cx="1554480" cy="320040"/>
+            <a:off x="7132320" y="3840480"/>
+            <a:ext cx="1371600" cy="320040"/>
           </a:xfrm>
           <a:prstGeom prst="rect">
             <a:avLst/>
@@ -3655,8 +3656,8 @@
         </p:nvSpPr>
         <p:spPr>
           <a:xfrm>
-            <a:off x="8138159" y="3877056"/>
-            <a:ext cx="1371600" cy="274320"/>
+            <a:off x="7178040" y="3877056"/>
+            <a:ext cx="1280160" cy="274320"/>
           </a:xfrm>
           <a:prstGeom prst="rect">
             <a:avLst/>
@@ -3668,7 +3669,7 @@
           <a:lstStyle/>
           <a:p>
             <a:pPr algn="ctr">
-              <a:defRPr sz="900" b="1">
+              <a:defRPr sz="800" b="1">
                 <a:solidFill>
                   <a:srgbClr val="60A5FA"/>
                 </a:solidFill>
@@ -3676,7 +3677,7 @@
               </a:defRPr>
             </a:pPr>
             <a:r>
-              <a:t>Model Strategy</a:t>
+              <a:t>Ads Ranking</a:t>
             </a:r>
           </a:p>
         </p:txBody>
@@ -3689,8 +3690,8 @@
         </p:nvSpPr>
         <p:spPr>
           <a:xfrm>
-            <a:off x="9784080" y="3840480"/>
-            <a:ext cx="1554480" cy="320040"/>
+            <a:off x="8641080" y="3840480"/>
+            <a:ext cx="1371600" cy="320040"/>
           </a:xfrm>
           <a:prstGeom prst="rect">
             <a:avLst/>
@@ -3732,8 +3733,8 @@
         </p:nvSpPr>
         <p:spPr>
           <a:xfrm>
-            <a:off x="9875519" y="3877056"/>
-            <a:ext cx="1371600" cy="274320"/>
+            <a:off x="8686800" y="3877056"/>
+            <a:ext cx="1280160" cy="274320"/>
           </a:xfrm>
           <a:prstGeom prst="rect">
             <a:avLst/>
@@ -3745,7 +3746,7 @@
           <a:lstStyle/>
           <a:p>
             <a:pPr algn="ctr">
-              <a:defRPr sz="900" b="1">
+              <a:defRPr sz="800" b="1">
                 <a:solidFill>
                   <a:srgbClr val="60A5FA"/>
                 </a:solidFill>
@@ -3753,6 +3754,83 @@
               </a:defRPr>
             </a:pPr>
             <a:r>
+              <a:t>Model Strategy</a:t>
+            </a:r>
+          </a:p>
+        </p:txBody>
+      </p:sp>
+      <p:sp>
+        <p:nvSpPr>
+          <p:cNvPr id="19" name="Rectangle 18"/>
+          <p:cNvSpPr/>
+          <p:nvPr/>
+        </p:nvSpPr>
+        <p:spPr>
+          <a:xfrm>
+            <a:off x="10149839" y="3840480"/>
+            <a:ext cx="1371600" cy="320040"/>
+          </a:xfrm>
+          <a:prstGeom prst="rect">
+            <a:avLst/>
+          </a:prstGeom>
+          <a:solidFill>
+            <a:srgbClr val="142850"/>
+          </a:solidFill>
+          <a:ln>
+            <a:noFill/>
+          </a:ln>
+        </p:spPr>
+        <p:style>
+          <a:lnRef idx="1">
+            <a:schemeClr val="accent1"/>
+          </a:lnRef>
+          <a:fillRef idx="3">
+            <a:schemeClr val="accent1"/>
+          </a:fillRef>
+          <a:effectRef idx="2">
+            <a:schemeClr val="accent1"/>
+          </a:effectRef>
+          <a:fontRef idx="minor">
+            <a:schemeClr val="lt1"/>
+          </a:fontRef>
+        </p:style>
+        <p:txBody>
+          <a:bodyPr rtlCol="0" anchor="ctr"/>
+          <a:lstStyle/>
+          <a:p>
+            <a:pPr algn="ctr"/>
+          </a:p>
+        </p:txBody>
+      </p:sp>
+      <p:sp>
+        <p:nvSpPr>
+          <p:cNvPr id="20" name="TextBox 19"/>
+          <p:cNvSpPr txBox="1"/>
+          <p:nvPr/>
+        </p:nvSpPr>
+        <p:spPr>
+          <a:xfrm>
+            <a:off x="10195559" y="3877056"/>
+            <a:ext cx="1280160" cy="274320"/>
+          </a:xfrm>
+          <a:prstGeom prst="rect">
+            <a:avLst/>
+          </a:prstGeom>
+          <a:noFill/>
+        </p:spPr>
+        <p:txBody>
+          <a:bodyPr wrap="square"/>
+          <a:lstStyle/>
+          <a:p>
+            <a:pPr algn="ctr">
+              <a:defRPr sz="800" b="1">
+                <a:solidFill>
+                  <a:srgbClr val="60A5FA"/>
+                </a:solidFill>
+                <a:latin typeface="Calibri"/>
+              </a:defRPr>
+            </a:pPr>
+            <a:r>
               <a:t>Finance Scenario</a:t>
             </a:r>
           </a:p>
@@ -3760,7 +3838,7 @@
       </p:sp>
       <p:sp>
         <p:nvSpPr>
-          <p:cNvPr id="19" name="TextBox 18"/>
+          <p:cNvPr id="21" name="TextBox 20"/>
           <p:cNvSpPr txBox="1"/>
           <p:nvPr/>
         </p:nvSpPr>
@@ -9418,6 +9496,14 @@
 <file path=ppt/slides/slide12.xml><?xml version="1.0" encoding="utf-8"?>
 <p:sld xmlns:a="http://schemas.openxmlformats.org/drawingml/2006/main" xmlns:p="http://schemas.openxmlformats.org/presentationml/2006/main" xmlns:r="http://schemas.openxmlformats.org/officeDocument/2006/relationships">
   <p:cSld>
+    <p:bg>
+      <p:bgPr>
+        <a:solidFill>
+          <a:srgbClr val="F8FAFC"/>
+        </a:solidFill>
+        <a:effectLst/>
+      </p:bgPr>
+    </p:bg>
     <p:spTree>
       <p:nvGrpSpPr>
         <p:cNvPr id="1" name=""/>
@@ -9427,6 +9513,2974 @@
       <p:grpSpPr/>
       <p:sp>
         <p:nvSpPr>
+          <p:cNvPr id="2" name="TextBox 1"/>
+          <p:cNvSpPr txBox="1"/>
+          <p:nvPr/>
+        </p:nvSpPr>
+        <p:spPr>
+          <a:xfrm>
+            <a:off x="548640" y="365760"/>
+            <a:ext cx="9144000" cy="457200"/>
+          </a:xfrm>
+          <a:prstGeom prst="rect">
+            <a:avLst/>
+          </a:prstGeom>
+          <a:noFill/>
+        </p:spPr>
+        <p:txBody>
+          <a:bodyPr wrap="square"/>
+          <a:lstStyle/>
+          <a:p>
+            <a:pPr algn="l">
+              <a:defRPr sz="2800" b="1">
+                <a:solidFill>
+                  <a:srgbClr val="111827"/>
+                </a:solidFill>
+                <a:latin typeface="Calibri"/>
+              </a:defRPr>
+            </a:pPr>
+            <a:r>
+              <a:t>Ads Ranking Model</a:t>
+            </a:r>
+          </a:p>
+        </p:txBody>
+      </p:sp>
+      <p:sp>
+        <p:nvSpPr>
+          <p:cNvPr id="3" name="TextBox 2"/>
+          <p:cNvSpPr txBox="1"/>
+          <p:nvPr/>
+        </p:nvSpPr>
+        <p:spPr>
+          <a:xfrm>
+            <a:off x="548640" y="822960"/>
+            <a:ext cx="9144000" cy="274320"/>
+          </a:xfrm>
+          <a:prstGeom prst="rect">
+            <a:avLst/>
+          </a:prstGeom>
+          <a:noFill/>
+        </p:spPr>
+        <p:txBody>
+          <a:bodyPr wrap="square"/>
+          <a:lstStyle/>
+          <a:p>
+            <a:pPr algn="l">
+              <a:defRPr sz="1200" b="0">
+                <a:solidFill>
+                  <a:srgbClr val="6B7280"/>
+                </a:solidFill>
+                <a:latin typeface="Calibri"/>
+              </a:defRPr>
+            </a:pPr>
+            <a:r>
+              <a:t>Production-style multi-task ranking pipeline with calibration, eCPM scoring, and ablation analysis</a:t>
+            </a:r>
+          </a:p>
+        </p:txBody>
+      </p:sp>
+      <p:sp>
+        <p:nvSpPr>
+          <p:cNvPr id="4" name="Rectangle 3"/>
+          <p:cNvSpPr/>
+          <p:nvPr/>
+        </p:nvSpPr>
+        <p:spPr>
+          <a:xfrm>
+            <a:off x="548640" y="1371600"/>
+            <a:ext cx="2606040" cy="1463040"/>
+          </a:xfrm>
+          <a:prstGeom prst="rect">
+            <a:avLst/>
+          </a:prstGeom>
+          <a:solidFill>
+            <a:srgbClr val="FFFFFF"/>
+          </a:solidFill>
+          <a:ln>
+            <a:noFill/>
+          </a:ln>
+        </p:spPr>
+        <p:style>
+          <a:lnRef idx="1">
+            <a:schemeClr val="accent1"/>
+          </a:lnRef>
+          <a:fillRef idx="3">
+            <a:schemeClr val="accent1"/>
+          </a:fillRef>
+          <a:effectRef idx="2">
+            <a:schemeClr val="accent1"/>
+          </a:effectRef>
+          <a:fontRef idx="minor">
+            <a:schemeClr val="lt1"/>
+          </a:fontRef>
+        </p:style>
+        <p:txBody>
+          <a:bodyPr rtlCol="0" anchor="ctr"/>
+          <a:lstStyle/>
+          <a:p>
+            <a:pPr algn="ctr"/>
+          </a:p>
+        </p:txBody>
+      </p:sp>
+      <p:sp>
+        <p:nvSpPr>
+          <p:cNvPr id="5" name="Rectangle 4"/>
+          <p:cNvSpPr/>
+          <p:nvPr/>
+        </p:nvSpPr>
+        <p:spPr>
+          <a:xfrm>
+            <a:off x="548640" y="1371600"/>
+            <a:ext cx="2606040" cy="54864"/>
+          </a:xfrm>
+          <a:prstGeom prst="rect">
+            <a:avLst/>
+          </a:prstGeom>
+          <a:solidFill>
+            <a:srgbClr val="0891B2"/>
+          </a:solidFill>
+          <a:ln>
+            <a:noFill/>
+          </a:ln>
+        </p:spPr>
+        <p:style>
+          <a:lnRef idx="1">
+            <a:schemeClr val="accent1"/>
+          </a:lnRef>
+          <a:fillRef idx="3">
+            <a:schemeClr val="accent1"/>
+          </a:fillRef>
+          <a:effectRef idx="2">
+            <a:schemeClr val="accent1"/>
+          </a:effectRef>
+          <a:fontRef idx="minor">
+            <a:schemeClr val="lt1"/>
+          </a:fontRef>
+        </p:style>
+        <p:txBody>
+          <a:bodyPr rtlCol="0" anchor="ctr"/>
+          <a:lstStyle/>
+          <a:p>
+            <a:pPr algn="ctr"/>
+          </a:p>
+        </p:txBody>
+      </p:sp>
+      <p:sp>
+        <p:nvSpPr>
+          <p:cNvPr id="6" name="TextBox 5"/>
+          <p:cNvSpPr txBox="1"/>
+          <p:nvPr/>
+        </p:nvSpPr>
+        <p:spPr>
+          <a:xfrm>
+            <a:off x="685800" y="1508760"/>
+            <a:ext cx="2331720" cy="457200"/>
+          </a:xfrm>
+          <a:prstGeom prst="rect">
+            <a:avLst/>
+          </a:prstGeom>
+          <a:noFill/>
+        </p:spPr>
+        <p:txBody>
+          <a:bodyPr wrap="square"/>
+          <a:lstStyle/>
+          <a:p>
+            <a:pPr algn="ctr">
+              <a:defRPr sz="1100" b="1">
+                <a:solidFill>
+                  <a:srgbClr val="0891B2"/>
+                </a:solidFill>
+                <a:latin typeface="Calibri"/>
+              </a:defRPr>
+            </a:pPr>
+            <a:r>
+              <a:t>Feature</a:t>
+            </a:r>
+            <a:br/>
+            <a:r>
+              <a:t>Engineering</a:t>
+            </a:r>
+          </a:p>
+        </p:txBody>
+      </p:sp>
+      <p:sp>
+        <p:nvSpPr>
+          <p:cNvPr id="7" name="TextBox 6"/>
+          <p:cNvSpPr txBox="1"/>
+          <p:nvPr/>
+        </p:nvSpPr>
+        <p:spPr>
+          <a:xfrm>
+            <a:off x="685800" y="2011680"/>
+            <a:ext cx="2331720" cy="411480"/>
+          </a:xfrm>
+          <a:prstGeom prst="rect">
+            <a:avLst/>
+          </a:prstGeom>
+          <a:noFill/>
+        </p:spPr>
+        <p:txBody>
+          <a:bodyPr wrap="square"/>
+          <a:lstStyle/>
+          <a:p>
+            <a:pPr algn="ctr">
+              <a:defRPr sz="900" b="0">
+                <a:solidFill>
+                  <a:srgbClr val="374151"/>
+                </a:solidFill>
+                <a:latin typeface="Calibri"/>
+              </a:defRPr>
+            </a:pPr>
+            <a:r>
+              <a:t>Dense + Sparse</a:t>
+            </a:r>
+            <a:br/>
+            <a:r>
+              <a:t>+ Cross Features</a:t>
+            </a:r>
+          </a:p>
+        </p:txBody>
+      </p:sp>
+      <p:sp>
+        <p:nvSpPr>
+          <p:cNvPr id="8" name="TextBox 7"/>
+          <p:cNvSpPr txBox="1"/>
+          <p:nvPr/>
+        </p:nvSpPr>
+        <p:spPr>
+          <a:xfrm>
+            <a:off x="685800" y="2468880"/>
+            <a:ext cx="2331720" cy="228600"/>
+          </a:xfrm>
+          <a:prstGeom prst="rect">
+            <a:avLst/>
+          </a:prstGeom>
+          <a:noFill/>
+        </p:spPr>
+        <p:txBody>
+          <a:bodyPr wrap="square"/>
+          <a:lstStyle/>
+          <a:p>
+            <a:pPr algn="ctr">
+              <a:defRPr sz="1000" b="1">
+                <a:solidFill>
+                  <a:srgbClr val="111827"/>
+                </a:solidFill>
+                <a:latin typeface="Consolas"/>
+              </a:defRPr>
+            </a:pPr>
+            <a:r>
+              <a:t>50 candidates</a:t>
+            </a:r>
+          </a:p>
+        </p:txBody>
+      </p:sp>
+      <p:sp>
+        <p:nvSpPr>
+          <p:cNvPr id="9" name="TextBox 8"/>
+          <p:cNvSpPr txBox="1"/>
+          <p:nvPr/>
+        </p:nvSpPr>
+        <p:spPr>
+          <a:xfrm>
+            <a:off x="3154680" y="1920240"/>
+            <a:ext cx="274320" cy="365760"/>
+          </a:xfrm>
+          <a:prstGeom prst="rect">
+            <a:avLst/>
+          </a:prstGeom>
+          <a:noFill/>
+        </p:spPr>
+        <p:txBody>
+          <a:bodyPr wrap="square"/>
+          <a:lstStyle/>
+          <a:p>
+            <a:pPr algn="ctr">
+              <a:defRPr sz="2200" b="1">
+                <a:solidFill>
+                  <a:srgbClr val="D1D5DB"/>
+                </a:solidFill>
+                <a:latin typeface="Calibri"/>
+              </a:defRPr>
+            </a:pPr>
+            <a:r>
+              <a:t>→</a:t>
+            </a:r>
+          </a:p>
+        </p:txBody>
+      </p:sp>
+      <p:sp>
+        <p:nvSpPr>
+          <p:cNvPr id="10" name="Rectangle 9"/>
+          <p:cNvSpPr/>
+          <p:nvPr/>
+        </p:nvSpPr>
+        <p:spPr>
+          <a:xfrm>
+            <a:off x="3429000" y="1371600"/>
+            <a:ext cx="2606040" cy="1463040"/>
+          </a:xfrm>
+          <a:prstGeom prst="rect">
+            <a:avLst/>
+          </a:prstGeom>
+          <a:solidFill>
+            <a:srgbClr val="FFFFFF"/>
+          </a:solidFill>
+          <a:ln>
+            <a:noFill/>
+          </a:ln>
+        </p:spPr>
+        <p:style>
+          <a:lnRef idx="1">
+            <a:schemeClr val="accent1"/>
+          </a:lnRef>
+          <a:fillRef idx="3">
+            <a:schemeClr val="accent1"/>
+          </a:fillRef>
+          <a:effectRef idx="2">
+            <a:schemeClr val="accent1"/>
+          </a:effectRef>
+          <a:fontRef idx="minor">
+            <a:schemeClr val="lt1"/>
+          </a:fontRef>
+        </p:style>
+        <p:txBody>
+          <a:bodyPr rtlCol="0" anchor="ctr"/>
+          <a:lstStyle/>
+          <a:p>
+            <a:pPr algn="ctr"/>
+          </a:p>
+        </p:txBody>
+      </p:sp>
+      <p:sp>
+        <p:nvSpPr>
+          <p:cNvPr id="11" name="Rectangle 10"/>
+          <p:cNvSpPr/>
+          <p:nvPr/>
+        </p:nvSpPr>
+        <p:spPr>
+          <a:xfrm>
+            <a:off x="3429000" y="1371600"/>
+            <a:ext cx="2606040" cy="54864"/>
+          </a:xfrm>
+          <a:prstGeom prst="rect">
+            <a:avLst/>
+          </a:prstGeom>
+          <a:solidFill>
+            <a:srgbClr val="1D4ED8"/>
+          </a:solidFill>
+          <a:ln>
+            <a:noFill/>
+          </a:ln>
+        </p:spPr>
+        <p:style>
+          <a:lnRef idx="1">
+            <a:schemeClr val="accent1"/>
+          </a:lnRef>
+          <a:fillRef idx="3">
+            <a:schemeClr val="accent1"/>
+          </a:fillRef>
+          <a:effectRef idx="2">
+            <a:schemeClr val="accent1"/>
+          </a:effectRef>
+          <a:fontRef idx="minor">
+            <a:schemeClr val="lt1"/>
+          </a:fontRef>
+        </p:style>
+        <p:txBody>
+          <a:bodyPr rtlCol="0" anchor="ctr"/>
+          <a:lstStyle/>
+          <a:p>
+            <a:pPr algn="ctr"/>
+          </a:p>
+        </p:txBody>
+      </p:sp>
+      <p:sp>
+        <p:nvSpPr>
+          <p:cNvPr id="12" name="TextBox 11"/>
+          <p:cNvSpPr txBox="1"/>
+          <p:nvPr/>
+        </p:nvSpPr>
+        <p:spPr>
+          <a:xfrm>
+            <a:off x="3566160" y="1508760"/>
+            <a:ext cx="2331720" cy="457200"/>
+          </a:xfrm>
+          <a:prstGeom prst="rect">
+            <a:avLst/>
+          </a:prstGeom>
+          <a:noFill/>
+        </p:spPr>
+        <p:txBody>
+          <a:bodyPr wrap="square"/>
+          <a:lstStyle/>
+          <a:p>
+            <a:pPr algn="ctr">
+              <a:defRPr sz="1100" b="1">
+                <a:solidFill>
+                  <a:srgbClr val="1D4ED8"/>
+                </a:solidFill>
+                <a:latin typeface="Calibri"/>
+              </a:defRPr>
+            </a:pPr>
+            <a:r>
+              <a:t>Multi-Task</a:t>
+            </a:r>
+            <a:br/>
+            <a:r>
+              <a:t>Prediction</a:t>
+            </a:r>
+          </a:p>
+        </p:txBody>
+      </p:sp>
+      <p:sp>
+        <p:nvSpPr>
+          <p:cNvPr id="13" name="TextBox 12"/>
+          <p:cNvSpPr txBox="1"/>
+          <p:nvPr/>
+        </p:nvSpPr>
+        <p:spPr>
+          <a:xfrm>
+            <a:off x="3566160" y="2011680"/>
+            <a:ext cx="2331720" cy="411480"/>
+          </a:xfrm>
+          <a:prstGeom prst="rect">
+            <a:avLst/>
+          </a:prstGeom>
+          <a:noFill/>
+        </p:spPr>
+        <p:txBody>
+          <a:bodyPr wrap="square"/>
+          <a:lstStyle/>
+          <a:p>
+            <a:pPr algn="ctr">
+              <a:defRPr sz="900" b="0">
+                <a:solidFill>
+                  <a:srgbClr val="374151"/>
+                </a:solidFill>
+                <a:latin typeface="Calibri"/>
+              </a:defRPr>
+            </a:pPr>
+            <a:r>
+              <a:t>pCTR · pCVR</a:t>
+            </a:r>
+            <a:br/>
+            <a:r>
+              <a:t>pEng · pNeg</a:t>
+            </a:r>
+          </a:p>
+        </p:txBody>
+      </p:sp>
+      <p:sp>
+        <p:nvSpPr>
+          <p:cNvPr id="14" name="TextBox 13"/>
+          <p:cNvSpPr txBox="1"/>
+          <p:nvPr/>
+        </p:nvSpPr>
+        <p:spPr>
+          <a:xfrm>
+            <a:off x="3566160" y="2468880"/>
+            <a:ext cx="2331720" cy="228600"/>
+          </a:xfrm>
+          <a:prstGeom prst="rect">
+            <a:avLst/>
+          </a:prstGeom>
+          <a:noFill/>
+        </p:spPr>
+        <p:txBody>
+          <a:bodyPr wrap="square"/>
+          <a:lstStyle/>
+          <a:p>
+            <a:pPr algn="ctr">
+              <a:defRPr sz="1000" b="1">
+                <a:solidFill>
+                  <a:srgbClr val="111827"/>
+                </a:solidFill>
+                <a:latin typeface="Consolas"/>
+              </a:defRPr>
+            </a:pPr>
+            <a:r>
+              <a:t>50 scored</a:t>
+            </a:r>
+          </a:p>
+        </p:txBody>
+      </p:sp>
+      <p:sp>
+        <p:nvSpPr>
+          <p:cNvPr id="15" name="TextBox 14"/>
+          <p:cNvSpPr txBox="1"/>
+          <p:nvPr/>
+        </p:nvSpPr>
+        <p:spPr>
+          <a:xfrm>
+            <a:off x="6035040" y="1920240"/>
+            <a:ext cx="274320" cy="365760"/>
+          </a:xfrm>
+          <a:prstGeom prst="rect">
+            <a:avLst/>
+          </a:prstGeom>
+          <a:noFill/>
+        </p:spPr>
+        <p:txBody>
+          <a:bodyPr wrap="square"/>
+          <a:lstStyle/>
+          <a:p>
+            <a:pPr algn="ctr">
+              <a:defRPr sz="2200" b="1">
+                <a:solidFill>
+                  <a:srgbClr val="D1D5DB"/>
+                </a:solidFill>
+                <a:latin typeface="Calibri"/>
+              </a:defRPr>
+            </a:pPr>
+            <a:r>
+              <a:t>→</a:t>
+            </a:r>
+          </a:p>
+        </p:txBody>
+      </p:sp>
+      <p:sp>
+        <p:nvSpPr>
+          <p:cNvPr id="16" name="Rectangle 15"/>
+          <p:cNvSpPr/>
+          <p:nvPr/>
+        </p:nvSpPr>
+        <p:spPr>
+          <a:xfrm>
+            <a:off x="6309359" y="1371600"/>
+            <a:ext cx="2606040" cy="1463040"/>
+          </a:xfrm>
+          <a:prstGeom prst="rect">
+            <a:avLst/>
+          </a:prstGeom>
+          <a:solidFill>
+            <a:srgbClr val="FFFFFF"/>
+          </a:solidFill>
+          <a:ln>
+            <a:noFill/>
+          </a:ln>
+        </p:spPr>
+        <p:style>
+          <a:lnRef idx="1">
+            <a:schemeClr val="accent1"/>
+          </a:lnRef>
+          <a:fillRef idx="3">
+            <a:schemeClr val="accent1"/>
+          </a:fillRef>
+          <a:effectRef idx="2">
+            <a:schemeClr val="accent1"/>
+          </a:effectRef>
+          <a:fontRef idx="minor">
+            <a:schemeClr val="lt1"/>
+          </a:fontRef>
+        </p:style>
+        <p:txBody>
+          <a:bodyPr rtlCol="0" anchor="ctr"/>
+          <a:lstStyle/>
+          <a:p>
+            <a:pPr algn="ctr"/>
+          </a:p>
+        </p:txBody>
+      </p:sp>
+      <p:sp>
+        <p:nvSpPr>
+          <p:cNvPr id="17" name="Rectangle 16"/>
+          <p:cNvSpPr/>
+          <p:nvPr/>
+        </p:nvSpPr>
+        <p:spPr>
+          <a:xfrm>
+            <a:off x="6309359" y="1371600"/>
+            <a:ext cx="2606040" cy="54864"/>
+          </a:xfrm>
+          <a:prstGeom prst="rect">
+            <a:avLst/>
+          </a:prstGeom>
+          <a:solidFill>
+            <a:srgbClr val="7C3AED"/>
+          </a:solidFill>
+          <a:ln>
+            <a:noFill/>
+          </a:ln>
+        </p:spPr>
+        <p:style>
+          <a:lnRef idx="1">
+            <a:schemeClr val="accent1"/>
+          </a:lnRef>
+          <a:fillRef idx="3">
+            <a:schemeClr val="accent1"/>
+          </a:fillRef>
+          <a:effectRef idx="2">
+            <a:schemeClr val="accent1"/>
+          </a:effectRef>
+          <a:fontRef idx="minor">
+            <a:schemeClr val="lt1"/>
+          </a:fontRef>
+        </p:style>
+        <p:txBody>
+          <a:bodyPr rtlCol="0" anchor="ctr"/>
+          <a:lstStyle/>
+          <a:p>
+            <a:pPr algn="ctr"/>
+          </a:p>
+        </p:txBody>
+      </p:sp>
+      <p:sp>
+        <p:nvSpPr>
+          <p:cNvPr id="18" name="TextBox 17"/>
+          <p:cNvSpPr txBox="1"/>
+          <p:nvPr/>
+        </p:nvSpPr>
+        <p:spPr>
+          <a:xfrm>
+            <a:off x="6446520" y="1508760"/>
+            <a:ext cx="2331720" cy="457200"/>
+          </a:xfrm>
+          <a:prstGeom prst="rect">
+            <a:avLst/>
+          </a:prstGeom>
+          <a:noFill/>
+        </p:spPr>
+        <p:txBody>
+          <a:bodyPr wrap="square"/>
+          <a:lstStyle/>
+          <a:p>
+            <a:pPr algn="ctr">
+              <a:defRPr sz="1100" b="1">
+                <a:solidFill>
+                  <a:srgbClr val="7C3AED"/>
+                </a:solidFill>
+                <a:latin typeface="Calibri"/>
+              </a:defRPr>
+            </a:pPr>
+            <a:r>
+              <a:t>Platt</a:t>
+            </a:r>
+            <a:br/>
+            <a:r>
+              <a:t>Calibration</a:t>
+            </a:r>
+          </a:p>
+        </p:txBody>
+      </p:sp>
+      <p:sp>
+        <p:nvSpPr>
+          <p:cNvPr id="19" name="TextBox 18"/>
+          <p:cNvSpPr txBox="1"/>
+          <p:nvPr/>
+        </p:nvSpPr>
+        <p:spPr>
+          <a:xfrm>
+            <a:off x="6446520" y="2011680"/>
+            <a:ext cx="2331720" cy="411480"/>
+          </a:xfrm>
+          <a:prstGeom prst="rect">
+            <a:avLst/>
+          </a:prstGeom>
+          <a:noFill/>
+        </p:spPr>
+        <p:txBody>
+          <a:bodyPr wrap="square"/>
+          <a:lstStyle/>
+          <a:p>
+            <a:pPr algn="ctr">
+              <a:defRPr sz="900" b="0">
+                <a:solidFill>
+                  <a:srgbClr val="374151"/>
+                </a:solidFill>
+                <a:latin typeface="Calibri"/>
+              </a:defRPr>
+            </a:pPr>
+            <a:r>
+              <a:t>Raw → Calibrated</a:t>
+            </a:r>
+            <a:br/>
+            <a:r>
+              <a:t>probabilities</a:t>
+            </a:r>
+          </a:p>
+        </p:txBody>
+      </p:sp>
+      <p:sp>
+        <p:nvSpPr>
+          <p:cNvPr id="20" name="TextBox 19"/>
+          <p:cNvSpPr txBox="1"/>
+          <p:nvPr/>
+        </p:nvSpPr>
+        <p:spPr>
+          <a:xfrm>
+            <a:off x="6446520" y="2468880"/>
+            <a:ext cx="2331720" cy="228600"/>
+          </a:xfrm>
+          <a:prstGeom prst="rect">
+            <a:avLst/>
+          </a:prstGeom>
+          <a:noFill/>
+        </p:spPr>
+        <p:txBody>
+          <a:bodyPr wrap="square"/>
+          <a:lstStyle/>
+          <a:p>
+            <a:pPr algn="ctr">
+              <a:defRPr sz="1000" b="1">
+                <a:solidFill>
+                  <a:srgbClr val="111827"/>
+                </a:solidFill>
+                <a:latin typeface="Consolas"/>
+              </a:defRPr>
+            </a:pPr>
+            <a:r>
+              <a:t>50 calibrated</a:t>
+            </a:r>
+          </a:p>
+        </p:txBody>
+      </p:sp>
+      <p:sp>
+        <p:nvSpPr>
+          <p:cNvPr id="21" name="TextBox 20"/>
+          <p:cNvSpPr txBox="1"/>
+          <p:nvPr/>
+        </p:nvSpPr>
+        <p:spPr>
+          <a:xfrm>
+            <a:off x="8915400" y="1920240"/>
+            <a:ext cx="274320" cy="365760"/>
+          </a:xfrm>
+          <a:prstGeom prst="rect">
+            <a:avLst/>
+          </a:prstGeom>
+          <a:noFill/>
+        </p:spPr>
+        <p:txBody>
+          <a:bodyPr wrap="square"/>
+          <a:lstStyle/>
+          <a:p>
+            <a:pPr algn="ctr">
+              <a:defRPr sz="2200" b="1">
+                <a:solidFill>
+                  <a:srgbClr val="D1D5DB"/>
+                </a:solidFill>
+                <a:latin typeface="Calibri"/>
+              </a:defRPr>
+            </a:pPr>
+            <a:r>
+              <a:t>→</a:t>
+            </a:r>
+          </a:p>
+        </p:txBody>
+      </p:sp>
+      <p:sp>
+        <p:nvSpPr>
+          <p:cNvPr id="22" name="Rectangle 21"/>
+          <p:cNvSpPr/>
+          <p:nvPr/>
+        </p:nvSpPr>
+        <p:spPr>
+          <a:xfrm>
+            <a:off x="9189719" y="1371600"/>
+            <a:ext cx="2606040" cy="1463040"/>
+          </a:xfrm>
+          <a:prstGeom prst="rect">
+            <a:avLst/>
+          </a:prstGeom>
+          <a:solidFill>
+            <a:srgbClr val="FFFFFF"/>
+          </a:solidFill>
+          <a:ln>
+            <a:noFill/>
+          </a:ln>
+        </p:spPr>
+        <p:style>
+          <a:lnRef idx="1">
+            <a:schemeClr val="accent1"/>
+          </a:lnRef>
+          <a:fillRef idx="3">
+            <a:schemeClr val="accent1"/>
+          </a:fillRef>
+          <a:effectRef idx="2">
+            <a:schemeClr val="accent1"/>
+          </a:effectRef>
+          <a:fontRef idx="minor">
+            <a:schemeClr val="lt1"/>
+          </a:fontRef>
+        </p:style>
+        <p:txBody>
+          <a:bodyPr rtlCol="0" anchor="ctr"/>
+          <a:lstStyle/>
+          <a:p>
+            <a:pPr algn="ctr"/>
+          </a:p>
+        </p:txBody>
+      </p:sp>
+      <p:sp>
+        <p:nvSpPr>
+          <p:cNvPr id="23" name="Rectangle 22"/>
+          <p:cNvSpPr/>
+          <p:nvPr/>
+        </p:nvSpPr>
+        <p:spPr>
+          <a:xfrm>
+            <a:off x="9189719" y="1371600"/>
+            <a:ext cx="2606040" cy="54864"/>
+          </a:xfrm>
+          <a:prstGeom prst="rect">
+            <a:avLst/>
+          </a:prstGeom>
+          <a:solidFill>
+            <a:srgbClr val="16A34A"/>
+          </a:solidFill>
+          <a:ln>
+            <a:noFill/>
+          </a:ln>
+        </p:spPr>
+        <p:style>
+          <a:lnRef idx="1">
+            <a:schemeClr val="accent1"/>
+          </a:lnRef>
+          <a:fillRef idx="3">
+            <a:schemeClr val="accent1"/>
+          </a:fillRef>
+          <a:effectRef idx="2">
+            <a:schemeClr val="accent1"/>
+          </a:effectRef>
+          <a:fontRef idx="minor">
+            <a:schemeClr val="lt1"/>
+          </a:fontRef>
+        </p:style>
+        <p:txBody>
+          <a:bodyPr rtlCol="0" anchor="ctr"/>
+          <a:lstStyle/>
+          <a:p>
+            <a:pPr algn="ctr"/>
+          </a:p>
+        </p:txBody>
+      </p:sp>
+      <p:sp>
+        <p:nvSpPr>
+          <p:cNvPr id="24" name="TextBox 23"/>
+          <p:cNvSpPr txBox="1"/>
+          <p:nvPr/>
+        </p:nvSpPr>
+        <p:spPr>
+          <a:xfrm>
+            <a:off x="9326880" y="1508760"/>
+            <a:ext cx="2331720" cy="457200"/>
+          </a:xfrm>
+          <a:prstGeom prst="rect">
+            <a:avLst/>
+          </a:prstGeom>
+          <a:noFill/>
+        </p:spPr>
+        <p:txBody>
+          <a:bodyPr wrap="square"/>
+          <a:lstStyle/>
+          <a:p>
+            <a:pPr algn="ctr">
+              <a:defRPr sz="1100" b="1">
+                <a:solidFill>
+                  <a:srgbClr val="16A34A"/>
+                </a:solidFill>
+                <a:latin typeface="Calibri"/>
+              </a:defRPr>
+            </a:pPr>
+            <a:r>
+              <a:t>eCPM Ranking</a:t>
+            </a:r>
+            <a:br/>
+            <a:r>
+              <a:t>&amp; Quality Filter</a:t>
+            </a:r>
+          </a:p>
+        </p:txBody>
+      </p:sp>
+      <p:sp>
+        <p:nvSpPr>
+          <p:cNvPr id="25" name="TextBox 24"/>
+          <p:cNvSpPr txBox="1"/>
+          <p:nvPr/>
+        </p:nvSpPr>
+        <p:spPr>
+          <a:xfrm>
+            <a:off x="9326880" y="2011680"/>
+            <a:ext cx="2331720" cy="411480"/>
+          </a:xfrm>
+          <a:prstGeom prst="rect">
+            <a:avLst/>
+          </a:prstGeom>
+          <a:noFill/>
+        </p:spPr>
+        <p:txBody>
+          <a:bodyPr wrap="square"/>
+          <a:lstStyle/>
+          <a:p>
+            <a:pPr algn="ctr">
+              <a:defRPr sz="900" b="0">
+                <a:solidFill>
+                  <a:srgbClr val="374151"/>
+                </a:solidFill>
+                <a:latin typeface="Calibri"/>
+              </a:defRPr>
+            </a:pPr>
+            <a:r>
+              <a:t>bid × pCTR × pCVR</a:t>
+            </a:r>
+            <a:br/>
+            <a:r>
+              <a:t>× quality_mult</a:t>
+            </a:r>
+          </a:p>
+        </p:txBody>
+      </p:sp>
+      <p:sp>
+        <p:nvSpPr>
+          <p:cNvPr id="26" name="TextBox 25"/>
+          <p:cNvSpPr txBox="1"/>
+          <p:nvPr/>
+        </p:nvSpPr>
+        <p:spPr>
+          <a:xfrm>
+            <a:off x="9326880" y="2468880"/>
+            <a:ext cx="2331720" cy="228600"/>
+          </a:xfrm>
+          <a:prstGeom prst="rect">
+            <a:avLst/>
+          </a:prstGeom>
+          <a:noFill/>
+        </p:spPr>
+        <p:txBody>
+          <a:bodyPr wrap="square"/>
+          <a:lstStyle/>
+          <a:p>
+            <a:pPr algn="ctr">
+              <a:defRPr sz="1000" b="1">
+                <a:solidFill>
+                  <a:srgbClr val="111827"/>
+                </a:solidFill>
+                <a:latin typeface="Consolas"/>
+              </a:defRPr>
+            </a:pPr>
+            <a:r>
+              <a:t>8 winners</a:t>
+            </a:r>
+          </a:p>
+        </p:txBody>
+      </p:sp>
+      <p:sp>
+        <p:nvSpPr>
+          <p:cNvPr id="27" name="Rectangle 26"/>
+          <p:cNvSpPr/>
+          <p:nvPr/>
+        </p:nvSpPr>
+        <p:spPr>
+          <a:xfrm>
+            <a:off x="548640" y="3108960"/>
+            <a:ext cx="6583680" cy="2194560"/>
+          </a:xfrm>
+          <a:prstGeom prst="rect">
+            <a:avLst/>
+          </a:prstGeom>
+          <a:solidFill>
+            <a:srgbClr val="FFFFFF"/>
+          </a:solidFill>
+          <a:ln>
+            <a:noFill/>
+          </a:ln>
+        </p:spPr>
+        <p:style>
+          <a:lnRef idx="1">
+            <a:schemeClr val="accent1"/>
+          </a:lnRef>
+          <a:fillRef idx="3">
+            <a:schemeClr val="accent1"/>
+          </a:fillRef>
+          <a:effectRef idx="2">
+            <a:schemeClr val="accent1"/>
+          </a:effectRef>
+          <a:fontRef idx="minor">
+            <a:schemeClr val="lt1"/>
+          </a:fontRef>
+        </p:style>
+        <p:txBody>
+          <a:bodyPr rtlCol="0" anchor="ctr"/>
+          <a:lstStyle/>
+          <a:p>
+            <a:pPr algn="ctr"/>
+          </a:p>
+        </p:txBody>
+      </p:sp>
+      <p:sp>
+        <p:nvSpPr>
+          <p:cNvPr id="28" name="TextBox 27"/>
+          <p:cNvSpPr txBox="1"/>
+          <p:nvPr/>
+        </p:nvSpPr>
+        <p:spPr>
+          <a:xfrm>
+            <a:off x="731520" y="3200400"/>
+            <a:ext cx="6217920" cy="274320"/>
+          </a:xfrm>
+          <a:prstGeom prst="rect">
+            <a:avLst/>
+          </a:prstGeom>
+          <a:noFill/>
+        </p:spPr>
+        <p:txBody>
+          <a:bodyPr wrap="square"/>
+          <a:lstStyle/>
+          <a:p>
+            <a:pPr algn="l">
+              <a:defRPr sz="1200" b="1">
+                <a:solidFill>
+                  <a:srgbClr val="111827"/>
+                </a:solidFill>
+                <a:latin typeface="Calibri"/>
+              </a:defRPr>
+            </a:pPr>
+            <a:r>
+              <a:t>Ablation Study: Component Contribution</a:t>
+            </a:r>
+          </a:p>
+        </p:txBody>
+      </p:sp>
+      <p:sp>
+        <p:nvSpPr>
+          <p:cNvPr id="29" name="Rectangle 28"/>
+          <p:cNvSpPr/>
+          <p:nvPr/>
+        </p:nvSpPr>
+        <p:spPr>
+          <a:xfrm>
+            <a:off x="640080" y="3520440"/>
+            <a:ext cx="6400800" cy="256032"/>
+          </a:xfrm>
+          <a:prstGeom prst="rect">
+            <a:avLst/>
+          </a:prstGeom>
+          <a:solidFill>
+            <a:srgbClr val="DBEAFE"/>
+          </a:solidFill>
+          <a:ln>
+            <a:noFill/>
+          </a:ln>
+        </p:spPr>
+        <p:style>
+          <a:lnRef idx="1">
+            <a:schemeClr val="accent1"/>
+          </a:lnRef>
+          <a:fillRef idx="3">
+            <a:schemeClr val="accent1"/>
+          </a:fillRef>
+          <a:effectRef idx="2">
+            <a:schemeClr val="accent1"/>
+          </a:effectRef>
+          <a:fontRef idx="minor">
+            <a:schemeClr val="lt1"/>
+          </a:fontRef>
+        </p:style>
+        <p:txBody>
+          <a:bodyPr rtlCol="0" anchor="ctr"/>
+          <a:lstStyle/>
+          <a:p>
+            <a:pPr algn="ctr"/>
+          </a:p>
+        </p:txBody>
+      </p:sp>
+      <p:sp>
+        <p:nvSpPr>
+          <p:cNvPr id="30" name="TextBox 29"/>
+          <p:cNvSpPr txBox="1"/>
+          <p:nvPr/>
+        </p:nvSpPr>
+        <p:spPr>
+          <a:xfrm>
+            <a:off x="685800" y="3538728"/>
+            <a:ext cx="1261872" cy="256032"/>
+          </a:xfrm>
+          <a:prstGeom prst="rect">
+            <a:avLst/>
+          </a:prstGeom>
+          <a:noFill/>
+        </p:spPr>
+        <p:txBody>
+          <a:bodyPr wrap="square"/>
+          <a:lstStyle/>
+          <a:p>
+            <a:pPr algn="l">
+              <a:defRPr sz="800" b="1">
+                <a:solidFill>
+                  <a:srgbClr val="1D4ED8"/>
+                </a:solidFill>
+                <a:latin typeface="Calibri"/>
+              </a:defRPr>
+            </a:pPr>
+            <a:r>
+              <a:t>Variant</a:t>
+            </a:r>
+          </a:p>
+        </p:txBody>
+      </p:sp>
+      <p:sp>
+        <p:nvSpPr>
+          <p:cNvPr id="31" name="TextBox 30"/>
+          <p:cNvSpPr txBox="1"/>
+          <p:nvPr/>
+        </p:nvSpPr>
+        <p:spPr>
+          <a:xfrm>
+            <a:off x="1947672" y="3538728"/>
+            <a:ext cx="1261872" cy="256032"/>
+          </a:xfrm>
+          <a:prstGeom prst="rect">
+            <a:avLst/>
+          </a:prstGeom>
+          <a:noFill/>
+        </p:spPr>
+        <p:txBody>
+          <a:bodyPr wrap="square"/>
+          <a:lstStyle/>
+          <a:p>
+            <a:pPr algn="l">
+              <a:defRPr sz="800" b="1">
+                <a:solidFill>
+                  <a:srgbClr val="1D4ED8"/>
+                </a:solidFill>
+                <a:latin typeface="Calibri"/>
+              </a:defRPr>
+            </a:pPr>
+            <a:r>
+              <a:t>Revenue</a:t>
+            </a:r>
+          </a:p>
+        </p:txBody>
+      </p:sp>
+      <p:sp>
+        <p:nvSpPr>
+          <p:cNvPr id="32" name="TextBox 31"/>
+          <p:cNvSpPr txBox="1"/>
+          <p:nvPr/>
+        </p:nvSpPr>
+        <p:spPr>
+          <a:xfrm>
+            <a:off x="3209544" y="3538728"/>
+            <a:ext cx="1261872" cy="256032"/>
+          </a:xfrm>
+          <a:prstGeom prst="rect">
+            <a:avLst/>
+          </a:prstGeom>
+          <a:noFill/>
+        </p:spPr>
+        <p:txBody>
+          <a:bodyPr wrap="square"/>
+          <a:lstStyle/>
+          <a:p>
+            <a:pPr algn="l">
+              <a:defRPr sz="800" b="1">
+                <a:solidFill>
+                  <a:srgbClr val="1D4ED8"/>
+                </a:solidFill>
+                <a:latin typeface="Calibri"/>
+              </a:defRPr>
+            </a:pPr>
+            <a:r>
+              <a:t>CTR</a:t>
+            </a:r>
+          </a:p>
+        </p:txBody>
+      </p:sp>
+      <p:sp>
+        <p:nvSpPr>
+          <p:cNvPr id="33" name="TextBox 32"/>
+          <p:cNvSpPr txBox="1"/>
+          <p:nvPr/>
+        </p:nvSpPr>
+        <p:spPr>
+          <a:xfrm>
+            <a:off x="4471416" y="3538728"/>
+            <a:ext cx="1261872" cy="256032"/>
+          </a:xfrm>
+          <a:prstGeom prst="rect">
+            <a:avLst/>
+          </a:prstGeom>
+          <a:noFill/>
+        </p:spPr>
+        <p:txBody>
+          <a:bodyPr wrap="square"/>
+          <a:lstStyle/>
+          <a:p>
+            <a:pPr algn="l">
+              <a:defRPr sz="800" b="1">
+                <a:solidFill>
+                  <a:srgbClr val="1D4ED8"/>
+                </a:solidFill>
+                <a:latin typeface="Calibri"/>
+              </a:defRPr>
+            </a:pPr>
+            <a:r>
+              <a:t>Cal Error</a:t>
+            </a:r>
+          </a:p>
+        </p:txBody>
+      </p:sp>
+      <p:sp>
+        <p:nvSpPr>
+          <p:cNvPr id="34" name="TextBox 33"/>
+          <p:cNvSpPr txBox="1"/>
+          <p:nvPr/>
+        </p:nvSpPr>
+        <p:spPr>
+          <a:xfrm>
+            <a:off x="5733288" y="3538728"/>
+            <a:ext cx="1261872" cy="256032"/>
+          </a:xfrm>
+          <a:prstGeom prst="rect">
+            <a:avLst/>
+          </a:prstGeom>
+          <a:noFill/>
+        </p:spPr>
+        <p:txBody>
+          <a:bodyPr wrap="square"/>
+          <a:lstStyle/>
+          <a:p>
+            <a:pPr algn="l">
+              <a:defRPr sz="800" b="1">
+                <a:solidFill>
+                  <a:srgbClr val="1D4ED8"/>
+                </a:solidFill>
+                <a:latin typeface="Calibri"/>
+              </a:defRPr>
+            </a:pPr>
+            <a:r>
+              <a:t>Lift</a:t>
+            </a:r>
+          </a:p>
+        </p:txBody>
+      </p:sp>
+      <p:sp>
+        <p:nvSpPr>
+          <p:cNvPr id="35" name="TextBox 34"/>
+          <p:cNvSpPr txBox="1"/>
+          <p:nvPr/>
+        </p:nvSpPr>
+        <p:spPr>
+          <a:xfrm>
+            <a:off x="685800" y="3794759"/>
+            <a:ext cx="1261872" cy="256032"/>
+          </a:xfrm>
+          <a:prstGeom prst="rect">
+            <a:avLst/>
+          </a:prstGeom>
+          <a:noFill/>
+        </p:spPr>
+        <p:txBody>
+          <a:bodyPr wrap="square"/>
+          <a:lstStyle/>
+          <a:p>
+            <a:pPr algn="l">
+              <a:defRPr sz="900" b="0">
+                <a:solidFill>
+                  <a:srgbClr val="374151"/>
+                </a:solidFill>
+                <a:latin typeface="Calibri"/>
+              </a:defRPr>
+            </a:pPr>
+            <a:r>
+              <a:t>Full Model</a:t>
+            </a:r>
+          </a:p>
+        </p:txBody>
+      </p:sp>
+      <p:sp>
+        <p:nvSpPr>
+          <p:cNvPr id="36" name="TextBox 35"/>
+          <p:cNvSpPr txBox="1"/>
+          <p:nvPr/>
+        </p:nvSpPr>
+        <p:spPr>
+          <a:xfrm>
+            <a:off x="1947672" y="3794759"/>
+            <a:ext cx="1261872" cy="256032"/>
+          </a:xfrm>
+          <a:prstGeom prst="rect">
+            <a:avLst/>
+          </a:prstGeom>
+          <a:noFill/>
+        </p:spPr>
+        <p:txBody>
+          <a:bodyPr wrap="square"/>
+          <a:lstStyle/>
+          <a:p>
+            <a:pPr algn="l">
+              <a:defRPr sz="900" b="0">
+                <a:solidFill>
+                  <a:srgbClr val="374151"/>
+                </a:solidFill>
+                <a:latin typeface="Calibri"/>
+              </a:defRPr>
+            </a:pPr>
+            <a:r>
+              <a:t>$684</a:t>
+            </a:r>
+          </a:p>
+        </p:txBody>
+      </p:sp>
+      <p:sp>
+        <p:nvSpPr>
+          <p:cNvPr id="37" name="TextBox 36"/>
+          <p:cNvSpPr txBox="1"/>
+          <p:nvPr/>
+        </p:nvSpPr>
+        <p:spPr>
+          <a:xfrm>
+            <a:off x="3209544" y="3794759"/>
+            <a:ext cx="1261872" cy="256032"/>
+          </a:xfrm>
+          <a:prstGeom prst="rect">
+            <a:avLst/>
+          </a:prstGeom>
+          <a:noFill/>
+        </p:spPr>
+        <p:txBody>
+          <a:bodyPr wrap="square"/>
+          <a:lstStyle/>
+          <a:p>
+            <a:pPr algn="l">
+              <a:defRPr sz="900" b="0">
+                <a:solidFill>
+                  <a:srgbClr val="374151"/>
+                </a:solidFill>
+                <a:latin typeface="Calibri"/>
+              </a:defRPr>
+            </a:pPr>
+            <a:r>
+              <a:t>3.2%</a:t>
+            </a:r>
+          </a:p>
+        </p:txBody>
+      </p:sp>
+      <p:sp>
+        <p:nvSpPr>
+          <p:cNvPr id="38" name="TextBox 37"/>
+          <p:cNvSpPr txBox="1"/>
+          <p:nvPr/>
+        </p:nvSpPr>
+        <p:spPr>
+          <a:xfrm>
+            <a:off x="4471416" y="3794759"/>
+            <a:ext cx="1261872" cy="256032"/>
+          </a:xfrm>
+          <a:prstGeom prst="rect">
+            <a:avLst/>
+          </a:prstGeom>
+          <a:noFill/>
+        </p:spPr>
+        <p:txBody>
+          <a:bodyPr wrap="square"/>
+          <a:lstStyle/>
+          <a:p>
+            <a:pPr algn="l">
+              <a:defRPr sz="900" b="0">
+                <a:solidFill>
+                  <a:srgbClr val="374151"/>
+                </a:solidFill>
+                <a:latin typeface="Calibri"/>
+              </a:defRPr>
+            </a:pPr>
+            <a:r>
+              <a:t>0.018</a:t>
+            </a:r>
+          </a:p>
+        </p:txBody>
+      </p:sp>
+      <p:sp>
+        <p:nvSpPr>
+          <p:cNvPr id="39" name="TextBox 38"/>
+          <p:cNvSpPr txBox="1"/>
+          <p:nvPr/>
+        </p:nvSpPr>
+        <p:spPr>
+          <a:xfrm>
+            <a:off x="5733288" y="3794759"/>
+            <a:ext cx="1261872" cy="256032"/>
+          </a:xfrm>
+          <a:prstGeom prst="rect">
+            <a:avLst/>
+          </a:prstGeom>
+          <a:noFill/>
+        </p:spPr>
+        <p:txBody>
+          <a:bodyPr wrap="square"/>
+          <a:lstStyle/>
+          <a:p>
+            <a:pPr algn="l">
+              <a:defRPr sz="900" b="0">
+                <a:solidFill>
+                  <a:srgbClr val="374151"/>
+                </a:solidFill>
+                <a:latin typeface="Calibri"/>
+              </a:defRPr>
+            </a:pPr>
+            <a:r>
+              <a:t>Baseline</a:t>
+            </a:r>
+          </a:p>
+        </p:txBody>
+      </p:sp>
+      <p:sp>
+        <p:nvSpPr>
+          <p:cNvPr id="40" name="Rectangle 39"/>
+          <p:cNvSpPr/>
+          <p:nvPr/>
+        </p:nvSpPr>
+        <p:spPr>
+          <a:xfrm>
+            <a:off x="685800" y="4023360"/>
+            <a:ext cx="6309360" cy="4572"/>
+          </a:xfrm>
+          <a:prstGeom prst="rect">
+            <a:avLst/>
+          </a:prstGeom>
+          <a:solidFill>
+            <a:srgbClr val="F3F4F6"/>
+          </a:solidFill>
+          <a:ln>
+            <a:noFill/>
+          </a:ln>
+        </p:spPr>
+        <p:style>
+          <a:lnRef idx="1">
+            <a:schemeClr val="accent1"/>
+          </a:lnRef>
+          <a:fillRef idx="3">
+            <a:schemeClr val="accent1"/>
+          </a:fillRef>
+          <a:effectRef idx="2">
+            <a:schemeClr val="accent1"/>
+          </a:effectRef>
+          <a:fontRef idx="minor">
+            <a:schemeClr val="lt1"/>
+          </a:fontRef>
+        </p:style>
+        <p:txBody>
+          <a:bodyPr rtlCol="0" anchor="ctr"/>
+          <a:lstStyle/>
+          <a:p>
+            <a:pPr algn="ctr"/>
+          </a:p>
+        </p:txBody>
+      </p:sp>
+      <p:sp>
+        <p:nvSpPr>
+          <p:cNvPr id="41" name="TextBox 40"/>
+          <p:cNvSpPr txBox="1"/>
+          <p:nvPr/>
+        </p:nvSpPr>
+        <p:spPr>
+          <a:xfrm>
+            <a:off x="685800" y="4050791"/>
+            <a:ext cx="1261872" cy="256032"/>
+          </a:xfrm>
+          <a:prstGeom prst="rect">
+            <a:avLst/>
+          </a:prstGeom>
+          <a:noFill/>
+        </p:spPr>
+        <p:txBody>
+          <a:bodyPr wrap="square"/>
+          <a:lstStyle/>
+          <a:p>
+            <a:pPr algn="l">
+              <a:defRPr sz="900" b="0">
+                <a:solidFill>
+                  <a:srgbClr val="374151"/>
+                </a:solidFill>
+                <a:latin typeface="Calibri"/>
+              </a:defRPr>
+            </a:pPr>
+            <a:r>
+              <a:t>No Calibration</a:t>
+            </a:r>
+          </a:p>
+        </p:txBody>
+      </p:sp>
+      <p:sp>
+        <p:nvSpPr>
+          <p:cNvPr id="42" name="TextBox 41"/>
+          <p:cNvSpPr txBox="1"/>
+          <p:nvPr/>
+        </p:nvSpPr>
+        <p:spPr>
+          <a:xfrm>
+            <a:off x="1947672" y="4050791"/>
+            <a:ext cx="1261872" cy="256032"/>
+          </a:xfrm>
+          <a:prstGeom prst="rect">
+            <a:avLst/>
+          </a:prstGeom>
+          <a:noFill/>
+        </p:spPr>
+        <p:txBody>
+          <a:bodyPr wrap="square"/>
+          <a:lstStyle/>
+          <a:p>
+            <a:pPr algn="l">
+              <a:defRPr sz="900" b="0">
+                <a:solidFill>
+                  <a:srgbClr val="374151"/>
+                </a:solidFill>
+                <a:latin typeface="Calibri"/>
+              </a:defRPr>
+            </a:pPr>
+            <a:r>
+              <a:t>$651</a:t>
+            </a:r>
+          </a:p>
+        </p:txBody>
+      </p:sp>
+      <p:sp>
+        <p:nvSpPr>
+          <p:cNvPr id="43" name="TextBox 42"/>
+          <p:cNvSpPr txBox="1"/>
+          <p:nvPr/>
+        </p:nvSpPr>
+        <p:spPr>
+          <a:xfrm>
+            <a:off x="3209544" y="4050791"/>
+            <a:ext cx="1261872" cy="256032"/>
+          </a:xfrm>
+          <a:prstGeom prst="rect">
+            <a:avLst/>
+          </a:prstGeom>
+          <a:noFill/>
+        </p:spPr>
+        <p:txBody>
+          <a:bodyPr wrap="square"/>
+          <a:lstStyle/>
+          <a:p>
+            <a:pPr algn="l">
+              <a:defRPr sz="900" b="0">
+                <a:solidFill>
+                  <a:srgbClr val="374151"/>
+                </a:solidFill>
+                <a:latin typeface="Calibri"/>
+              </a:defRPr>
+            </a:pPr>
+            <a:r>
+              <a:t>3.1%</a:t>
+            </a:r>
+          </a:p>
+        </p:txBody>
+      </p:sp>
+      <p:sp>
+        <p:nvSpPr>
+          <p:cNvPr id="44" name="TextBox 43"/>
+          <p:cNvSpPr txBox="1"/>
+          <p:nvPr/>
+        </p:nvSpPr>
+        <p:spPr>
+          <a:xfrm>
+            <a:off x="4471416" y="4050791"/>
+            <a:ext cx="1261872" cy="256032"/>
+          </a:xfrm>
+          <a:prstGeom prst="rect">
+            <a:avLst/>
+          </a:prstGeom>
+          <a:noFill/>
+        </p:spPr>
+        <p:txBody>
+          <a:bodyPr wrap="square"/>
+          <a:lstStyle/>
+          <a:p>
+            <a:pPr algn="l">
+              <a:defRPr sz="900" b="0">
+                <a:solidFill>
+                  <a:srgbClr val="374151"/>
+                </a:solidFill>
+                <a:latin typeface="Calibri"/>
+              </a:defRPr>
+            </a:pPr>
+            <a:r>
+              <a:t>0.087</a:t>
+            </a:r>
+          </a:p>
+        </p:txBody>
+      </p:sp>
+      <p:sp>
+        <p:nvSpPr>
+          <p:cNvPr id="45" name="TextBox 44"/>
+          <p:cNvSpPr txBox="1"/>
+          <p:nvPr/>
+        </p:nvSpPr>
+        <p:spPr>
+          <a:xfrm>
+            <a:off x="5733288" y="4050791"/>
+            <a:ext cx="1261872" cy="256032"/>
+          </a:xfrm>
+          <a:prstGeom prst="rect">
+            <a:avLst/>
+          </a:prstGeom>
+          <a:noFill/>
+        </p:spPr>
+        <p:txBody>
+          <a:bodyPr wrap="square"/>
+          <a:lstStyle/>
+          <a:p>
+            <a:pPr algn="l">
+              <a:defRPr sz="900" b="0">
+                <a:solidFill>
+                  <a:srgbClr val="374151"/>
+                </a:solidFill>
+                <a:latin typeface="Calibri"/>
+              </a:defRPr>
+            </a:pPr>
+            <a:r>
+              <a:t>-4.8%</a:t>
+            </a:r>
+          </a:p>
+        </p:txBody>
+      </p:sp>
+      <p:sp>
+        <p:nvSpPr>
+          <p:cNvPr id="46" name="Rectangle 45"/>
+          <p:cNvSpPr/>
+          <p:nvPr/>
+        </p:nvSpPr>
+        <p:spPr>
+          <a:xfrm>
+            <a:off x="685800" y="4279392"/>
+            <a:ext cx="6309360" cy="4572"/>
+          </a:xfrm>
+          <a:prstGeom prst="rect">
+            <a:avLst/>
+          </a:prstGeom>
+          <a:solidFill>
+            <a:srgbClr val="F3F4F6"/>
+          </a:solidFill>
+          <a:ln>
+            <a:noFill/>
+          </a:ln>
+        </p:spPr>
+        <p:style>
+          <a:lnRef idx="1">
+            <a:schemeClr val="accent1"/>
+          </a:lnRef>
+          <a:fillRef idx="3">
+            <a:schemeClr val="accent1"/>
+          </a:fillRef>
+          <a:effectRef idx="2">
+            <a:schemeClr val="accent1"/>
+          </a:effectRef>
+          <a:fontRef idx="minor">
+            <a:schemeClr val="lt1"/>
+          </a:fontRef>
+        </p:style>
+        <p:txBody>
+          <a:bodyPr rtlCol="0" anchor="ctr"/>
+          <a:lstStyle/>
+          <a:p>
+            <a:pPr algn="ctr"/>
+          </a:p>
+        </p:txBody>
+      </p:sp>
+      <p:sp>
+        <p:nvSpPr>
+          <p:cNvPr id="47" name="TextBox 46"/>
+          <p:cNvSpPr txBox="1"/>
+          <p:nvPr/>
+        </p:nvSpPr>
+        <p:spPr>
+          <a:xfrm>
+            <a:off x="685800" y="4306824"/>
+            <a:ext cx="1261872" cy="256032"/>
+          </a:xfrm>
+          <a:prstGeom prst="rect">
+            <a:avLst/>
+          </a:prstGeom>
+          <a:noFill/>
+        </p:spPr>
+        <p:txBody>
+          <a:bodyPr wrap="square"/>
+          <a:lstStyle/>
+          <a:p>
+            <a:pPr algn="l">
+              <a:defRPr sz="900" b="0">
+                <a:solidFill>
+                  <a:srgbClr val="374151"/>
+                </a:solidFill>
+                <a:latin typeface="Calibri"/>
+              </a:defRPr>
+            </a:pPr>
+            <a:r>
+              <a:t>Single-Task (pCTR only)</a:t>
+            </a:r>
+          </a:p>
+        </p:txBody>
+      </p:sp>
+      <p:sp>
+        <p:nvSpPr>
+          <p:cNvPr id="48" name="TextBox 47"/>
+          <p:cNvSpPr txBox="1"/>
+          <p:nvPr/>
+        </p:nvSpPr>
+        <p:spPr>
+          <a:xfrm>
+            <a:off x="1947672" y="4306824"/>
+            <a:ext cx="1261872" cy="256032"/>
+          </a:xfrm>
+          <a:prstGeom prst="rect">
+            <a:avLst/>
+          </a:prstGeom>
+          <a:noFill/>
+        </p:spPr>
+        <p:txBody>
+          <a:bodyPr wrap="square"/>
+          <a:lstStyle/>
+          <a:p>
+            <a:pPr algn="l">
+              <a:defRPr sz="900" b="0">
+                <a:solidFill>
+                  <a:srgbClr val="374151"/>
+                </a:solidFill>
+                <a:latin typeface="Calibri"/>
+              </a:defRPr>
+            </a:pPr>
+            <a:r>
+              <a:t>$612</a:t>
+            </a:r>
+          </a:p>
+        </p:txBody>
+      </p:sp>
+      <p:sp>
+        <p:nvSpPr>
+          <p:cNvPr id="49" name="TextBox 48"/>
+          <p:cNvSpPr txBox="1"/>
+          <p:nvPr/>
+        </p:nvSpPr>
+        <p:spPr>
+          <a:xfrm>
+            <a:off x="3209544" y="4306824"/>
+            <a:ext cx="1261872" cy="256032"/>
+          </a:xfrm>
+          <a:prstGeom prst="rect">
+            <a:avLst/>
+          </a:prstGeom>
+          <a:noFill/>
+        </p:spPr>
+        <p:txBody>
+          <a:bodyPr wrap="square"/>
+          <a:lstStyle/>
+          <a:p>
+            <a:pPr algn="l">
+              <a:defRPr sz="900" b="0">
+                <a:solidFill>
+                  <a:srgbClr val="374151"/>
+                </a:solidFill>
+                <a:latin typeface="Calibri"/>
+              </a:defRPr>
+            </a:pPr>
+            <a:r>
+              <a:t>2.9%</a:t>
+            </a:r>
+          </a:p>
+        </p:txBody>
+      </p:sp>
+      <p:sp>
+        <p:nvSpPr>
+          <p:cNvPr id="50" name="TextBox 49"/>
+          <p:cNvSpPr txBox="1"/>
+          <p:nvPr/>
+        </p:nvSpPr>
+        <p:spPr>
+          <a:xfrm>
+            <a:off x="4471416" y="4306824"/>
+            <a:ext cx="1261872" cy="256032"/>
+          </a:xfrm>
+          <a:prstGeom prst="rect">
+            <a:avLst/>
+          </a:prstGeom>
+          <a:noFill/>
+        </p:spPr>
+        <p:txBody>
+          <a:bodyPr wrap="square"/>
+          <a:lstStyle/>
+          <a:p>
+            <a:pPr algn="l">
+              <a:defRPr sz="900" b="0">
+                <a:solidFill>
+                  <a:srgbClr val="374151"/>
+                </a:solidFill>
+                <a:latin typeface="Calibri"/>
+              </a:defRPr>
+            </a:pPr>
+            <a:r>
+              <a:t>0.032</a:t>
+            </a:r>
+          </a:p>
+        </p:txBody>
+      </p:sp>
+      <p:sp>
+        <p:nvSpPr>
+          <p:cNvPr id="51" name="TextBox 50"/>
+          <p:cNvSpPr txBox="1"/>
+          <p:nvPr/>
+        </p:nvSpPr>
+        <p:spPr>
+          <a:xfrm>
+            <a:off x="5733288" y="4306824"/>
+            <a:ext cx="1261872" cy="256032"/>
+          </a:xfrm>
+          <a:prstGeom prst="rect">
+            <a:avLst/>
+          </a:prstGeom>
+          <a:noFill/>
+        </p:spPr>
+        <p:txBody>
+          <a:bodyPr wrap="square"/>
+          <a:lstStyle/>
+          <a:p>
+            <a:pPr algn="l">
+              <a:defRPr sz="900" b="0">
+                <a:solidFill>
+                  <a:srgbClr val="374151"/>
+                </a:solidFill>
+                <a:latin typeface="Calibri"/>
+              </a:defRPr>
+            </a:pPr>
+            <a:r>
+              <a:t>-10.5%</a:t>
+            </a:r>
+          </a:p>
+        </p:txBody>
+      </p:sp>
+      <p:sp>
+        <p:nvSpPr>
+          <p:cNvPr id="52" name="Rectangle 51"/>
+          <p:cNvSpPr/>
+          <p:nvPr/>
+        </p:nvSpPr>
+        <p:spPr>
+          <a:xfrm>
+            <a:off x="685800" y="4535424"/>
+            <a:ext cx="6309360" cy="4572"/>
+          </a:xfrm>
+          <a:prstGeom prst="rect">
+            <a:avLst/>
+          </a:prstGeom>
+          <a:solidFill>
+            <a:srgbClr val="F3F4F6"/>
+          </a:solidFill>
+          <a:ln>
+            <a:noFill/>
+          </a:ln>
+        </p:spPr>
+        <p:style>
+          <a:lnRef idx="1">
+            <a:schemeClr val="accent1"/>
+          </a:lnRef>
+          <a:fillRef idx="3">
+            <a:schemeClr val="accent1"/>
+          </a:fillRef>
+          <a:effectRef idx="2">
+            <a:schemeClr val="accent1"/>
+          </a:effectRef>
+          <a:fontRef idx="minor">
+            <a:schemeClr val="lt1"/>
+          </a:fontRef>
+        </p:style>
+        <p:txBody>
+          <a:bodyPr rtlCol="0" anchor="ctr"/>
+          <a:lstStyle/>
+          <a:p>
+            <a:pPr algn="ctr"/>
+          </a:p>
+        </p:txBody>
+      </p:sp>
+      <p:sp>
+        <p:nvSpPr>
+          <p:cNvPr id="53" name="TextBox 52"/>
+          <p:cNvSpPr txBox="1"/>
+          <p:nvPr/>
+        </p:nvSpPr>
+        <p:spPr>
+          <a:xfrm>
+            <a:off x="685800" y="4562856"/>
+            <a:ext cx="1261872" cy="256032"/>
+          </a:xfrm>
+          <a:prstGeom prst="rect">
+            <a:avLst/>
+          </a:prstGeom>
+          <a:noFill/>
+        </p:spPr>
+        <p:txBody>
+          <a:bodyPr wrap="square"/>
+          <a:lstStyle/>
+          <a:p>
+            <a:pPr algn="l">
+              <a:defRPr sz="900" b="0">
+                <a:solidFill>
+                  <a:srgbClr val="374151"/>
+                </a:solidFill>
+                <a:latin typeface="Calibri"/>
+              </a:defRPr>
+            </a:pPr>
+            <a:r>
+              <a:t>No Cross-Features</a:t>
+            </a:r>
+          </a:p>
+        </p:txBody>
+      </p:sp>
+      <p:sp>
+        <p:nvSpPr>
+          <p:cNvPr id="54" name="TextBox 53"/>
+          <p:cNvSpPr txBox="1"/>
+          <p:nvPr/>
+        </p:nvSpPr>
+        <p:spPr>
+          <a:xfrm>
+            <a:off x="1947672" y="4562856"/>
+            <a:ext cx="1261872" cy="256032"/>
+          </a:xfrm>
+          <a:prstGeom prst="rect">
+            <a:avLst/>
+          </a:prstGeom>
+          <a:noFill/>
+        </p:spPr>
+        <p:txBody>
+          <a:bodyPr wrap="square"/>
+          <a:lstStyle/>
+          <a:p>
+            <a:pPr algn="l">
+              <a:defRPr sz="900" b="0">
+                <a:solidFill>
+                  <a:srgbClr val="374151"/>
+                </a:solidFill>
+                <a:latin typeface="Calibri"/>
+              </a:defRPr>
+            </a:pPr>
+            <a:r>
+              <a:t>$638</a:t>
+            </a:r>
+          </a:p>
+        </p:txBody>
+      </p:sp>
+      <p:sp>
+        <p:nvSpPr>
+          <p:cNvPr id="55" name="TextBox 54"/>
+          <p:cNvSpPr txBox="1"/>
+          <p:nvPr/>
+        </p:nvSpPr>
+        <p:spPr>
+          <a:xfrm>
+            <a:off x="3209544" y="4562856"/>
+            <a:ext cx="1261872" cy="256032"/>
+          </a:xfrm>
+          <a:prstGeom prst="rect">
+            <a:avLst/>
+          </a:prstGeom>
+          <a:noFill/>
+        </p:spPr>
+        <p:txBody>
+          <a:bodyPr wrap="square"/>
+          <a:lstStyle/>
+          <a:p>
+            <a:pPr algn="l">
+              <a:defRPr sz="900" b="0">
+                <a:solidFill>
+                  <a:srgbClr val="374151"/>
+                </a:solidFill>
+                <a:latin typeface="Calibri"/>
+              </a:defRPr>
+            </a:pPr>
+            <a:r>
+              <a:t>3.0%</a:t>
+            </a:r>
+          </a:p>
+        </p:txBody>
+      </p:sp>
+      <p:sp>
+        <p:nvSpPr>
+          <p:cNvPr id="56" name="TextBox 55"/>
+          <p:cNvSpPr txBox="1"/>
+          <p:nvPr/>
+        </p:nvSpPr>
+        <p:spPr>
+          <a:xfrm>
+            <a:off x="4471416" y="4562856"/>
+            <a:ext cx="1261872" cy="256032"/>
+          </a:xfrm>
+          <a:prstGeom prst="rect">
+            <a:avLst/>
+          </a:prstGeom>
+          <a:noFill/>
+        </p:spPr>
+        <p:txBody>
+          <a:bodyPr wrap="square"/>
+          <a:lstStyle/>
+          <a:p>
+            <a:pPr algn="l">
+              <a:defRPr sz="900" b="0">
+                <a:solidFill>
+                  <a:srgbClr val="374151"/>
+                </a:solidFill>
+                <a:latin typeface="Calibri"/>
+              </a:defRPr>
+            </a:pPr>
+            <a:r>
+              <a:t>0.022</a:t>
+            </a:r>
+          </a:p>
+        </p:txBody>
+      </p:sp>
+      <p:sp>
+        <p:nvSpPr>
+          <p:cNvPr id="57" name="TextBox 56"/>
+          <p:cNvSpPr txBox="1"/>
+          <p:nvPr/>
+        </p:nvSpPr>
+        <p:spPr>
+          <a:xfrm>
+            <a:off x="5733288" y="4562856"/>
+            <a:ext cx="1261872" cy="256032"/>
+          </a:xfrm>
+          <a:prstGeom prst="rect">
+            <a:avLst/>
+          </a:prstGeom>
+          <a:noFill/>
+        </p:spPr>
+        <p:txBody>
+          <a:bodyPr wrap="square"/>
+          <a:lstStyle/>
+          <a:p>
+            <a:pPr algn="l">
+              <a:defRPr sz="900" b="0">
+                <a:solidFill>
+                  <a:srgbClr val="374151"/>
+                </a:solidFill>
+                <a:latin typeface="Calibri"/>
+              </a:defRPr>
+            </a:pPr>
+            <a:r>
+              <a:t>-6.7%</a:t>
+            </a:r>
+          </a:p>
+        </p:txBody>
+      </p:sp>
+      <p:sp>
+        <p:nvSpPr>
+          <p:cNvPr id="58" name="Rectangle 57"/>
+          <p:cNvSpPr/>
+          <p:nvPr/>
+        </p:nvSpPr>
+        <p:spPr>
+          <a:xfrm>
+            <a:off x="685800" y="4791456"/>
+            <a:ext cx="6309360" cy="4572"/>
+          </a:xfrm>
+          <a:prstGeom prst="rect">
+            <a:avLst/>
+          </a:prstGeom>
+          <a:solidFill>
+            <a:srgbClr val="F3F4F6"/>
+          </a:solidFill>
+          <a:ln>
+            <a:noFill/>
+          </a:ln>
+        </p:spPr>
+        <p:style>
+          <a:lnRef idx="1">
+            <a:schemeClr val="accent1"/>
+          </a:lnRef>
+          <a:fillRef idx="3">
+            <a:schemeClr val="accent1"/>
+          </a:fillRef>
+          <a:effectRef idx="2">
+            <a:schemeClr val="accent1"/>
+          </a:effectRef>
+          <a:fontRef idx="minor">
+            <a:schemeClr val="lt1"/>
+          </a:fontRef>
+        </p:style>
+        <p:txBody>
+          <a:bodyPr rtlCol="0" anchor="ctr"/>
+          <a:lstStyle/>
+          <a:p>
+            <a:pPr algn="ctr"/>
+          </a:p>
+        </p:txBody>
+      </p:sp>
+      <p:sp>
+        <p:nvSpPr>
+          <p:cNvPr id="59" name="TextBox 58"/>
+          <p:cNvSpPr txBox="1"/>
+          <p:nvPr/>
+        </p:nvSpPr>
+        <p:spPr>
+          <a:xfrm>
+            <a:off x="685800" y="4818888"/>
+            <a:ext cx="1261872" cy="256032"/>
+          </a:xfrm>
+          <a:prstGeom prst="rect">
+            <a:avLst/>
+          </a:prstGeom>
+          <a:noFill/>
+        </p:spPr>
+        <p:txBody>
+          <a:bodyPr wrap="square"/>
+          <a:lstStyle/>
+          <a:p>
+            <a:pPr algn="l">
+              <a:defRPr sz="900" b="0">
+                <a:solidFill>
+                  <a:srgbClr val="374151"/>
+                </a:solidFill>
+                <a:latin typeface="Calibri"/>
+              </a:defRPr>
+            </a:pPr>
+            <a:r>
+              <a:t>Random Baseline</a:t>
+            </a:r>
+          </a:p>
+        </p:txBody>
+      </p:sp>
+      <p:sp>
+        <p:nvSpPr>
+          <p:cNvPr id="60" name="TextBox 59"/>
+          <p:cNvSpPr txBox="1"/>
+          <p:nvPr/>
+        </p:nvSpPr>
+        <p:spPr>
+          <a:xfrm>
+            <a:off x="1947672" y="4818888"/>
+            <a:ext cx="1261872" cy="256032"/>
+          </a:xfrm>
+          <a:prstGeom prst="rect">
+            <a:avLst/>
+          </a:prstGeom>
+          <a:noFill/>
+        </p:spPr>
+        <p:txBody>
+          <a:bodyPr wrap="square"/>
+          <a:lstStyle/>
+          <a:p>
+            <a:pPr algn="l">
+              <a:defRPr sz="900" b="0">
+                <a:solidFill>
+                  <a:srgbClr val="374151"/>
+                </a:solidFill>
+                <a:latin typeface="Calibri"/>
+              </a:defRPr>
+            </a:pPr>
+            <a:r>
+              <a:t>$421</a:t>
+            </a:r>
+          </a:p>
+        </p:txBody>
+      </p:sp>
+      <p:sp>
+        <p:nvSpPr>
+          <p:cNvPr id="61" name="TextBox 60"/>
+          <p:cNvSpPr txBox="1"/>
+          <p:nvPr/>
+        </p:nvSpPr>
+        <p:spPr>
+          <a:xfrm>
+            <a:off x="3209544" y="4818888"/>
+            <a:ext cx="1261872" cy="256032"/>
+          </a:xfrm>
+          <a:prstGeom prst="rect">
+            <a:avLst/>
+          </a:prstGeom>
+          <a:noFill/>
+        </p:spPr>
+        <p:txBody>
+          <a:bodyPr wrap="square"/>
+          <a:lstStyle/>
+          <a:p>
+            <a:pPr algn="l">
+              <a:defRPr sz="900" b="0">
+                <a:solidFill>
+                  <a:srgbClr val="374151"/>
+                </a:solidFill>
+                <a:latin typeface="Calibri"/>
+              </a:defRPr>
+            </a:pPr>
+            <a:r>
+              <a:t>1.8%</a:t>
+            </a:r>
+          </a:p>
+        </p:txBody>
+      </p:sp>
+      <p:sp>
+        <p:nvSpPr>
+          <p:cNvPr id="62" name="TextBox 61"/>
+          <p:cNvSpPr txBox="1"/>
+          <p:nvPr/>
+        </p:nvSpPr>
+        <p:spPr>
+          <a:xfrm>
+            <a:off x="4471416" y="4818888"/>
+            <a:ext cx="1261872" cy="256032"/>
+          </a:xfrm>
+          <a:prstGeom prst="rect">
+            <a:avLst/>
+          </a:prstGeom>
+          <a:noFill/>
+        </p:spPr>
+        <p:txBody>
+          <a:bodyPr wrap="square"/>
+          <a:lstStyle/>
+          <a:p>
+            <a:pPr algn="l">
+              <a:defRPr sz="900" b="0">
+                <a:solidFill>
+                  <a:srgbClr val="374151"/>
+                </a:solidFill>
+                <a:latin typeface="Calibri"/>
+              </a:defRPr>
+            </a:pPr>
+            <a:r>
+              <a:t>0.142</a:t>
+            </a:r>
+          </a:p>
+        </p:txBody>
+      </p:sp>
+      <p:sp>
+        <p:nvSpPr>
+          <p:cNvPr id="63" name="TextBox 62"/>
+          <p:cNvSpPr txBox="1"/>
+          <p:nvPr/>
+        </p:nvSpPr>
+        <p:spPr>
+          <a:xfrm>
+            <a:off x="5733288" y="4818888"/>
+            <a:ext cx="1261872" cy="256032"/>
+          </a:xfrm>
+          <a:prstGeom prst="rect">
+            <a:avLst/>
+          </a:prstGeom>
+          <a:noFill/>
+        </p:spPr>
+        <p:txBody>
+          <a:bodyPr wrap="square"/>
+          <a:lstStyle/>
+          <a:p>
+            <a:pPr algn="l">
+              <a:defRPr sz="900" b="0">
+                <a:solidFill>
+                  <a:srgbClr val="374151"/>
+                </a:solidFill>
+                <a:latin typeface="Calibri"/>
+              </a:defRPr>
+            </a:pPr>
+            <a:r>
+              <a:t>-38.5%</a:t>
+            </a:r>
+          </a:p>
+        </p:txBody>
+      </p:sp>
+      <p:sp>
+        <p:nvSpPr>
+          <p:cNvPr id="64" name="Rectangle 63"/>
+          <p:cNvSpPr/>
+          <p:nvPr/>
+        </p:nvSpPr>
+        <p:spPr>
+          <a:xfrm>
+            <a:off x="685800" y="5047488"/>
+            <a:ext cx="6309360" cy="4572"/>
+          </a:xfrm>
+          <a:prstGeom prst="rect">
+            <a:avLst/>
+          </a:prstGeom>
+          <a:solidFill>
+            <a:srgbClr val="F3F4F6"/>
+          </a:solidFill>
+          <a:ln>
+            <a:noFill/>
+          </a:ln>
+        </p:spPr>
+        <p:style>
+          <a:lnRef idx="1">
+            <a:schemeClr val="accent1"/>
+          </a:lnRef>
+          <a:fillRef idx="3">
+            <a:schemeClr val="accent1"/>
+          </a:fillRef>
+          <a:effectRef idx="2">
+            <a:schemeClr val="accent1"/>
+          </a:effectRef>
+          <a:fontRef idx="minor">
+            <a:schemeClr val="lt1"/>
+          </a:fontRef>
+        </p:style>
+        <p:txBody>
+          <a:bodyPr rtlCol="0" anchor="ctr"/>
+          <a:lstStyle/>
+          <a:p>
+            <a:pPr algn="ctr"/>
+          </a:p>
+        </p:txBody>
+      </p:sp>
+      <p:sp>
+        <p:nvSpPr>
+          <p:cNvPr id="65" name="Rectangle 64"/>
+          <p:cNvSpPr/>
+          <p:nvPr/>
+        </p:nvSpPr>
+        <p:spPr>
+          <a:xfrm>
+            <a:off x="7498079" y="3108960"/>
+            <a:ext cx="4114800" cy="2194560"/>
+          </a:xfrm>
+          <a:prstGeom prst="rect">
+            <a:avLst/>
+          </a:prstGeom>
+          <a:solidFill>
+            <a:srgbClr val="FFFFFF"/>
+          </a:solidFill>
+          <a:ln>
+            <a:noFill/>
+          </a:ln>
+        </p:spPr>
+        <p:style>
+          <a:lnRef idx="1">
+            <a:schemeClr val="accent1"/>
+          </a:lnRef>
+          <a:fillRef idx="3">
+            <a:schemeClr val="accent1"/>
+          </a:fillRef>
+          <a:effectRef idx="2">
+            <a:schemeClr val="accent1"/>
+          </a:effectRef>
+          <a:fontRef idx="minor">
+            <a:schemeClr val="lt1"/>
+          </a:fontRef>
+        </p:style>
+        <p:txBody>
+          <a:bodyPr rtlCol="0" anchor="ctr"/>
+          <a:lstStyle/>
+          <a:p>
+            <a:pPr algn="ctr"/>
+          </a:p>
+        </p:txBody>
+      </p:sp>
+      <p:sp>
+        <p:nvSpPr>
+          <p:cNvPr id="66" name="TextBox 65"/>
+          <p:cNvSpPr txBox="1"/>
+          <p:nvPr/>
+        </p:nvSpPr>
+        <p:spPr>
+          <a:xfrm>
+            <a:off x="7680960" y="3200400"/>
+            <a:ext cx="3657600" cy="274320"/>
+          </a:xfrm>
+          <a:prstGeom prst="rect">
+            <a:avLst/>
+          </a:prstGeom>
+          <a:noFill/>
+        </p:spPr>
+        <p:txBody>
+          <a:bodyPr wrap="square"/>
+          <a:lstStyle/>
+          <a:p>
+            <a:pPr algn="l">
+              <a:defRPr sz="1200" b="1">
+                <a:solidFill>
+                  <a:srgbClr val="111827"/>
+                </a:solidFill>
+                <a:latin typeface="Calibri"/>
+              </a:defRPr>
+            </a:pPr>
+            <a:r>
+              <a:t>Ranking Components</a:t>
+            </a:r>
+          </a:p>
+        </p:txBody>
+      </p:sp>
+      <p:sp>
+        <p:nvSpPr>
+          <p:cNvPr id="67" name="Rectangle 66"/>
+          <p:cNvSpPr/>
+          <p:nvPr/>
+        </p:nvSpPr>
+        <p:spPr>
+          <a:xfrm>
+            <a:off x="7680960" y="3566160"/>
+            <a:ext cx="54864" cy="320040"/>
+          </a:xfrm>
+          <a:prstGeom prst="rect">
+            <a:avLst/>
+          </a:prstGeom>
+          <a:solidFill>
+            <a:srgbClr val="1D4ED8"/>
+          </a:solidFill>
+          <a:ln>
+            <a:noFill/>
+          </a:ln>
+        </p:spPr>
+        <p:style>
+          <a:lnRef idx="1">
+            <a:schemeClr val="accent1"/>
+          </a:lnRef>
+          <a:fillRef idx="3">
+            <a:schemeClr val="accent1"/>
+          </a:fillRef>
+          <a:effectRef idx="2">
+            <a:schemeClr val="accent1"/>
+          </a:effectRef>
+          <a:fontRef idx="minor">
+            <a:schemeClr val="lt1"/>
+          </a:fontRef>
+        </p:style>
+        <p:txBody>
+          <a:bodyPr rtlCol="0" anchor="ctr"/>
+          <a:lstStyle/>
+          <a:p>
+            <a:pPr algn="ctr"/>
+          </a:p>
+        </p:txBody>
+      </p:sp>
+      <p:sp>
+        <p:nvSpPr>
+          <p:cNvPr id="68" name="TextBox 67"/>
+          <p:cNvSpPr txBox="1"/>
+          <p:nvPr/>
+        </p:nvSpPr>
+        <p:spPr>
+          <a:xfrm>
+            <a:off x="7863840" y="3566160"/>
+            <a:ext cx="2286000" cy="182880"/>
+          </a:xfrm>
+          <a:prstGeom prst="rect">
+            <a:avLst/>
+          </a:prstGeom>
+          <a:noFill/>
+        </p:spPr>
+        <p:txBody>
+          <a:bodyPr wrap="square"/>
+          <a:lstStyle/>
+          <a:p>
+            <a:pPr algn="l">
+              <a:defRPr sz="900" b="1">
+                <a:solidFill>
+                  <a:srgbClr val="1D4ED8"/>
+                </a:solidFill>
+                <a:latin typeface="Calibri"/>
+              </a:defRPr>
+            </a:pPr>
+            <a:r>
+              <a:t>Multi-Task Heads</a:t>
+            </a:r>
+          </a:p>
+        </p:txBody>
+      </p:sp>
+      <p:sp>
+        <p:nvSpPr>
+          <p:cNvPr id="69" name="TextBox 68"/>
+          <p:cNvSpPr txBox="1"/>
+          <p:nvPr/>
+        </p:nvSpPr>
+        <p:spPr>
+          <a:xfrm>
+            <a:off x="7863840" y="3730752"/>
+            <a:ext cx="3474720" cy="228600"/>
+          </a:xfrm>
+          <a:prstGeom prst="rect">
+            <a:avLst/>
+          </a:prstGeom>
+          <a:noFill/>
+        </p:spPr>
+        <p:txBody>
+          <a:bodyPr wrap="square"/>
+          <a:lstStyle/>
+          <a:p>
+            <a:pPr algn="l">
+              <a:defRPr sz="800" b="0">
+                <a:solidFill>
+                  <a:srgbClr val="6B7280"/>
+                </a:solidFill>
+                <a:latin typeface="Calibri"/>
+              </a:defRPr>
+            </a:pPr>
+            <a:r>
+              <a:t>pCTR, pCVR, pEngagement, pNegative — shared bottom with task-specific towers</a:t>
+            </a:r>
+          </a:p>
+        </p:txBody>
+      </p:sp>
+      <p:sp>
+        <p:nvSpPr>
+          <p:cNvPr id="70" name="Rectangle 69"/>
+          <p:cNvSpPr/>
+          <p:nvPr/>
+        </p:nvSpPr>
+        <p:spPr>
+          <a:xfrm>
+            <a:off x="7680960" y="3995928"/>
+            <a:ext cx="54864" cy="320040"/>
+          </a:xfrm>
+          <a:prstGeom prst="rect">
+            <a:avLst/>
+          </a:prstGeom>
+          <a:solidFill>
+            <a:srgbClr val="0891B2"/>
+          </a:solidFill>
+          <a:ln>
+            <a:noFill/>
+          </a:ln>
+        </p:spPr>
+        <p:style>
+          <a:lnRef idx="1">
+            <a:schemeClr val="accent1"/>
+          </a:lnRef>
+          <a:fillRef idx="3">
+            <a:schemeClr val="accent1"/>
+          </a:fillRef>
+          <a:effectRef idx="2">
+            <a:schemeClr val="accent1"/>
+          </a:effectRef>
+          <a:fontRef idx="minor">
+            <a:schemeClr val="lt1"/>
+          </a:fontRef>
+        </p:style>
+        <p:txBody>
+          <a:bodyPr rtlCol="0" anchor="ctr"/>
+          <a:lstStyle/>
+          <a:p>
+            <a:pPr algn="ctr"/>
+          </a:p>
+        </p:txBody>
+      </p:sp>
+      <p:sp>
+        <p:nvSpPr>
+          <p:cNvPr id="71" name="TextBox 70"/>
+          <p:cNvSpPr txBox="1"/>
+          <p:nvPr/>
+        </p:nvSpPr>
+        <p:spPr>
+          <a:xfrm>
+            <a:off x="7863840" y="3995928"/>
+            <a:ext cx="2286000" cy="182880"/>
+          </a:xfrm>
+          <a:prstGeom prst="rect">
+            <a:avLst/>
+          </a:prstGeom>
+          <a:noFill/>
+        </p:spPr>
+        <p:txBody>
+          <a:bodyPr wrap="square"/>
+          <a:lstStyle/>
+          <a:p>
+            <a:pPr algn="l">
+              <a:defRPr sz="900" b="1">
+                <a:solidFill>
+                  <a:srgbClr val="0891B2"/>
+                </a:solidFill>
+                <a:latin typeface="Calibri"/>
+              </a:defRPr>
+            </a:pPr>
+            <a:r>
+              <a:t>Cross-Feature Interactions</a:t>
+            </a:r>
+          </a:p>
+        </p:txBody>
+      </p:sp>
+      <p:sp>
+        <p:nvSpPr>
+          <p:cNvPr id="72" name="TextBox 71"/>
+          <p:cNvSpPr txBox="1"/>
+          <p:nvPr/>
+        </p:nvSpPr>
+        <p:spPr>
+          <a:xfrm>
+            <a:off x="7863840" y="4160520"/>
+            <a:ext cx="3474720" cy="228600"/>
+          </a:xfrm>
+          <a:prstGeom prst="rect">
+            <a:avLst/>
+          </a:prstGeom>
+          <a:noFill/>
+        </p:spPr>
+        <p:txBody>
+          <a:bodyPr wrap="square"/>
+          <a:lstStyle/>
+          <a:p>
+            <a:pPr algn="l">
+              <a:defRPr sz="800" b="0">
+                <a:solidFill>
+                  <a:srgbClr val="6B7280"/>
+                </a:solidFill>
+                <a:latin typeface="Calibri"/>
+              </a:defRPr>
+            </a:pPr>
+            <a:r>
+              <a:t>Advertiser × segment embedding dot-product captures non-linear effects</a:t>
+            </a:r>
+          </a:p>
+        </p:txBody>
+      </p:sp>
+      <p:sp>
+        <p:nvSpPr>
+          <p:cNvPr id="73" name="Rectangle 72"/>
+          <p:cNvSpPr/>
+          <p:nvPr/>
+        </p:nvSpPr>
+        <p:spPr>
+          <a:xfrm>
+            <a:off x="7680960" y="4425696"/>
+            <a:ext cx="54864" cy="320040"/>
+          </a:xfrm>
+          <a:prstGeom prst="rect">
+            <a:avLst/>
+          </a:prstGeom>
+          <a:solidFill>
+            <a:srgbClr val="7C3AED"/>
+          </a:solidFill>
+          <a:ln>
+            <a:noFill/>
+          </a:ln>
+        </p:spPr>
+        <p:style>
+          <a:lnRef idx="1">
+            <a:schemeClr val="accent1"/>
+          </a:lnRef>
+          <a:fillRef idx="3">
+            <a:schemeClr val="accent1"/>
+          </a:fillRef>
+          <a:effectRef idx="2">
+            <a:schemeClr val="accent1"/>
+          </a:effectRef>
+          <a:fontRef idx="minor">
+            <a:schemeClr val="lt1"/>
+          </a:fontRef>
+        </p:style>
+        <p:txBody>
+          <a:bodyPr rtlCol="0" anchor="ctr"/>
+          <a:lstStyle/>
+          <a:p>
+            <a:pPr algn="ctr"/>
+          </a:p>
+        </p:txBody>
+      </p:sp>
+      <p:sp>
+        <p:nvSpPr>
+          <p:cNvPr id="74" name="TextBox 73"/>
+          <p:cNvSpPr txBox="1"/>
+          <p:nvPr/>
+        </p:nvSpPr>
+        <p:spPr>
+          <a:xfrm>
+            <a:off x="7863840" y="4425696"/>
+            <a:ext cx="2286000" cy="182880"/>
+          </a:xfrm>
+          <a:prstGeom prst="rect">
+            <a:avLst/>
+          </a:prstGeom>
+          <a:noFill/>
+        </p:spPr>
+        <p:txBody>
+          <a:bodyPr wrap="square"/>
+          <a:lstStyle/>
+          <a:p>
+            <a:pPr algn="l">
+              <a:defRPr sz="900" b="1">
+                <a:solidFill>
+                  <a:srgbClr val="7C3AED"/>
+                </a:solidFill>
+                <a:latin typeface="Calibri"/>
+              </a:defRPr>
+            </a:pPr>
+            <a:r>
+              <a:t>Platt Scaling Calibration</a:t>
+            </a:r>
+          </a:p>
+        </p:txBody>
+      </p:sp>
+      <p:sp>
+        <p:nvSpPr>
+          <p:cNvPr id="75" name="TextBox 74"/>
+          <p:cNvSpPr txBox="1"/>
+          <p:nvPr/>
+        </p:nvSpPr>
+        <p:spPr>
+          <a:xfrm>
+            <a:off x="7863840" y="4590288"/>
+            <a:ext cx="3474720" cy="228600"/>
+          </a:xfrm>
+          <a:prstGeom prst="rect">
+            <a:avLst/>
+          </a:prstGeom>
+          <a:noFill/>
+        </p:spPr>
+        <p:txBody>
+          <a:bodyPr wrap="square"/>
+          <a:lstStyle/>
+          <a:p>
+            <a:pPr algn="l">
+              <a:defRPr sz="800" b="0">
+                <a:solidFill>
+                  <a:srgbClr val="6B7280"/>
+                </a:solidFill>
+                <a:latin typeface="Calibri"/>
+              </a:defRPr>
+            </a:pPr>
+            <a:r>
+              <a:t>Raw scores → calibrated probabilities. Miscalibration distorts eCPM ranking</a:t>
+            </a:r>
+          </a:p>
+        </p:txBody>
+      </p:sp>
+      <p:sp>
+        <p:nvSpPr>
+          <p:cNvPr id="76" name="Rectangle 75"/>
+          <p:cNvSpPr/>
+          <p:nvPr/>
+        </p:nvSpPr>
+        <p:spPr>
+          <a:xfrm>
+            <a:off x="7680960" y="4855464"/>
+            <a:ext cx="54864" cy="320040"/>
+          </a:xfrm>
+          <a:prstGeom prst="rect">
+            <a:avLst/>
+          </a:prstGeom>
+          <a:solidFill>
+            <a:srgbClr val="CA8A04"/>
+          </a:solidFill>
+          <a:ln>
+            <a:noFill/>
+          </a:ln>
+        </p:spPr>
+        <p:style>
+          <a:lnRef idx="1">
+            <a:schemeClr val="accent1"/>
+          </a:lnRef>
+          <a:fillRef idx="3">
+            <a:schemeClr val="accent1"/>
+          </a:fillRef>
+          <a:effectRef idx="2">
+            <a:schemeClr val="accent1"/>
+          </a:effectRef>
+          <a:fontRef idx="minor">
+            <a:schemeClr val="lt1"/>
+          </a:fontRef>
+        </p:style>
+        <p:txBody>
+          <a:bodyPr rtlCol="0" anchor="ctr"/>
+          <a:lstStyle/>
+          <a:p>
+            <a:pPr algn="ctr"/>
+          </a:p>
+        </p:txBody>
+      </p:sp>
+      <p:sp>
+        <p:nvSpPr>
+          <p:cNvPr id="77" name="TextBox 76"/>
+          <p:cNvSpPr txBox="1"/>
+          <p:nvPr/>
+        </p:nvSpPr>
+        <p:spPr>
+          <a:xfrm>
+            <a:off x="7863840" y="4855464"/>
+            <a:ext cx="2286000" cy="182880"/>
+          </a:xfrm>
+          <a:prstGeom prst="rect">
+            <a:avLst/>
+          </a:prstGeom>
+          <a:noFill/>
+        </p:spPr>
+        <p:txBody>
+          <a:bodyPr wrap="square"/>
+          <a:lstStyle/>
+          <a:p>
+            <a:pPr algn="l">
+              <a:defRPr sz="900" b="1">
+                <a:solidFill>
+                  <a:srgbClr val="CA8A04"/>
+                </a:solidFill>
+                <a:latin typeface="Calibri"/>
+              </a:defRPr>
+            </a:pPr>
+            <a:r>
+              <a:t>Diversity Injection</a:t>
+            </a:r>
+          </a:p>
+        </p:txBody>
+      </p:sp>
+      <p:sp>
+        <p:nvSpPr>
+          <p:cNvPr id="78" name="TextBox 77"/>
+          <p:cNvSpPr txBox="1"/>
+          <p:nvPr/>
+        </p:nvSpPr>
+        <p:spPr>
+          <a:xfrm>
+            <a:off x="7863840" y="5020055"/>
+            <a:ext cx="3474720" cy="228600"/>
+          </a:xfrm>
+          <a:prstGeom prst="rect">
+            <a:avLst/>
+          </a:prstGeom>
+          <a:noFill/>
+        </p:spPr>
+        <p:txBody>
+          <a:bodyPr wrap="square"/>
+          <a:lstStyle/>
+          <a:p>
+            <a:pPr algn="l">
+              <a:defRPr sz="800" b="0">
+                <a:solidFill>
+                  <a:srgbClr val="6B7280"/>
+                </a:solidFill>
+                <a:latin typeface="Calibri"/>
+              </a:defRPr>
+            </a:pPr>
+            <a:r>
+              <a:t>Max-per-vertical constraint prevents single-vertical domination of ad slots</a:t>
+            </a:r>
+          </a:p>
+        </p:txBody>
+      </p:sp>
+      <p:sp>
+        <p:nvSpPr>
+          <p:cNvPr id="79" name="Rectangle 78"/>
+          <p:cNvSpPr/>
+          <p:nvPr/>
+        </p:nvSpPr>
+        <p:spPr>
+          <a:xfrm>
+            <a:off x="548640" y="5577840"/>
+            <a:ext cx="11064240" cy="777240"/>
+          </a:xfrm>
+          <a:prstGeom prst="rect">
+            <a:avLst/>
+          </a:prstGeom>
+          <a:solidFill>
+            <a:srgbClr val="DBEAFE"/>
+          </a:solidFill>
+          <a:ln>
+            <a:noFill/>
+          </a:ln>
+        </p:spPr>
+        <p:style>
+          <a:lnRef idx="1">
+            <a:schemeClr val="accent1"/>
+          </a:lnRef>
+          <a:fillRef idx="3">
+            <a:schemeClr val="accent1"/>
+          </a:fillRef>
+          <a:effectRef idx="2">
+            <a:schemeClr val="accent1"/>
+          </a:effectRef>
+          <a:fontRef idx="minor">
+            <a:schemeClr val="lt1"/>
+          </a:fontRef>
+        </p:style>
+        <p:txBody>
+          <a:bodyPr rtlCol="0" anchor="ctr"/>
+          <a:lstStyle/>
+          <a:p>
+            <a:pPr algn="ctr"/>
+          </a:p>
+        </p:txBody>
+      </p:sp>
+      <p:sp>
+        <p:nvSpPr>
+          <p:cNvPr id="80" name="Rectangle 79"/>
+          <p:cNvSpPr/>
+          <p:nvPr/>
+        </p:nvSpPr>
+        <p:spPr>
+          <a:xfrm>
+            <a:off x="548640" y="5577840"/>
+            <a:ext cx="54864" cy="777240"/>
+          </a:xfrm>
+          <a:prstGeom prst="rect">
+            <a:avLst/>
+          </a:prstGeom>
+          <a:solidFill>
+            <a:srgbClr val="1D4ED8"/>
+          </a:solidFill>
+          <a:ln>
+            <a:noFill/>
+          </a:ln>
+        </p:spPr>
+        <p:style>
+          <a:lnRef idx="1">
+            <a:schemeClr val="accent1"/>
+          </a:lnRef>
+          <a:fillRef idx="3">
+            <a:schemeClr val="accent1"/>
+          </a:fillRef>
+          <a:effectRef idx="2">
+            <a:schemeClr val="accent1"/>
+          </a:effectRef>
+          <a:fontRef idx="minor">
+            <a:schemeClr val="lt1"/>
+          </a:fontRef>
+        </p:style>
+        <p:txBody>
+          <a:bodyPr rtlCol="0" anchor="ctr"/>
+          <a:lstStyle/>
+          <a:p>
+            <a:pPr algn="ctr"/>
+          </a:p>
+        </p:txBody>
+      </p:sp>
+      <p:sp>
+        <p:nvSpPr>
+          <p:cNvPr id="81" name="TextBox 80"/>
+          <p:cNvSpPr txBox="1"/>
+          <p:nvPr/>
+        </p:nvSpPr>
+        <p:spPr>
+          <a:xfrm>
+            <a:off x="777240" y="5669280"/>
+            <a:ext cx="10515600" cy="548640"/>
+          </a:xfrm>
+          <a:prstGeom prst="rect">
+            <a:avLst/>
+          </a:prstGeom>
+          <a:noFill/>
+        </p:spPr>
+        <p:txBody>
+          <a:bodyPr wrap="square"/>
+          <a:lstStyle/>
+          <a:p>
+            <a:pPr algn="l">
+              <a:defRPr sz="1000" b="0">
+                <a:solidFill>
+                  <a:srgbClr val="142850"/>
+                </a:solidFill>
+                <a:latin typeface="Calibri"/>
+              </a:defRPr>
+            </a:pPr>
+            <a:r>
+              <a:t>Calibration alone contributes ~5% revenue lift. Multi-task prediction adds another ~6% by jointly modeling click, conversion, engagement, and negative feedback. Cross-feature interactions (advertiser × segment embeddings) capture non-linear affinity signals that additive models miss, contributing ~4% incremental revenue. The full pipeline demonstrates how each component compounds: the revenue waterfall from random baseline to full model shows a 62% total lift.</a:t>
+            </a:r>
+          </a:p>
+        </p:txBody>
+      </p:sp>
+    </p:spTree>
+  </p:cSld>
+  <p:clrMapOvr>
+    <a:masterClrMapping/>
+  </p:clrMapOvr>
+</p:sld>
+</file>
+
+<file path=ppt/slides/slide13.xml><?xml version="1.0" encoding="utf-8"?>
+<p:sld xmlns:a="http://schemas.openxmlformats.org/drawingml/2006/main" xmlns:p="http://schemas.openxmlformats.org/presentationml/2006/main" xmlns:r="http://schemas.openxmlformats.org/officeDocument/2006/relationships">
+  <p:cSld>
+    <p:spTree>
+      <p:nvGrpSpPr>
+        <p:cNvPr id="1" name=""/>
+        <p:cNvGrpSpPr/>
+        <p:nvPr/>
+      </p:nvGrpSpPr>
+      <p:grpSpPr/>
+      <p:sp>
+        <p:nvSpPr>
           <p:cNvPr id="2" name="Rectangle 1"/>
           <p:cNvSpPr/>
           <p:nvPr/>
@@ -9651,7 +12705,7 @@
               </a:defRPr>
             </a:pPr>
             <a:r>
-              <a:t>21</a:t>
+              <a:t>23</a:t>
             </a:r>
           </a:p>
         </p:txBody>
@@ -9923,7 +12977,7 @@
               </a:defRPr>
             </a:pPr>
             <a:r>
-              <a:t>10</a:t>
+              <a:t>11</a:t>
             </a:r>
           </a:p>
         </p:txBody>

--- a/Ad_Auction_Simulator_Dashboard.pptx
+++ b/Ad_Auction_Simulator_Dashboard.pptx
@@ -18,6 +18,7 @@
     <p:sldId id="266" r:id="rId17"/>
     <p:sldId id="267" r:id="rId18"/>
     <p:sldId id="268" r:id="rId19"/>
+    <p:sldId id="269" r:id="rId20"/>
   </p:sldIdLst>
   <p:sldSz cx="12191695" cy="6858000" type="screen4x3"/>
   <p:notesSz cx="6858000" cy="9144000"/>
@@ -3369,7 +3370,7 @@
               </a:defRPr>
             </a:pPr>
             <a:r>
-              <a:t>GSP/VCG Engine</a:t>
+              <a:t>Ad Types VCG</a:t>
             </a:r>
           </a:p>
         </p:txBody>
@@ -12472,6 +12473,14 @@
 <file path=ppt/slides/slide13.xml><?xml version="1.0" encoding="utf-8"?>
 <p:sld xmlns:a="http://schemas.openxmlformats.org/drawingml/2006/main" xmlns:p="http://schemas.openxmlformats.org/presentationml/2006/main" xmlns:r="http://schemas.openxmlformats.org/officeDocument/2006/relationships">
   <p:cSld>
+    <p:bg>
+      <p:bgPr>
+        <a:solidFill>
+          <a:srgbClr val="F8FAFC"/>
+        </a:solidFill>
+        <a:effectLst/>
+      </p:bgPr>
+    </p:bg>
     <p:spTree>
       <p:nvGrpSpPr>
         <p:cNvPr id="1" name=""/>
@@ -12481,6 +12490,2867 @@
       <p:grpSpPr/>
       <p:sp>
         <p:nvSpPr>
+          <p:cNvPr id="2" name="TextBox 1"/>
+          <p:cNvSpPr txBox="1"/>
+          <p:nvPr/>
+        </p:nvSpPr>
+        <p:spPr>
+          <a:xfrm>
+            <a:off x="548640" y="365760"/>
+            <a:ext cx="9144000" cy="457200"/>
+          </a:xfrm>
+          <a:prstGeom prst="rect">
+            <a:avLst/>
+          </a:prstGeom>
+          <a:noFill/>
+        </p:spPr>
+        <p:txBody>
+          <a:bodyPr wrap="square"/>
+          <a:lstStyle/>
+          <a:p>
+            <a:pPr algn="l">
+              <a:defRPr sz="2800" b="1">
+                <a:solidFill>
+                  <a:srgbClr val="111827"/>
+                </a:solidFill>
+                <a:latin typeface="Calibri"/>
+              </a:defRPr>
+            </a:pPr>
+            <a:r>
+              <a:t>Ad Types &amp; VCG Mechanism</a:t>
+            </a:r>
+          </a:p>
+        </p:txBody>
+      </p:sp>
+      <p:sp>
+        <p:nvSpPr>
+          <p:cNvPr id="3" name="TextBox 2"/>
+          <p:cNvSpPr txBox="1"/>
+          <p:nvPr/>
+        </p:nvSpPr>
+        <p:spPr>
+          <a:xfrm>
+            <a:off x="548640" y="822960"/>
+            <a:ext cx="9144000" cy="274320"/>
+          </a:xfrm>
+          <a:prstGeom prst="rect">
+            <a:avLst/>
+          </a:prstGeom>
+          <a:noFill/>
+        </p:spPr>
+        <p:txBody>
+          <a:bodyPr wrap="square"/>
+          <a:lstStyle/>
+          <a:p>
+            <a:pPr algn="l">
+              <a:defRPr sz="1200" b="0">
+                <a:solidFill>
+                  <a:srgbClr val="6B7280"/>
+                </a:solidFill>
+                <a:latin typeface="Calibri"/>
+              </a:defRPr>
+            </a:pPr>
+            <a:r>
+              <a:t>Semi-separable position auctions: type-specific discount curves with 4 mechanism combinations (Elzayn et al. 2022)</a:t>
+            </a:r>
+          </a:p>
+        </p:txBody>
+      </p:sp>
+      <p:sp>
+        <p:nvSpPr>
+          <p:cNvPr id="4" name="Rectangle 3"/>
+          <p:cNvSpPr/>
+          <p:nvPr/>
+        </p:nvSpPr>
+        <p:spPr>
+          <a:xfrm>
+            <a:off x="548640" y="1371600"/>
+            <a:ext cx="2103120" cy="1280160"/>
+          </a:xfrm>
+          <a:prstGeom prst="rect">
+            <a:avLst/>
+          </a:prstGeom>
+          <a:solidFill>
+            <a:srgbClr val="FFFFFF"/>
+          </a:solidFill>
+          <a:ln>
+            <a:noFill/>
+          </a:ln>
+        </p:spPr>
+        <p:style>
+          <a:lnRef idx="1">
+            <a:schemeClr val="accent1"/>
+          </a:lnRef>
+          <a:fillRef idx="3">
+            <a:schemeClr val="accent1"/>
+          </a:fillRef>
+          <a:effectRef idx="2">
+            <a:schemeClr val="accent1"/>
+          </a:effectRef>
+          <a:fontRef idx="minor">
+            <a:schemeClr val="lt1"/>
+          </a:fontRef>
+        </p:style>
+        <p:txBody>
+          <a:bodyPr rtlCol="0" anchor="ctr"/>
+          <a:lstStyle/>
+          <a:p>
+            <a:pPr algn="ctr"/>
+          </a:p>
+        </p:txBody>
+      </p:sp>
+      <p:sp>
+        <p:nvSpPr>
+          <p:cNvPr id="5" name="Rectangle 4"/>
+          <p:cNvSpPr/>
+          <p:nvPr/>
+        </p:nvSpPr>
+        <p:spPr>
+          <a:xfrm>
+            <a:off x="548640" y="1371600"/>
+            <a:ext cx="2103120" cy="54864"/>
+          </a:xfrm>
+          <a:prstGeom prst="rect">
+            <a:avLst/>
+          </a:prstGeom>
+          <a:solidFill>
+            <a:srgbClr val="E11D48"/>
+          </a:solidFill>
+          <a:ln>
+            <a:noFill/>
+          </a:ln>
+        </p:spPr>
+        <p:style>
+          <a:lnRef idx="1">
+            <a:schemeClr val="accent1"/>
+          </a:lnRef>
+          <a:fillRef idx="3">
+            <a:schemeClr val="accent1"/>
+          </a:fillRef>
+          <a:effectRef idx="2">
+            <a:schemeClr val="accent1"/>
+          </a:effectRef>
+          <a:fontRef idx="minor">
+            <a:schemeClr val="lt1"/>
+          </a:fontRef>
+        </p:style>
+        <p:txBody>
+          <a:bodyPr rtlCol="0" anchor="ctr"/>
+          <a:lstStyle/>
+          <a:p>
+            <a:pPr algn="ctr"/>
+          </a:p>
+        </p:txBody>
+      </p:sp>
+      <p:sp>
+        <p:nvSpPr>
+          <p:cNvPr id="6" name="TextBox 5"/>
+          <p:cNvSpPr txBox="1"/>
+          <p:nvPr/>
+        </p:nvSpPr>
+        <p:spPr>
+          <a:xfrm>
+            <a:off x="685800" y="1508760"/>
+            <a:ext cx="1828800" cy="201168"/>
+          </a:xfrm>
+          <a:prstGeom prst="rect">
+            <a:avLst/>
+          </a:prstGeom>
+          <a:noFill/>
+        </p:spPr>
+        <p:txBody>
+          <a:bodyPr wrap="square"/>
+          <a:lstStyle/>
+          <a:p>
+            <a:pPr algn="l">
+              <a:defRPr sz="1000" b="1">
+                <a:solidFill>
+                  <a:srgbClr val="E11D48"/>
+                </a:solidFill>
+                <a:latin typeface="Calibri"/>
+              </a:defRPr>
+            </a:pPr>
+            <a:r>
+              <a:t>Video Ad</a:t>
+            </a:r>
+          </a:p>
+        </p:txBody>
+      </p:sp>
+      <p:sp>
+        <p:nvSpPr>
+          <p:cNvPr id="7" name="TextBox 6"/>
+          <p:cNvSpPr txBox="1"/>
+          <p:nvPr/>
+        </p:nvSpPr>
+        <p:spPr>
+          <a:xfrm>
+            <a:off x="685800" y="1737360"/>
+            <a:ext cx="1828800" cy="201168"/>
+          </a:xfrm>
+          <a:prstGeom prst="rect">
+            <a:avLst/>
+          </a:prstGeom>
+          <a:noFill/>
+        </p:spPr>
+        <p:txBody>
+          <a:bodyPr wrap="square"/>
+          <a:lstStyle/>
+          <a:p>
+            <a:pPr algn="l">
+              <a:defRPr sz="900" b="0">
+                <a:solidFill>
+                  <a:srgbClr val="111827"/>
+                </a:solidFill>
+                <a:latin typeface="Consolas"/>
+              </a:defRPr>
+            </a:pPr>
+            <a:r>
+              <a:t>δ = 0.90 × 0.82^s</a:t>
+            </a:r>
+          </a:p>
+        </p:txBody>
+      </p:sp>
+      <p:sp>
+        <p:nvSpPr>
+          <p:cNvPr id="8" name="TextBox 7"/>
+          <p:cNvSpPr txBox="1"/>
+          <p:nvPr/>
+        </p:nvSpPr>
+        <p:spPr>
+          <a:xfrm>
+            <a:off x="685800" y="2011680"/>
+            <a:ext cx="1828800" cy="548640"/>
+          </a:xfrm>
+          <a:prstGeom prst="rect">
+            <a:avLst/>
+          </a:prstGeom>
+          <a:noFill/>
+        </p:spPr>
+        <p:txBody>
+          <a:bodyPr wrap="square"/>
+          <a:lstStyle/>
+          <a:p>
+            <a:pPr algn="l">
+              <a:defRPr sz="800" b="0">
+                <a:solidFill>
+                  <a:srgbClr val="6B7280"/>
+                </a:solidFill>
+                <a:latin typeface="Calibri"/>
+              </a:defRPr>
+            </a:pPr>
+            <a:r>
+              <a:t>Steep decay — viewability</a:t>
+            </a:r>
+            <a:br/>
+            <a:r>
+              <a:t>drops below fold</a:t>
+            </a:r>
+          </a:p>
+        </p:txBody>
+      </p:sp>
+      <p:sp>
+        <p:nvSpPr>
+          <p:cNvPr id="9" name="Rectangle 8"/>
+          <p:cNvSpPr/>
+          <p:nvPr/>
+        </p:nvSpPr>
+        <p:spPr>
+          <a:xfrm>
+            <a:off x="2834640" y="1371600"/>
+            <a:ext cx="2103120" cy="1280160"/>
+          </a:xfrm>
+          <a:prstGeom prst="rect">
+            <a:avLst/>
+          </a:prstGeom>
+          <a:solidFill>
+            <a:srgbClr val="FFFFFF"/>
+          </a:solidFill>
+          <a:ln>
+            <a:noFill/>
+          </a:ln>
+        </p:spPr>
+        <p:style>
+          <a:lnRef idx="1">
+            <a:schemeClr val="accent1"/>
+          </a:lnRef>
+          <a:fillRef idx="3">
+            <a:schemeClr val="accent1"/>
+          </a:fillRef>
+          <a:effectRef idx="2">
+            <a:schemeClr val="accent1"/>
+          </a:effectRef>
+          <a:fontRef idx="minor">
+            <a:schemeClr val="lt1"/>
+          </a:fontRef>
+        </p:style>
+        <p:txBody>
+          <a:bodyPr rtlCol="0" anchor="ctr"/>
+          <a:lstStyle/>
+          <a:p>
+            <a:pPr algn="ctr"/>
+          </a:p>
+        </p:txBody>
+      </p:sp>
+      <p:sp>
+        <p:nvSpPr>
+          <p:cNvPr id="10" name="Rectangle 9"/>
+          <p:cNvSpPr/>
+          <p:nvPr/>
+        </p:nvSpPr>
+        <p:spPr>
+          <a:xfrm>
+            <a:off x="2834640" y="1371600"/>
+            <a:ext cx="2103120" cy="54864"/>
+          </a:xfrm>
+          <a:prstGeom prst="rect">
+            <a:avLst/>
+          </a:prstGeom>
+          <a:solidFill>
+            <a:srgbClr val="1D4ED8"/>
+          </a:solidFill>
+          <a:ln>
+            <a:noFill/>
+          </a:ln>
+        </p:spPr>
+        <p:style>
+          <a:lnRef idx="1">
+            <a:schemeClr val="accent1"/>
+          </a:lnRef>
+          <a:fillRef idx="3">
+            <a:schemeClr val="accent1"/>
+          </a:fillRef>
+          <a:effectRef idx="2">
+            <a:schemeClr val="accent1"/>
+          </a:effectRef>
+          <a:fontRef idx="minor">
+            <a:schemeClr val="lt1"/>
+          </a:fontRef>
+        </p:style>
+        <p:txBody>
+          <a:bodyPr rtlCol="0" anchor="ctr"/>
+          <a:lstStyle/>
+          <a:p>
+            <a:pPr algn="ctr"/>
+          </a:p>
+        </p:txBody>
+      </p:sp>
+      <p:sp>
+        <p:nvSpPr>
+          <p:cNvPr id="11" name="TextBox 10"/>
+          <p:cNvSpPr txBox="1"/>
+          <p:nvPr/>
+        </p:nvSpPr>
+        <p:spPr>
+          <a:xfrm>
+            <a:off x="2971800" y="1508760"/>
+            <a:ext cx="1828800" cy="201168"/>
+          </a:xfrm>
+          <a:prstGeom prst="rect">
+            <a:avLst/>
+          </a:prstGeom>
+          <a:noFill/>
+        </p:spPr>
+        <p:txBody>
+          <a:bodyPr wrap="square"/>
+          <a:lstStyle/>
+          <a:p>
+            <a:pPr algn="l">
+              <a:defRPr sz="1000" b="1">
+                <a:solidFill>
+                  <a:srgbClr val="1D4ED8"/>
+                </a:solidFill>
+                <a:latin typeface="Calibri"/>
+              </a:defRPr>
+            </a:pPr>
+            <a:r>
+              <a:t>Link-Click</a:t>
+            </a:r>
+          </a:p>
+        </p:txBody>
+      </p:sp>
+      <p:sp>
+        <p:nvSpPr>
+          <p:cNvPr id="12" name="TextBox 11"/>
+          <p:cNvSpPr txBox="1"/>
+          <p:nvPr/>
+        </p:nvSpPr>
+        <p:spPr>
+          <a:xfrm>
+            <a:off x="2971800" y="1737360"/>
+            <a:ext cx="1828800" cy="201168"/>
+          </a:xfrm>
+          <a:prstGeom prst="rect">
+            <a:avLst/>
+          </a:prstGeom>
+          <a:noFill/>
+        </p:spPr>
+        <p:txBody>
+          <a:bodyPr wrap="square"/>
+          <a:lstStyle/>
+          <a:p>
+            <a:pPr algn="l">
+              <a:defRPr sz="900" b="0">
+                <a:solidFill>
+                  <a:srgbClr val="111827"/>
+                </a:solidFill>
+                <a:latin typeface="Consolas"/>
+              </a:defRPr>
+            </a:pPr>
+            <a:r>
+              <a:t>δ = 0.95 × 0.88^s</a:t>
+            </a:r>
+          </a:p>
+        </p:txBody>
+      </p:sp>
+      <p:sp>
+        <p:nvSpPr>
+          <p:cNvPr id="13" name="TextBox 12"/>
+          <p:cNvSpPr txBox="1"/>
+          <p:nvPr/>
+        </p:nvSpPr>
+        <p:spPr>
+          <a:xfrm>
+            <a:off x="2971800" y="2011680"/>
+            <a:ext cx="1828800" cy="548640"/>
+          </a:xfrm>
+          <a:prstGeom prst="rect">
+            <a:avLst/>
+          </a:prstGeom>
+          <a:noFill/>
+        </p:spPr>
+        <p:txBody>
+          <a:bodyPr wrap="square"/>
+          <a:lstStyle/>
+          <a:p>
+            <a:pPr algn="l">
+              <a:defRPr sz="800" b="0">
+                <a:solidFill>
+                  <a:srgbClr val="6B7280"/>
+                </a:solidFill>
+                <a:latin typeface="Calibri"/>
+              </a:defRPr>
+            </a:pPr>
+            <a:r>
+              <a:t>Moderate decay —</a:t>
+            </a:r>
+            <a:br/>
+            <a:r>
+              <a:t>standard CTR ads</a:t>
+            </a:r>
+          </a:p>
+        </p:txBody>
+      </p:sp>
+      <p:sp>
+        <p:nvSpPr>
+          <p:cNvPr id="14" name="Rectangle 13"/>
+          <p:cNvSpPr/>
+          <p:nvPr/>
+        </p:nvSpPr>
+        <p:spPr>
+          <a:xfrm>
+            <a:off x="5120640" y="1371600"/>
+            <a:ext cx="2103120" cy="1280160"/>
+          </a:xfrm>
+          <a:prstGeom prst="rect">
+            <a:avLst/>
+          </a:prstGeom>
+          <a:solidFill>
+            <a:srgbClr val="FFFFFF"/>
+          </a:solidFill>
+          <a:ln>
+            <a:noFill/>
+          </a:ln>
+        </p:spPr>
+        <p:style>
+          <a:lnRef idx="1">
+            <a:schemeClr val="accent1"/>
+          </a:lnRef>
+          <a:fillRef idx="3">
+            <a:schemeClr val="accent1"/>
+          </a:fillRef>
+          <a:effectRef idx="2">
+            <a:schemeClr val="accent1"/>
+          </a:effectRef>
+          <a:fontRef idx="minor">
+            <a:schemeClr val="lt1"/>
+          </a:fontRef>
+        </p:style>
+        <p:txBody>
+          <a:bodyPr rtlCol="0" anchor="ctr"/>
+          <a:lstStyle/>
+          <a:p>
+            <a:pPr algn="ctr"/>
+          </a:p>
+        </p:txBody>
+      </p:sp>
+      <p:sp>
+        <p:nvSpPr>
+          <p:cNvPr id="15" name="Rectangle 14"/>
+          <p:cNvSpPr/>
+          <p:nvPr/>
+        </p:nvSpPr>
+        <p:spPr>
+          <a:xfrm>
+            <a:off x="5120640" y="1371600"/>
+            <a:ext cx="2103120" cy="54864"/>
+          </a:xfrm>
+          <a:prstGeom prst="rect">
+            <a:avLst/>
+          </a:prstGeom>
+          <a:solidFill>
+            <a:srgbClr val="16A34A"/>
+          </a:solidFill>
+          <a:ln>
+            <a:noFill/>
+          </a:ln>
+        </p:spPr>
+        <p:style>
+          <a:lnRef idx="1">
+            <a:schemeClr val="accent1"/>
+          </a:lnRef>
+          <a:fillRef idx="3">
+            <a:schemeClr val="accent1"/>
+          </a:fillRef>
+          <a:effectRef idx="2">
+            <a:schemeClr val="accent1"/>
+          </a:effectRef>
+          <a:fontRef idx="minor">
+            <a:schemeClr val="lt1"/>
+          </a:fontRef>
+        </p:style>
+        <p:txBody>
+          <a:bodyPr rtlCol="0" anchor="ctr"/>
+          <a:lstStyle/>
+          <a:p>
+            <a:pPr algn="ctr"/>
+          </a:p>
+        </p:txBody>
+      </p:sp>
+      <p:sp>
+        <p:nvSpPr>
+          <p:cNvPr id="16" name="TextBox 15"/>
+          <p:cNvSpPr txBox="1"/>
+          <p:nvPr/>
+        </p:nvSpPr>
+        <p:spPr>
+          <a:xfrm>
+            <a:off x="5257800" y="1508760"/>
+            <a:ext cx="1828800" cy="201168"/>
+          </a:xfrm>
+          <a:prstGeom prst="rect">
+            <a:avLst/>
+          </a:prstGeom>
+          <a:noFill/>
+        </p:spPr>
+        <p:txBody>
+          <a:bodyPr wrap="square"/>
+          <a:lstStyle/>
+          <a:p>
+            <a:pPr algn="l">
+              <a:defRPr sz="1000" b="1">
+                <a:solidFill>
+                  <a:srgbClr val="16A34A"/>
+                </a:solidFill>
+                <a:latin typeface="Calibri"/>
+              </a:defRPr>
+            </a:pPr>
+            <a:r>
+              <a:t>Impression</a:t>
+            </a:r>
+          </a:p>
+        </p:txBody>
+      </p:sp>
+      <p:sp>
+        <p:nvSpPr>
+          <p:cNvPr id="17" name="TextBox 16"/>
+          <p:cNvSpPr txBox="1"/>
+          <p:nvPr/>
+        </p:nvSpPr>
+        <p:spPr>
+          <a:xfrm>
+            <a:off x="5257800" y="1737360"/>
+            <a:ext cx="1828800" cy="201168"/>
+          </a:xfrm>
+          <a:prstGeom prst="rect">
+            <a:avLst/>
+          </a:prstGeom>
+          <a:noFill/>
+        </p:spPr>
+        <p:txBody>
+          <a:bodyPr wrap="square"/>
+          <a:lstStyle/>
+          <a:p>
+            <a:pPr algn="l">
+              <a:defRPr sz="900" b="0">
+                <a:solidFill>
+                  <a:srgbClr val="111827"/>
+                </a:solidFill>
+                <a:latin typeface="Consolas"/>
+              </a:defRPr>
+            </a:pPr>
+            <a:r>
+              <a:t>δ = 0.98 × 0.93^s</a:t>
+            </a:r>
+          </a:p>
+        </p:txBody>
+      </p:sp>
+      <p:sp>
+        <p:nvSpPr>
+          <p:cNvPr id="18" name="TextBox 17"/>
+          <p:cNvSpPr txBox="1"/>
+          <p:nvPr/>
+        </p:nvSpPr>
+        <p:spPr>
+          <a:xfrm>
+            <a:off x="5257800" y="2011680"/>
+            <a:ext cx="1828800" cy="548640"/>
+          </a:xfrm>
+          <a:prstGeom prst="rect">
+            <a:avLst/>
+          </a:prstGeom>
+          <a:noFill/>
+        </p:spPr>
+        <p:txBody>
+          <a:bodyPr wrap="square"/>
+          <a:lstStyle/>
+          <a:p>
+            <a:pPr algn="l">
+              <a:defRPr sz="800" b="0">
+                <a:solidFill>
+                  <a:srgbClr val="6B7280"/>
+                </a:solidFill>
+                <a:latin typeface="Calibri"/>
+              </a:defRPr>
+            </a:pPr>
+            <a:r>
+              <a:t>Shallow decay —</a:t>
+            </a:r>
+            <a:br/>
+            <a:r>
+              <a:t>brand visibility ads</a:t>
+            </a:r>
+          </a:p>
+        </p:txBody>
+      </p:sp>
+      <p:sp>
+        <p:nvSpPr>
+          <p:cNvPr id="19" name="Rectangle 18"/>
+          <p:cNvSpPr/>
+          <p:nvPr/>
+        </p:nvSpPr>
+        <p:spPr>
+          <a:xfrm>
+            <a:off x="7406640" y="1371600"/>
+            <a:ext cx="2103120" cy="1280160"/>
+          </a:xfrm>
+          <a:prstGeom prst="rect">
+            <a:avLst/>
+          </a:prstGeom>
+          <a:solidFill>
+            <a:srgbClr val="FFFFFF"/>
+          </a:solidFill>
+          <a:ln>
+            <a:noFill/>
+          </a:ln>
+        </p:spPr>
+        <p:style>
+          <a:lnRef idx="1">
+            <a:schemeClr val="accent1"/>
+          </a:lnRef>
+          <a:fillRef idx="3">
+            <a:schemeClr val="accent1"/>
+          </a:fillRef>
+          <a:effectRef idx="2">
+            <a:schemeClr val="accent1"/>
+          </a:effectRef>
+          <a:fontRef idx="minor">
+            <a:schemeClr val="lt1"/>
+          </a:fontRef>
+        </p:style>
+        <p:txBody>
+          <a:bodyPr rtlCol="0" anchor="ctr"/>
+          <a:lstStyle/>
+          <a:p>
+            <a:pPr algn="ctr"/>
+          </a:p>
+        </p:txBody>
+      </p:sp>
+      <p:sp>
+        <p:nvSpPr>
+          <p:cNvPr id="20" name="Rectangle 19"/>
+          <p:cNvSpPr/>
+          <p:nvPr/>
+        </p:nvSpPr>
+        <p:spPr>
+          <a:xfrm>
+            <a:off x="7406640" y="1371600"/>
+            <a:ext cx="2103120" cy="54864"/>
+          </a:xfrm>
+          <a:prstGeom prst="rect">
+            <a:avLst/>
+          </a:prstGeom>
+          <a:solidFill>
+            <a:srgbClr val="7C3AED"/>
+          </a:solidFill>
+          <a:ln>
+            <a:noFill/>
+          </a:ln>
+        </p:spPr>
+        <p:style>
+          <a:lnRef idx="1">
+            <a:schemeClr val="accent1"/>
+          </a:lnRef>
+          <a:fillRef idx="3">
+            <a:schemeClr val="accent1"/>
+          </a:fillRef>
+          <a:effectRef idx="2">
+            <a:schemeClr val="accent1"/>
+          </a:effectRef>
+          <a:fontRef idx="minor">
+            <a:schemeClr val="lt1"/>
+          </a:fontRef>
+        </p:style>
+        <p:txBody>
+          <a:bodyPr rtlCol="0" anchor="ctr"/>
+          <a:lstStyle/>
+          <a:p>
+            <a:pPr algn="ctr"/>
+          </a:p>
+        </p:txBody>
+      </p:sp>
+      <p:sp>
+        <p:nvSpPr>
+          <p:cNvPr id="21" name="TextBox 20"/>
+          <p:cNvSpPr txBox="1"/>
+          <p:nvPr/>
+        </p:nvSpPr>
+        <p:spPr>
+          <a:xfrm>
+            <a:off x="7543800" y="1508760"/>
+            <a:ext cx="1828800" cy="201168"/>
+          </a:xfrm>
+          <a:prstGeom prst="rect">
+            <a:avLst/>
+          </a:prstGeom>
+          <a:noFill/>
+        </p:spPr>
+        <p:txBody>
+          <a:bodyPr wrap="square"/>
+          <a:lstStyle/>
+          <a:p>
+            <a:pPr algn="l">
+              <a:defRPr sz="1000" b="1">
+                <a:solidFill>
+                  <a:srgbClr val="7C3AED"/>
+                </a:solidFill>
+                <a:latin typeface="Calibri"/>
+              </a:defRPr>
+            </a:pPr>
+            <a:r>
+              <a:t>Carousel</a:t>
+            </a:r>
+          </a:p>
+        </p:txBody>
+      </p:sp>
+      <p:sp>
+        <p:nvSpPr>
+          <p:cNvPr id="22" name="TextBox 21"/>
+          <p:cNvSpPr txBox="1"/>
+          <p:nvPr/>
+        </p:nvSpPr>
+        <p:spPr>
+          <a:xfrm>
+            <a:off x="7543800" y="1737360"/>
+            <a:ext cx="1828800" cy="201168"/>
+          </a:xfrm>
+          <a:prstGeom prst="rect">
+            <a:avLst/>
+          </a:prstGeom>
+          <a:noFill/>
+        </p:spPr>
+        <p:txBody>
+          <a:bodyPr wrap="square"/>
+          <a:lstStyle/>
+          <a:p>
+            <a:pPr algn="l">
+              <a:defRPr sz="900" b="0">
+                <a:solidFill>
+                  <a:srgbClr val="111827"/>
+                </a:solidFill>
+                <a:latin typeface="Consolas"/>
+              </a:defRPr>
+            </a:pPr>
+            <a:r>
+              <a:t>δ = 0.92 × 0.85^s</a:t>
+            </a:r>
+          </a:p>
+        </p:txBody>
+      </p:sp>
+      <p:sp>
+        <p:nvSpPr>
+          <p:cNvPr id="23" name="TextBox 22"/>
+          <p:cNvSpPr txBox="1"/>
+          <p:nvPr/>
+        </p:nvSpPr>
+        <p:spPr>
+          <a:xfrm>
+            <a:off x="7543800" y="2011680"/>
+            <a:ext cx="1828800" cy="548640"/>
+          </a:xfrm>
+          <a:prstGeom prst="rect">
+            <a:avLst/>
+          </a:prstGeom>
+          <a:noFill/>
+        </p:spPr>
+        <p:txBody>
+          <a:bodyPr wrap="square"/>
+          <a:lstStyle/>
+          <a:p>
+            <a:pPr algn="l">
+              <a:defRPr sz="800" b="0">
+                <a:solidFill>
+                  <a:srgbClr val="6B7280"/>
+                </a:solidFill>
+                <a:latin typeface="Calibri"/>
+              </a:defRPr>
+            </a:pPr>
+            <a:r>
+              <a:t>Multi-card interactive</a:t>
+            </a:r>
+            <a:br/>
+            <a:r>
+              <a:t>with moderate decay</a:t>
+            </a:r>
+          </a:p>
+        </p:txBody>
+      </p:sp>
+      <p:sp>
+        <p:nvSpPr>
+          <p:cNvPr id="24" name="Rectangle 23"/>
+          <p:cNvSpPr/>
+          <p:nvPr/>
+        </p:nvSpPr>
+        <p:spPr>
+          <a:xfrm>
+            <a:off x="9692640" y="1371600"/>
+            <a:ext cx="2103120" cy="1280160"/>
+          </a:xfrm>
+          <a:prstGeom prst="rect">
+            <a:avLst/>
+          </a:prstGeom>
+          <a:solidFill>
+            <a:srgbClr val="FFFFFF"/>
+          </a:solidFill>
+          <a:ln>
+            <a:noFill/>
+          </a:ln>
+        </p:spPr>
+        <p:style>
+          <a:lnRef idx="1">
+            <a:schemeClr val="accent1"/>
+          </a:lnRef>
+          <a:fillRef idx="3">
+            <a:schemeClr val="accent1"/>
+          </a:fillRef>
+          <a:effectRef idx="2">
+            <a:schemeClr val="accent1"/>
+          </a:effectRef>
+          <a:fontRef idx="minor">
+            <a:schemeClr val="lt1"/>
+          </a:fontRef>
+        </p:style>
+        <p:txBody>
+          <a:bodyPr rtlCol="0" anchor="ctr"/>
+          <a:lstStyle/>
+          <a:p>
+            <a:pPr algn="ctr"/>
+          </a:p>
+        </p:txBody>
+      </p:sp>
+      <p:sp>
+        <p:nvSpPr>
+          <p:cNvPr id="25" name="Rectangle 24"/>
+          <p:cNvSpPr/>
+          <p:nvPr/>
+        </p:nvSpPr>
+        <p:spPr>
+          <a:xfrm>
+            <a:off x="9692640" y="1371600"/>
+            <a:ext cx="2103120" cy="54864"/>
+          </a:xfrm>
+          <a:prstGeom prst="rect">
+            <a:avLst/>
+          </a:prstGeom>
+          <a:solidFill>
+            <a:srgbClr val="CA8A04"/>
+          </a:solidFill>
+          <a:ln>
+            <a:noFill/>
+          </a:ln>
+        </p:spPr>
+        <p:style>
+          <a:lnRef idx="1">
+            <a:schemeClr val="accent1"/>
+          </a:lnRef>
+          <a:fillRef idx="3">
+            <a:schemeClr val="accent1"/>
+          </a:fillRef>
+          <a:effectRef idx="2">
+            <a:schemeClr val="accent1"/>
+          </a:effectRef>
+          <a:fontRef idx="minor">
+            <a:schemeClr val="lt1"/>
+          </a:fontRef>
+        </p:style>
+        <p:txBody>
+          <a:bodyPr rtlCol="0" anchor="ctr"/>
+          <a:lstStyle/>
+          <a:p>
+            <a:pPr algn="ctr"/>
+          </a:p>
+        </p:txBody>
+      </p:sp>
+      <p:sp>
+        <p:nvSpPr>
+          <p:cNvPr id="26" name="TextBox 25"/>
+          <p:cNvSpPr txBox="1"/>
+          <p:nvPr/>
+        </p:nvSpPr>
+        <p:spPr>
+          <a:xfrm>
+            <a:off x="9829800" y="1508760"/>
+            <a:ext cx="1828800" cy="201168"/>
+          </a:xfrm>
+          <a:prstGeom prst="rect">
+            <a:avLst/>
+          </a:prstGeom>
+          <a:noFill/>
+        </p:spPr>
+        <p:txBody>
+          <a:bodyPr wrap="square"/>
+          <a:lstStyle/>
+          <a:p>
+            <a:pPr algn="l">
+              <a:defRPr sz="1000" b="1">
+                <a:solidFill>
+                  <a:srgbClr val="CA8A04"/>
+                </a:solidFill>
+                <a:latin typeface="Calibri"/>
+              </a:defRPr>
+            </a:pPr>
+            <a:r>
+              <a:t>Native</a:t>
+            </a:r>
+          </a:p>
+        </p:txBody>
+      </p:sp>
+      <p:sp>
+        <p:nvSpPr>
+          <p:cNvPr id="27" name="TextBox 26"/>
+          <p:cNvSpPr txBox="1"/>
+          <p:nvPr/>
+        </p:nvSpPr>
+        <p:spPr>
+          <a:xfrm>
+            <a:off x="9829800" y="1737360"/>
+            <a:ext cx="1828800" cy="201168"/>
+          </a:xfrm>
+          <a:prstGeom prst="rect">
+            <a:avLst/>
+          </a:prstGeom>
+          <a:noFill/>
+        </p:spPr>
+        <p:txBody>
+          <a:bodyPr wrap="square"/>
+          <a:lstStyle/>
+          <a:p>
+            <a:pPr algn="l">
+              <a:defRPr sz="900" b="0">
+                <a:solidFill>
+                  <a:srgbClr val="111827"/>
+                </a:solidFill>
+                <a:latin typeface="Consolas"/>
+              </a:defRPr>
+            </a:pPr>
+            <a:r>
+              <a:t>δ = 0.96 × 0.90^s</a:t>
+            </a:r>
+          </a:p>
+        </p:txBody>
+      </p:sp>
+      <p:sp>
+        <p:nvSpPr>
+          <p:cNvPr id="28" name="TextBox 27"/>
+          <p:cNvSpPr txBox="1"/>
+          <p:nvPr/>
+        </p:nvSpPr>
+        <p:spPr>
+          <a:xfrm>
+            <a:off x="9829800" y="2011680"/>
+            <a:ext cx="1828800" cy="548640"/>
+          </a:xfrm>
+          <a:prstGeom prst="rect">
+            <a:avLst/>
+          </a:prstGeom>
+          <a:noFill/>
+        </p:spPr>
+        <p:txBody>
+          <a:bodyPr wrap="square"/>
+          <a:lstStyle/>
+          <a:p>
+            <a:pPr algn="l">
+              <a:defRPr sz="800" b="0">
+                <a:solidFill>
+                  <a:srgbClr val="6B7280"/>
+                </a:solidFill>
+                <a:latin typeface="Calibri"/>
+              </a:defRPr>
+            </a:pPr>
+            <a:r>
+              <a:t>Blends with content —</a:t>
+            </a:r>
+            <a:br/>
+            <a:r>
+              <a:t>moderate sensitivity</a:t>
+            </a:r>
+          </a:p>
+        </p:txBody>
+      </p:sp>
+      <p:sp>
+        <p:nvSpPr>
+          <p:cNvPr id="29" name="Rectangle 28"/>
+          <p:cNvSpPr/>
+          <p:nvPr/>
+        </p:nvSpPr>
+        <p:spPr>
+          <a:xfrm>
+            <a:off x="548640" y="2926080"/>
+            <a:ext cx="6583680" cy="2011680"/>
+          </a:xfrm>
+          <a:prstGeom prst="rect">
+            <a:avLst/>
+          </a:prstGeom>
+          <a:solidFill>
+            <a:srgbClr val="FFFFFF"/>
+          </a:solidFill>
+          <a:ln>
+            <a:noFill/>
+          </a:ln>
+        </p:spPr>
+        <p:style>
+          <a:lnRef idx="1">
+            <a:schemeClr val="accent1"/>
+          </a:lnRef>
+          <a:fillRef idx="3">
+            <a:schemeClr val="accent1"/>
+          </a:fillRef>
+          <a:effectRef idx="2">
+            <a:schemeClr val="accent1"/>
+          </a:effectRef>
+          <a:fontRef idx="minor">
+            <a:schemeClr val="lt1"/>
+          </a:fontRef>
+        </p:style>
+        <p:txBody>
+          <a:bodyPr rtlCol="0" anchor="ctr"/>
+          <a:lstStyle/>
+          <a:p>
+            <a:pPr algn="ctr"/>
+          </a:p>
+        </p:txBody>
+      </p:sp>
+      <p:sp>
+        <p:nvSpPr>
+          <p:cNvPr id="30" name="TextBox 29"/>
+          <p:cNvSpPr txBox="1"/>
+          <p:nvPr/>
+        </p:nvSpPr>
+        <p:spPr>
+          <a:xfrm>
+            <a:off x="731520" y="3017520"/>
+            <a:ext cx="6217920" cy="274320"/>
+          </a:xfrm>
+          <a:prstGeom prst="rect">
+            <a:avLst/>
+          </a:prstGeom>
+          <a:noFill/>
+        </p:spPr>
+        <p:txBody>
+          <a:bodyPr wrap="square"/>
+          <a:lstStyle/>
+          <a:p>
+            <a:pPr algn="l">
+              <a:defRPr sz="1200" b="1">
+                <a:solidFill>
+                  <a:srgbClr val="111827"/>
+                </a:solidFill>
+                <a:latin typeface="Calibri"/>
+              </a:defRPr>
+            </a:pPr>
+            <a:r>
+              <a:t>4 Mechanism Combinations (Allocation × Pricing)</a:t>
+            </a:r>
+          </a:p>
+        </p:txBody>
+      </p:sp>
+      <p:sp>
+        <p:nvSpPr>
+          <p:cNvPr id="31" name="Rectangle 30"/>
+          <p:cNvSpPr/>
+          <p:nvPr/>
+        </p:nvSpPr>
+        <p:spPr>
+          <a:xfrm>
+            <a:off x="640080" y="3337560"/>
+            <a:ext cx="6400800" cy="256032"/>
+          </a:xfrm>
+          <a:prstGeom prst="rect">
+            <a:avLst/>
+          </a:prstGeom>
+          <a:solidFill>
+            <a:srgbClr val="DBEAFE"/>
+          </a:solidFill>
+          <a:ln>
+            <a:noFill/>
+          </a:ln>
+        </p:spPr>
+        <p:style>
+          <a:lnRef idx="1">
+            <a:schemeClr val="accent1"/>
+          </a:lnRef>
+          <a:fillRef idx="3">
+            <a:schemeClr val="accent1"/>
+          </a:fillRef>
+          <a:effectRef idx="2">
+            <a:schemeClr val="accent1"/>
+          </a:effectRef>
+          <a:fontRef idx="minor">
+            <a:schemeClr val="lt1"/>
+          </a:fontRef>
+        </p:style>
+        <p:txBody>
+          <a:bodyPr rtlCol="0" anchor="ctr"/>
+          <a:lstStyle/>
+          <a:p>
+            <a:pPr algn="ctr"/>
+          </a:p>
+        </p:txBody>
+      </p:sp>
+      <p:sp>
+        <p:nvSpPr>
+          <p:cNvPr id="32" name="TextBox 31"/>
+          <p:cNvSpPr txBox="1"/>
+          <p:nvPr/>
+        </p:nvSpPr>
+        <p:spPr>
+          <a:xfrm>
+            <a:off x="685800" y="3355848"/>
+            <a:ext cx="1261872" cy="256032"/>
+          </a:xfrm>
+          <a:prstGeom prst="rect">
+            <a:avLst/>
+          </a:prstGeom>
+          <a:noFill/>
+        </p:spPr>
+        <p:txBody>
+          <a:bodyPr wrap="square"/>
+          <a:lstStyle/>
+          <a:p>
+            <a:pPr algn="l">
+              <a:defRPr sz="800" b="1">
+                <a:solidFill>
+                  <a:srgbClr val="1D4ED8"/>
+                </a:solidFill>
+                <a:latin typeface="Calibri"/>
+              </a:defRPr>
+            </a:pPr>
+            <a:r>
+              <a:t>Mechanism</a:t>
+            </a:r>
+          </a:p>
+        </p:txBody>
+      </p:sp>
+      <p:sp>
+        <p:nvSpPr>
+          <p:cNvPr id="33" name="TextBox 32"/>
+          <p:cNvSpPr txBox="1"/>
+          <p:nvPr/>
+        </p:nvSpPr>
+        <p:spPr>
+          <a:xfrm>
+            <a:off x="1947672" y="3355848"/>
+            <a:ext cx="1261872" cy="256032"/>
+          </a:xfrm>
+          <a:prstGeom prst="rect">
+            <a:avLst/>
+          </a:prstGeom>
+          <a:noFill/>
+        </p:spPr>
+        <p:txBody>
+          <a:bodyPr wrap="square"/>
+          <a:lstStyle/>
+          <a:p>
+            <a:pPr algn="l">
+              <a:defRPr sz="800" b="1">
+                <a:solidFill>
+                  <a:srgbClr val="1D4ED8"/>
+                </a:solidFill>
+                <a:latin typeface="Calibri"/>
+              </a:defRPr>
+            </a:pPr>
+            <a:r>
+              <a:t>Revenue</a:t>
+            </a:r>
+          </a:p>
+        </p:txBody>
+      </p:sp>
+      <p:sp>
+        <p:nvSpPr>
+          <p:cNvPr id="34" name="TextBox 33"/>
+          <p:cNvSpPr txBox="1"/>
+          <p:nvPr/>
+        </p:nvSpPr>
+        <p:spPr>
+          <a:xfrm>
+            <a:off x="3209544" y="3355848"/>
+            <a:ext cx="1261872" cy="256032"/>
+          </a:xfrm>
+          <a:prstGeom prst="rect">
+            <a:avLst/>
+          </a:prstGeom>
+          <a:noFill/>
+        </p:spPr>
+        <p:txBody>
+          <a:bodyPr wrap="square"/>
+          <a:lstStyle/>
+          <a:p>
+            <a:pPr algn="l">
+              <a:defRPr sz="800" b="1">
+                <a:solidFill>
+                  <a:srgbClr val="1D4ED8"/>
+                </a:solidFill>
+                <a:latin typeface="Calibri"/>
+              </a:defRPr>
+            </a:pPr>
+            <a:r>
+              <a:t>Welfare</a:t>
+            </a:r>
+          </a:p>
+        </p:txBody>
+      </p:sp>
+      <p:sp>
+        <p:nvSpPr>
+          <p:cNvPr id="35" name="TextBox 34"/>
+          <p:cNvSpPr txBox="1"/>
+          <p:nvPr/>
+        </p:nvSpPr>
+        <p:spPr>
+          <a:xfrm>
+            <a:off x="4471416" y="3355848"/>
+            <a:ext cx="1261872" cy="256032"/>
+          </a:xfrm>
+          <a:prstGeom prst="rect">
+            <a:avLst/>
+          </a:prstGeom>
+          <a:noFill/>
+        </p:spPr>
+        <p:txBody>
+          <a:bodyPr wrap="square"/>
+          <a:lstStyle/>
+          <a:p>
+            <a:pPr algn="l">
+              <a:defRPr sz="800" b="1">
+                <a:solidFill>
+                  <a:srgbClr val="1D4ED8"/>
+                </a:solidFill>
+                <a:latin typeface="Calibri"/>
+              </a:defRPr>
+            </a:pPr>
+            <a:r>
+              <a:t>PoA</a:t>
+            </a:r>
+          </a:p>
+        </p:txBody>
+      </p:sp>
+      <p:sp>
+        <p:nvSpPr>
+          <p:cNvPr id="36" name="TextBox 35"/>
+          <p:cNvSpPr txBox="1"/>
+          <p:nvPr/>
+        </p:nvSpPr>
+        <p:spPr>
+          <a:xfrm>
+            <a:off x="5733288" y="3355848"/>
+            <a:ext cx="1261872" cy="256032"/>
+          </a:xfrm>
+          <a:prstGeom prst="rect">
+            <a:avLst/>
+          </a:prstGeom>
+          <a:noFill/>
+        </p:spPr>
+        <p:txBody>
+          <a:bodyPr wrap="square"/>
+          <a:lstStyle/>
+          <a:p>
+            <a:pPr algn="l">
+              <a:defRPr sz="800" b="1">
+                <a:solidFill>
+                  <a:srgbClr val="1D4ED8"/>
+                </a:solidFill>
+                <a:latin typeface="Calibri"/>
+              </a:defRPr>
+            </a:pPr>
+            <a:r>
+              <a:t>Truthful?</a:t>
+            </a:r>
+          </a:p>
+        </p:txBody>
+      </p:sp>
+      <p:sp>
+        <p:nvSpPr>
+          <p:cNvPr id="37" name="TextBox 36"/>
+          <p:cNvSpPr txBox="1"/>
+          <p:nvPr/>
+        </p:nvSpPr>
+        <p:spPr>
+          <a:xfrm>
+            <a:off x="685800" y="3611880"/>
+            <a:ext cx="1261872" cy="256032"/>
+          </a:xfrm>
+          <a:prstGeom prst="rect">
+            <a:avLst/>
+          </a:prstGeom>
+          <a:noFill/>
+        </p:spPr>
+        <p:txBody>
+          <a:bodyPr wrap="square"/>
+          <a:lstStyle/>
+          <a:p>
+            <a:pPr algn="l">
+              <a:defRPr sz="900" b="0">
+                <a:solidFill>
+                  <a:srgbClr val="374151"/>
+                </a:solidFill>
+                <a:latin typeface="Calibri"/>
+              </a:defRPr>
+            </a:pPr>
+            <a:r>
+              <a:t>Greedy + GSP</a:t>
+            </a:r>
+          </a:p>
+        </p:txBody>
+      </p:sp>
+      <p:sp>
+        <p:nvSpPr>
+          <p:cNvPr id="38" name="TextBox 37"/>
+          <p:cNvSpPr txBox="1"/>
+          <p:nvPr/>
+        </p:nvSpPr>
+        <p:spPr>
+          <a:xfrm>
+            <a:off x="1947672" y="3611880"/>
+            <a:ext cx="1261872" cy="256032"/>
+          </a:xfrm>
+          <a:prstGeom prst="rect">
+            <a:avLst/>
+          </a:prstGeom>
+          <a:noFill/>
+        </p:spPr>
+        <p:txBody>
+          <a:bodyPr wrap="square"/>
+          <a:lstStyle/>
+          <a:p>
+            <a:pPr algn="l">
+              <a:defRPr sz="900" b="0">
+                <a:solidFill>
+                  <a:srgbClr val="374151"/>
+                </a:solidFill>
+                <a:latin typeface="Calibri"/>
+              </a:defRPr>
+            </a:pPr>
+            <a:r>
+              <a:t>$842</a:t>
+            </a:r>
+          </a:p>
+        </p:txBody>
+      </p:sp>
+      <p:sp>
+        <p:nvSpPr>
+          <p:cNvPr id="39" name="TextBox 38"/>
+          <p:cNvSpPr txBox="1"/>
+          <p:nvPr/>
+        </p:nvSpPr>
+        <p:spPr>
+          <a:xfrm>
+            <a:off x="3209544" y="3611880"/>
+            <a:ext cx="1261872" cy="256032"/>
+          </a:xfrm>
+          <a:prstGeom prst="rect">
+            <a:avLst/>
+          </a:prstGeom>
+          <a:noFill/>
+        </p:spPr>
+        <p:txBody>
+          <a:bodyPr wrap="square"/>
+          <a:lstStyle/>
+          <a:p>
+            <a:pPr algn="l">
+              <a:defRPr sz="900" b="0">
+                <a:solidFill>
+                  <a:srgbClr val="374151"/>
+                </a:solidFill>
+                <a:latin typeface="Calibri"/>
+              </a:defRPr>
+            </a:pPr>
+            <a:r>
+              <a:t>$1,247</a:t>
+            </a:r>
+          </a:p>
+        </p:txBody>
+      </p:sp>
+      <p:sp>
+        <p:nvSpPr>
+          <p:cNvPr id="40" name="TextBox 39"/>
+          <p:cNvSpPr txBox="1"/>
+          <p:nvPr/>
+        </p:nvSpPr>
+        <p:spPr>
+          <a:xfrm>
+            <a:off x="4471416" y="3611880"/>
+            <a:ext cx="1261872" cy="256032"/>
+          </a:xfrm>
+          <a:prstGeom prst="rect">
+            <a:avLst/>
+          </a:prstGeom>
+          <a:noFill/>
+        </p:spPr>
+        <p:txBody>
+          <a:bodyPr wrap="square"/>
+          <a:lstStyle/>
+          <a:p>
+            <a:pPr algn="l">
+              <a:defRPr sz="900" b="0">
+                <a:solidFill>
+                  <a:srgbClr val="374151"/>
+                </a:solidFill>
+                <a:latin typeface="Calibri"/>
+              </a:defRPr>
+            </a:pPr>
+            <a:r>
+              <a:t>1.82×</a:t>
+            </a:r>
+          </a:p>
+        </p:txBody>
+      </p:sp>
+      <p:sp>
+        <p:nvSpPr>
+          <p:cNvPr id="41" name="TextBox 40"/>
+          <p:cNvSpPr txBox="1"/>
+          <p:nvPr/>
+        </p:nvSpPr>
+        <p:spPr>
+          <a:xfrm>
+            <a:off x="5733288" y="3611880"/>
+            <a:ext cx="1261872" cy="256032"/>
+          </a:xfrm>
+          <a:prstGeom prst="rect">
+            <a:avLst/>
+          </a:prstGeom>
+          <a:noFill/>
+        </p:spPr>
+        <p:txBody>
+          <a:bodyPr wrap="square"/>
+          <a:lstStyle/>
+          <a:p>
+            <a:pPr algn="l">
+              <a:defRPr sz="900" b="0">
+                <a:solidFill>
+                  <a:srgbClr val="374151"/>
+                </a:solidFill>
+                <a:latin typeface="Calibri"/>
+              </a:defRPr>
+            </a:pPr>
+            <a:r>
+              <a:t>No</a:t>
+            </a:r>
+          </a:p>
+        </p:txBody>
+      </p:sp>
+      <p:sp>
+        <p:nvSpPr>
+          <p:cNvPr id="42" name="Rectangle 41"/>
+          <p:cNvSpPr/>
+          <p:nvPr/>
+        </p:nvSpPr>
+        <p:spPr>
+          <a:xfrm>
+            <a:off x="685800" y="3840480"/>
+            <a:ext cx="6309360" cy="4572"/>
+          </a:xfrm>
+          <a:prstGeom prst="rect">
+            <a:avLst/>
+          </a:prstGeom>
+          <a:solidFill>
+            <a:srgbClr val="F3F4F6"/>
+          </a:solidFill>
+          <a:ln>
+            <a:noFill/>
+          </a:ln>
+        </p:spPr>
+        <p:style>
+          <a:lnRef idx="1">
+            <a:schemeClr val="accent1"/>
+          </a:lnRef>
+          <a:fillRef idx="3">
+            <a:schemeClr val="accent1"/>
+          </a:fillRef>
+          <a:effectRef idx="2">
+            <a:schemeClr val="accent1"/>
+          </a:effectRef>
+          <a:fontRef idx="minor">
+            <a:schemeClr val="lt1"/>
+          </a:fontRef>
+        </p:style>
+        <p:txBody>
+          <a:bodyPr rtlCol="0" anchor="ctr"/>
+          <a:lstStyle/>
+          <a:p>
+            <a:pPr algn="ctr"/>
+          </a:p>
+        </p:txBody>
+      </p:sp>
+      <p:sp>
+        <p:nvSpPr>
+          <p:cNvPr id="43" name="TextBox 42"/>
+          <p:cNvSpPr txBox="1"/>
+          <p:nvPr/>
+        </p:nvSpPr>
+        <p:spPr>
+          <a:xfrm>
+            <a:off x="685800" y="3867912"/>
+            <a:ext cx="1261872" cy="256032"/>
+          </a:xfrm>
+          <a:prstGeom prst="rect">
+            <a:avLst/>
+          </a:prstGeom>
+          <a:noFill/>
+        </p:spPr>
+        <p:txBody>
+          <a:bodyPr wrap="square"/>
+          <a:lstStyle/>
+          <a:p>
+            <a:pPr algn="l">
+              <a:defRPr sz="900" b="0">
+                <a:solidFill>
+                  <a:srgbClr val="374151"/>
+                </a:solidFill>
+                <a:latin typeface="Calibri"/>
+              </a:defRPr>
+            </a:pPr>
+            <a:r>
+              <a:t>Greedy + VCG</a:t>
+            </a:r>
+          </a:p>
+        </p:txBody>
+      </p:sp>
+      <p:sp>
+        <p:nvSpPr>
+          <p:cNvPr id="44" name="TextBox 43"/>
+          <p:cNvSpPr txBox="1"/>
+          <p:nvPr/>
+        </p:nvSpPr>
+        <p:spPr>
+          <a:xfrm>
+            <a:off x="1947672" y="3867912"/>
+            <a:ext cx="1261872" cy="256032"/>
+          </a:xfrm>
+          <a:prstGeom prst="rect">
+            <a:avLst/>
+          </a:prstGeom>
+          <a:noFill/>
+        </p:spPr>
+        <p:txBody>
+          <a:bodyPr wrap="square"/>
+          <a:lstStyle/>
+          <a:p>
+            <a:pPr algn="l">
+              <a:defRPr sz="900" b="0">
+                <a:solidFill>
+                  <a:srgbClr val="374151"/>
+                </a:solidFill>
+                <a:latin typeface="Calibri"/>
+              </a:defRPr>
+            </a:pPr>
+            <a:r>
+              <a:t>$798</a:t>
+            </a:r>
+          </a:p>
+        </p:txBody>
+      </p:sp>
+      <p:sp>
+        <p:nvSpPr>
+          <p:cNvPr id="45" name="TextBox 44"/>
+          <p:cNvSpPr txBox="1"/>
+          <p:nvPr/>
+        </p:nvSpPr>
+        <p:spPr>
+          <a:xfrm>
+            <a:off x="3209544" y="3867912"/>
+            <a:ext cx="1261872" cy="256032"/>
+          </a:xfrm>
+          <a:prstGeom prst="rect">
+            <a:avLst/>
+          </a:prstGeom>
+          <a:noFill/>
+        </p:spPr>
+        <p:txBody>
+          <a:bodyPr wrap="square"/>
+          <a:lstStyle/>
+          <a:p>
+            <a:pPr algn="l">
+              <a:defRPr sz="900" b="0">
+                <a:solidFill>
+                  <a:srgbClr val="374151"/>
+                </a:solidFill>
+                <a:latin typeface="Calibri"/>
+              </a:defRPr>
+            </a:pPr>
+            <a:r>
+              <a:t>$1,389</a:t>
+            </a:r>
+          </a:p>
+        </p:txBody>
+      </p:sp>
+      <p:sp>
+        <p:nvSpPr>
+          <p:cNvPr id="46" name="TextBox 45"/>
+          <p:cNvSpPr txBox="1"/>
+          <p:nvPr/>
+        </p:nvSpPr>
+        <p:spPr>
+          <a:xfrm>
+            <a:off x="4471416" y="3867912"/>
+            <a:ext cx="1261872" cy="256032"/>
+          </a:xfrm>
+          <a:prstGeom prst="rect">
+            <a:avLst/>
+          </a:prstGeom>
+          <a:noFill/>
+        </p:spPr>
+        <p:txBody>
+          <a:bodyPr wrap="square"/>
+          <a:lstStyle/>
+          <a:p>
+            <a:pPr algn="l">
+              <a:defRPr sz="900" b="0">
+                <a:solidFill>
+                  <a:srgbClr val="374151"/>
+                </a:solidFill>
+                <a:latin typeface="Calibri"/>
+              </a:defRPr>
+            </a:pPr>
+            <a:r>
+              <a:t>1.31×</a:t>
+            </a:r>
+          </a:p>
+        </p:txBody>
+      </p:sp>
+      <p:sp>
+        <p:nvSpPr>
+          <p:cNvPr id="47" name="TextBox 46"/>
+          <p:cNvSpPr txBox="1"/>
+          <p:nvPr/>
+        </p:nvSpPr>
+        <p:spPr>
+          <a:xfrm>
+            <a:off x="5733288" y="3867912"/>
+            <a:ext cx="1261872" cy="256032"/>
+          </a:xfrm>
+          <a:prstGeom prst="rect">
+            <a:avLst/>
+          </a:prstGeom>
+          <a:noFill/>
+        </p:spPr>
+        <p:txBody>
+          <a:bodyPr wrap="square"/>
+          <a:lstStyle/>
+          <a:p>
+            <a:pPr algn="l">
+              <a:defRPr sz="900" b="0">
+                <a:solidFill>
+                  <a:srgbClr val="374151"/>
+                </a:solidFill>
+                <a:latin typeface="Calibri"/>
+              </a:defRPr>
+            </a:pPr>
+            <a:r>
+              <a:t>No*</a:t>
+            </a:r>
+          </a:p>
+        </p:txBody>
+      </p:sp>
+      <p:sp>
+        <p:nvSpPr>
+          <p:cNvPr id="48" name="Rectangle 47"/>
+          <p:cNvSpPr/>
+          <p:nvPr/>
+        </p:nvSpPr>
+        <p:spPr>
+          <a:xfrm>
+            <a:off x="685800" y="4096512"/>
+            <a:ext cx="6309360" cy="4572"/>
+          </a:xfrm>
+          <a:prstGeom prst="rect">
+            <a:avLst/>
+          </a:prstGeom>
+          <a:solidFill>
+            <a:srgbClr val="F3F4F6"/>
+          </a:solidFill>
+          <a:ln>
+            <a:noFill/>
+          </a:ln>
+        </p:spPr>
+        <p:style>
+          <a:lnRef idx="1">
+            <a:schemeClr val="accent1"/>
+          </a:lnRef>
+          <a:fillRef idx="3">
+            <a:schemeClr val="accent1"/>
+          </a:fillRef>
+          <a:effectRef idx="2">
+            <a:schemeClr val="accent1"/>
+          </a:effectRef>
+          <a:fontRef idx="minor">
+            <a:schemeClr val="lt1"/>
+          </a:fontRef>
+        </p:style>
+        <p:txBody>
+          <a:bodyPr rtlCol="0" anchor="ctr"/>
+          <a:lstStyle/>
+          <a:p>
+            <a:pPr algn="ctr"/>
+          </a:p>
+        </p:txBody>
+      </p:sp>
+      <p:sp>
+        <p:nvSpPr>
+          <p:cNvPr id="49" name="TextBox 48"/>
+          <p:cNvSpPr txBox="1"/>
+          <p:nvPr/>
+        </p:nvSpPr>
+        <p:spPr>
+          <a:xfrm>
+            <a:off x="685800" y="4123944"/>
+            <a:ext cx="1261872" cy="256032"/>
+          </a:xfrm>
+          <a:prstGeom prst="rect">
+            <a:avLst/>
+          </a:prstGeom>
+          <a:noFill/>
+        </p:spPr>
+        <p:txBody>
+          <a:bodyPr wrap="square"/>
+          <a:lstStyle/>
+          <a:p>
+            <a:pPr algn="l">
+              <a:defRPr sz="900" b="0">
+                <a:solidFill>
+                  <a:srgbClr val="374151"/>
+                </a:solidFill>
+                <a:latin typeface="Calibri"/>
+              </a:defRPr>
+            </a:pPr>
+            <a:r>
+              <a:t>Optimal + GSP</a:t>
+            </a:r>
+          </a:p>
+        </p:txBody>
+      </p:sp>
+      <p:sp>
+        <p:nvSpPr>
+          <p:cNvPr id="50" name="TextBox 49"/>
+          <p:cNvSpPr txBox="1"/>
+          <p:nvPr/>
+        </p:nvSpPr>
+        <p:spPr>
+          <a:xfrm>
+            <a:off x="1947672" y="4123944"/>
+            <a:ext cx="1261872" cy="256032"/>
+          </a:xfrm>
+          <a:prstGeom prst="rect">
+            <a:avLst/>
+          </a:prstGeom>
+          <a:noFill/>
+        </p:spPr>
+        <p:txBody>
+          <a:bodyPr wrap="square"/>
+          <a:lstStyle/>
+          <a:p>
+            <a:pPr algn="l">
+              <a:defRPr sz="900" b="0">
+                <a:solidFill>
+                  <a:srgbClr val="374151"/>
+                </a:solidFill>
+                <a:latin typeface="Calibri"/>
+              </a:defRPr>
+            </a:pPr>
+            <a:r>
+              <a:t>$856</a:t>
+            </a:r>
+          </a:p>
+        </p:txBody>
+      </p:sp>
+      <p:sp>
+        <p:nvSpPr>
+          <p:cNvPr id="51" name="TextBox 50"/>
+          <p:cNvSpPr txBox="1"/>
+          <p:nvPr/>
+        </p:nvSpPr>
+        <p:spPr>
+          <a:xfrm>
+            <a:off x="3209544" y="4123944"/>
+            <a:ext cx="1261872" cy="256032"/>
+          </a:xfrm>
+          <a:prstGeom prst="rect">
+            <a:avLst/>
+          </a:prstGeom>
+          <a:noFill/>
+        </p:spPr>
+        <p:txBody>
+          <a:bodyPr wrap="square"/>
+          <a:lstStyle/>
+          <a:p>
+            <a:pPr algn="l">
+              <a:defRPr sz="900" b="0">
+                <a:solidFill>
+                  <a:srgbClr val="374151"/>
+                </a:solidFill>
+                <a:latin typeface="Calibri"/>
+              </a:defRPr>
+            </a:pPr>
+            <a:r>
+              <a:t>$1,412</a:t>
+            </a:r>
+          </a:p>
+        </p:txBody>
+      </p:sp>
+      <p:sp>
+        <p:nvSpPr>
+          <p:cNvPr id="52" name="TextBox 51"/>
+          <p:cNvSpPr txBox="1"/>
+          <p:nvPr/>
+        </p:nvSpPr>
+        <p:spPr>
+          <a:xfrm>
+            <a:off x="4471416" y="4123944"/>
+            <a:ext cx="1261872" cy="256032"/>
+          </a:xfrm>
+          <a:prstGeom prst="rect">
+            <a:avLst/>
+          </a:prstGeom>
+          <a:noFill/>
+        </p:spPr>
+        <p:txBody>
+          <a:bodyPr wrap="square"/>
+          <a:lstStyle/>
+          <a:p>
+            <a:pPr algn="l">
+              <a:defRPr sz="900" b="0">
+                <a:solidFill>
+                  <a:srgbClr val="374151"/>
+                </a:solidFill>
+                <a:latin typeface="Calibri"/>
+              </a:defRPr>
+            </a:pPr>
+            <a:r>
+              <a:t>1.29×</a:t>
+            </a:r>
+          </a:p>
+        </p:txBody>
+      </p:sp>
+      <p:sp>
+        <p:nvSpPr>
+          <p:cNvPr id="53" name="TextBox 52"/>
+          <p:cNvSpPr txBox="1"/>
+          <p:nvPr/>
+        </p:nvSpPr>
+        <p:spPr>
+          <a:xfrm>
+            <a:off x="5733288" y="4123944"/>
+            <a:ext cx="1261872" cy="256032"/>
+          </a:xfrm>
+          <a:prstGeom prst="rect">
+            <a:avLst/>
+          </a:prstGeom>
+          <a:noFill/>
+        </p:spPr>
+        <p:txBody>
+          <a:bodyPr wrap="square"/>
+          <a:lstStyle/>
+          <a:p>
+            <a:pPr algn="l">
+              <a:defRPr sz="900" b="0">
+                <a:solidFill>
+                  <a:srgbClr val="374151"/>
+                </a:solidFill>
+                <a:latin typeface="Calibri"/>
+              </a:defRPr>
+            </a:pPr>
+            <a:r>
+              <a:t>No</a:t>
+            </a:r>
+          </a:p>
+        </p:txBody>
+      </p:sp>
+      <p:sp>
+        <p:nvSpPr>
+          <p:cNvPr id="54" name="Rectangle 53"/>
+          <p:cNvSpPr/>
+          <p:nvPr/>
+        </p:nvSpPr>
+        <p:spPr>
+          <a:xfrm>
+            <a:off x="685800" y="4352544"/>
+            <a:ext cx="6309360" cy="4572"/>
+          </a:xfrm>
+          <a:prstGeom prst="rect">
+            <a:avLst/>
+          </a:prstGeom>
+          <a:solidFill>
+            <a:srgbClr val="F3F4F6"/>
+          </a:solidFill>
+          <a:ln>
+            <a:noFill/>
+          </a:ln>
+        </p:spPr>
+        <p:style>
+          <a:lnRef idx="1">
+            <a:schemeClr val="accent1"/>
+          </a:lnRef>
+          <a:fillRef idx="3">
+            <a:schemeClr val="accent1"/>
+          </a:fillRef>
+          <a:effectRef idx="2">
+            <a:schemeClr val="accent1"/>
+          </a:effectRef>
+          <a:fontRef idx="minor">
+            <a:schemeClr val="lt1"/>
+          </a:fontRef>
+        </p:style>
+        <p:txBody>
+          <a:bodyPr rtlCol="0" anchor="ctr"/>
+          <a:lstStyle/>
+          <a:p>
+            <a:pPr algn="ctr"/>
+          </a:p>
+        </p:txBody>
+      </p:sp>
+      <p:sp>
+        <p:nvSpPr>
+          <p:cNvPr id="55" name="TextBox 54"/>
+          <p:cNvSpPr txBox="1"/>
+          <p:nvPr/>
+        </p:nvSpPr>
+        <p:spPr>
+          <a:xfrm>
+            <a:off x="685800" y="4379976"/>
+            <a:ext cx="1261872" cy="256032"/>
+          </a:xfrm>
+          <a:prstGeom prst="rect">
+            <a:avLst/>
+          </a:prstGeom>
+          <a:noFill/>
+        </p:spPr>
+        <p:txBody>
+          <a:bodyPr wrap="square"/>
+          <a:lstStyle/>
+          <a:p>
+            <a:pPr algn="l">
+              <a:defRPr sz="900" b="0">
+                <a:solidFill>
+                  <a:srgbClr val="374151"/>
+                </a:solidFill>
+                <a:latin typeface="Calibri"/>
+              </a:defRPr>
+            </a:pPr>
+            <a:r>
+              <a:t>Optimal + VCG</a:t>
+            </a:r>
+          </a:p>
+        </p:txBody>
+      </p:sp>
+      <p:sp>
+        <p:nvSpPr>
+          <p:cNvPr id="56" name="TextBox 55"/>
+          <p:cNvSpPr txBox="1"/>
+          <p:nvPr/>
+        </p:nvSpPr>
+        <p:spPr>
+          <a:xfrm>
+            <a:off x="1947672" y="4379976"/>
+            <a:ext cx="1261872" cy="256032"/>
+          </a:xfrm>
+          <a:prstGeom prst="rect">
+            <a:avLst/>
+          </a:prstGeom>
+          <a:noFill/>
+        </p:spPr>
+        <p:txBody>
+          <a:bodyPr wrap="square"/>
+          <a:lstStyle/>
+          <a:p>
+            <a:pPr algn="l">
+              <a:defRPr sz="900" b="0">
+                <a:solidFill>
+                  <a:srgbClr val="374151"/>
+                </a:solidFill>
+                <a:latin typeface="Calibri"/>
+              </a:defRPr>
+            </a:pPr>
+            <a:r>
+              <a:t>$812</a:t>
+            </a:r>
+          </a:p>
+        </p:txBody>
+      </p:sp>
+      <p:sp>
+        <p:nvSpPr>
+          <p:cNvPr id="57" name="TextBox 56"/>
+          <p:cNvSpPr txBox="1"/>
+          <p:nvPr/>
+        </p:nvSpPr>
+        <p:spPr>
+          <a:xfrm>
+            <a:off x="3209544" y="4379976"/>
+            <a:ext cx="1261872" cy="256032"/>
+          </a:xfrm>
+          <a:prstGeom prst="rect">
+            <a:avLst/>
+          </a:prstGeom>
+          <a:noFill/>
+        </p:spPr>
+        <p:txBody>
+          <a:bodyPr wrap="square"/>
+          <a:lstStyle/>
+          <a:p>
+            <a:pPr algn="l">
+              <a:defRPr sz="900" b="0">
+                <a:solidFill>
+                  <a:srgbClr val="374151"/>
+                </a:solidFill>
+                <a:latin typeface="Calibri"/>
+              </a:defRPr>
+            </a:pPr>
+            <a:r>
+              <a:t>$1,824</a:t>
+            </a:r>
+          </a:p>
+        </p:txBody>
+      </p:sp>
+      <p:sp>
+        <p:nvSpPr>
+          <p:cNvPr id="58" name="TextBox 57"/>
+          <p:cNvSpPr txBox="1"/>
+          <p:nvPr/>
+        </p:nvSpPr>
+        <p:spPr>
+          <a:xfrm>
+            <a:off x="4471416" y="4379976"/>
+            <a:ext cx="1261872" cy="256032"/>
+          </a:xfrm>
+          <a:prstGeom prst="rect">
+            <a:avLst/>
+          </a:prstGeom>
+          <a:noFill/>
+        </p:spPr>
+        <p:txBody>
+          <a:bodyPr wrap="square"/>
+          <a:lstStyle/>
+          <a:p>
+            <a:pPr algn="l">
+              <a:defRPr sz="900" b="0">
+                <a:solidFill>
+                  <a:srgbClr val="374151"/>
+                </a:solidFill>
+                <a:latin typeface="Calibri"/>
+              </a:defRPr>
+            </a:pPr>
+            <a:r>
+              <a:t>1.00×</a:t>
+            </a:r>
+          </a:p>
+        </p:txBody>
+      </p:sp>
+      <p:sp>
+        <p:nvSpPr>
+          <p:cNvPr id="59" name="TextBox 58"/>
+          <p:cNvSpPr txBox="1"/>
+          <p:nvPr/>
+        </p:nvSpPr>
+        <p:spPr>
+          <a:xfrm>
+            <a:off x="5733288" y="4379976"/>
+            <a:ext cx="1261872" cy="256032"/>
+          </a:xfrm>
+          <a:prstGeom prst="rect">
+            <a:avLst/>
+          </a:prstGeom>
+          <a:noFill/>
+        </p:spPr>
+        <p:txBody>
+          <a:bodyPr wrap="square"/>
+          <a:lstStyle/>
+          <a:p>
+            <a:pPr algn="l">
+              <a:defRPr sz="900" b="0">
+                <a:solidFill>
+                  <a:srgbClr val="374151"/>
+                </a:solidFill>
+                <a:latin typeface="Calibri"/>
+              </a:defRPr>
+            </a:pPr>
+            <a:r>
+              <a:t>Yes</a:t>
+            </a:r>
+          </a:p>
+        </p:txBody>
+      </p:sp>
+      <p:sp>
+        <p:nvSpPr>
+          <p:cNvPr id="60" name="Rectangle 59"/>
+          <p:cNvSpPr/>
+          <p:nvPr/>
+        </p:nvSpPr>
+        <p:spPr>
+          <a:xfrm>
+            <a:off x="685800" y="4608576"/>
+            <a:ext cx="6309360" cy="4572"/>
+          </a:xfrm>
+          <a:prstGeom prst="rect">
+            <a:avLst/>
+          </a:prstGeom>
+          <a:solidFill>
+            <a:srgbClr val="F3F4F6"/>
+          </a:solidFill>
+          <a:ln>
+            <a:noFill/>
+          </a:ln>
+        </p:spPr>
+        <p:style>
+          <a:lnRef idx="1">
+            <a:schemeClr val="accent1"/>
+          </a:lnRef>
+          <a:fillRef idx="3">
+            <a:schemeClr val="accent1"/>
+          </a:fillRef>
+          <a:effectRef idx="2">
+            <a:schemeClr val="accent1"/>
+          </a:effectRef>
+          <a:fontRef idx="minor">
+            <a:schemeClr val="lt1"/>
+          </a:fontRef>
+        </p:style>
+        <p:txBody>
+          <a:bodyPr rtlCol="0" anchor="ctr"/>
+          <a:lstStyle/>
+          <a:p>
+            <a:pPr algn="ctr"/>
+          </a:p>
+        </p:txBody>
+      </p:sp>
+      <p:sp>
+        <p:nvSpPr>
+          <p:cNvPr id="61" name="Rectangle 60"/>
+          <p:cNvSpPr/>
+          <p:nvPr/>
+        </p:nvSpPr>
+        <p:spPr>
+          <a:xfrm>
+            <a:off x="7498079" y="2926080"/>
+            <a:ext cx="4114800" cy="2011680"/>
+          </a:xfrm>
+          <a:prstGeom prst="rect">
+            <a:avLst/>
+          </a:prstGeom>
+          <a:solidFill>
+            <a:srgbClr val="FFFFFF"/>
+          </a:solidFill>
+          <a:ln>
+            <a:noFill/>
+          </a:ln>
+        </p:spPr>
+        <p:style>
+          <a:lnRef idx="1">
+            <a:schemeClr val="accent1"/>
+          </a:lnRef>
+          <a:fillRef idx="3">
+            <a:schemeClr val="accent1"/>
+          </a:fillRef>
+          <a:effectRef idx="2">
+            <a:schemeClr val="accent1"/>
+          </a:effectRef>
+          <a:fontRef idx="minor">
+            <a:schemeClr val="lt1"/>
+          </a:fontRef>
+        </p:style>
+        <p:txBody>
+          <a:bodyPr rtlCol="0" anchor="ctr"/>
+          <a:lstStyle/>
+          <a:p>
+            <a:pPr algn="ctr"/>
+          </a:p>
+        </p:txBody>
+      </p:sp>
+      <p:sp>
+        <p:nvSpPr>
+          <p:cNvPr id="62" name="TextBox 61"/>
+          <p:cNvSpPr txBox="1"/>
+          <p:nvPr/>
+        </p:nvSpPr>
+        <p:spPr>
+          <a:xfrm>
+            <a:off x="7680960" y="3017520"/>
+            <a:ext cx="3657600" cy="274320"/>
+          </a:xfrm>
+          <a:prstGeom prst="rect">
+            <a:avLst/>
+          </a:prstGeom>
+          <a:noFill/>
+        </p:spPr>
+        <p:txBody>
+          <a:bodyPr wrap="square"/>
+          <a:lstStyle/>
+          <a:p>
+            <a:pPr algn="l">
+              <a:defRPr sz="1200" b="1">
+                <a:solidFill>
+                  <a:srgbClr val="111827"/>
+                </a:solidFill>
+                <a:latin typeface="Calibri"/>
+              </a:defRPr>
+            </a:pPr>
+            <a:r>
+              <a:t>Price of Anarchy Bounds</a:t>
+            </a:r>
+          </a:p>
+        </p:txBody>
+      </p:sp>
+      <p:sp>
+        <p:nvSpPr>
+          <p:cNvPr id="63" name="TextBox 62"/>
+          <p:cNvSpPr txBox="1"/>
+          <p:nvPr/>
+        </p:nvSpPr>
+        <p:spPr>
+          <a:xfrm>
+            <a:off x="7680960" y="3291840"/>
+            <a:ext cx="3657600" cy="182880"/>
+          </a:xfrm>
+          <a:prstGeom prst="rect">
+            <a:avLst/>
+          </a:prstGeom>
+          <a:noFill/>
+        </p:spPr>
+        <p:txBody>
+          <a:bodyPr wrap="square"/>
+          <a:lstStyle/>
+          <a:p>
+            <a:pPr algn="l">
+              <a:defRPr sz="900" b="0">
+                <a:solidFill>
+                  <a:srgbClr val="6B7280"/>
+                </a:solidFill>
+                <a:latin typeface="Calibri"/>
+              </a:defRPr>
+            </a:pPr>
+            <a:r>
+              <a:t>From Elzayn et al. Table 1:</a:t>
+            </a:r>
+          </a:p>
+        </p:txBody>
+      </p:sp>
+      <p:sp>
+        <p:nvSpPr>
+          <p:cNvPr id="64" name="TextBox 63"/>
+          <p:cNvSpPr txBox="1"/>
+          <p:nvPr/>
+        </p:nvSpPr>
+        <p:spPr>
+          <a:xfrm>
+            <a:off x="7772400" y="3566160"/>
+            <a:ext cx="1828800" cy="182880"/>
+          </a:xfrm>
+          <a:prstGeom prst="rect">
+            <a:avLst/>
+          </a:prstGeom>
+          <a:noFill/>
+        </p:spPr>
+        <p:txBody>
+          <a:bodyPr wrap="square"/>
+          <a:lstStyle/>
+          <a:p>
+            <a:pPr algn="l">
+              <a:defRPr sz="900" b="1">
+                <a:solidFill>
+                  <a:srgbClr val="111827"/>
+                </a:solidFill>
+                <a:latin typeface="Consolas"/>
+              </a:defRPr>
+            </a:pPr>
+            <a:r>
+              <a:t>(Greedy, GSP)</a:t>
+            </a:r>
+          </a:p>
+        </p:txBody>
+      </p:sp>
+      <p:sp>
+        <p:nvSpPr>
+          <p:cNvPr id="65" name="TextBox 64"/>
+          <p:cNvSpPr txBox="1"/>
+          <p:nvPr/>
+        </p:nvSpPr>
+        <p:spPr>
+          <a:xfrm>
+            <a:off x="9601200" y="3566160"/>
+            <a:ext cx="731520" cy="182880"/>
+          </a:xfrm>
+          <a:prstGeom prst="rect">
+            <a:avLst/>
+          </a:prstGeom>
+          <a:noFill/>
+        </p:spPr>
+        <p:txBody>
+          <a:bodyPr wrap="square"/>
+          <a:lstStyle/>
+          <a:p>
+            <a:pPr algn="l">
+              <a:defRPr sz="900" b="1">
+                <a:solidFill>
+                  <a:srgbClr val="1D4ED8"/>
+                </a:solidFill>
+                <a:latin typeface="Consolas"/>
+              </a:defRPr>
+            </a:pPr>
+            <a:r>
+              <a:t>[2, 4]</a:t>
+            </a:r>
+          </a:p>
+        </p:txBody>
+      </p:sp>
+      <p:sp>
+        <p:nvSpPr>
+          <p:cNvPr id="66" name="TextBox 65"/>
+          <p:cNvSpPr txBox="1"/>
+          <p:nvPr/>
+        </p:nvSpPr>
+        <p:spPr>
+          <a:xfrm>
+            <a:off x="10332720" y="3566160"/>
+            <a:ext cx="1188720" cy="182880"/>
+          </a:xfrm>
+          <a:prstGeom prst="rect">
+            <a:avLst/>
+          </a:prstGeom>
+          <a:noFill/>
+        </p:spPr>
+        <p:txBody>
+          <a:bodyPr wrap="square"/>
+          <a:lstStyle/>
+          <a:p>
+            <a:pPr algn="l">
+              <a:defRPr sz="800" b="0">
+                <a:solidFill>
+                  <a:srgbClr val="6B7280"/>
+                </a:solidFill>
+                <a:latin typeface="Calibri"/>
+              </a:defRPr>
+            </a:pPr>
+            <a:r>
+              <a:t>Most used in practice</a:t>
+            </a:r>
+          </a:p>
+        </p:txBody>
+      </p:sp>
+      <p:sp>
+        <p:nvSpPr>
+          <p:cNvPr id="67" name="TextBox 66"/>
+          <p:cNvSpPr txBox="1"/>
+          <p:nvPr/>
+        </p:nvSpPr>
+        <p:spPr>
+          <a:xfrm>
+            <a:off x="7772400" y="3913632"/>
+            <a:ext cx="1828800" cy="182880"/>
+          </a:xfrm>
+          <a:prstGeom prst="rect">
+            <a:avLst/>
+          </a:prstGeom>
+          <a:noFill/>
+        </p:spPr>
+        <p:txBody>
+          <a:bodyPr wrap="square"/>
+          <a:lstStyle/>
+          <a:p>
+            <a:pPr algn="l">
+              <a:defRPr sz="900" b="1">
+                <a:solidFill>
+                  <a:srgbClr val="111827"/>
+                </a:solidFill>
+                <a:latin typeface="Consolas"/>
+              </a:defRPr>
+            </a:pPr>
+            <a:r>
+              <a:t>(Greedy, VCG)</a:t>
+            </a:r>
+          </a:p>
+        </p:txBody>
+      </p:sp>
+      <p:sp>
+        <p:nvSpPr>
+          <p:cNvPr id="68" name="TextBox 67"/>
+          <p:cNvSpPr txBox="1"/>
+          <p:nvPr/>
+        </p:nvSpPr>
+        <p:spPr>
+          <a:xfrm>
+            <a:off x="9601200" y="3913632"/>
+            <a:ext cx="731520" cy="182880"/>
+          </a:xfrm>
+          <a:prstGeom prst="rect">
+            <a:avLst/>
+          </a:prstGeom>
+          <a:noFill/>
+        </p:spPr>
+        <p:txBody>
+          <a:bodyPr wrap="square"/>
+          <a:lstStyle/>
+          <a:p>
+            <a:pPr algn="l">
+              <a:defRPr sz="900" b="1">
+                <a:solidFill>
+                  <a:srgbClr val="1D4ED8"/>
+                </a:solidFill>
+                <a:latin typeface="Consolas"/>
+              </a:defRPr>
+            </a:pPr>
+            <a:r>
+              <a:t>[3/2, 4]</a:t>
+            </a:r>
+          </a:p>
+        </p:txBody>
+      </p:sp>
+      <p:sp>
+        <p:nvSpPr>
+          <p:cNvPr id="69" name="TextBox 68"/>
+          <p:cNvSpPr txBox="1"/>
+          <p:nvPr/>
+        </p:nvSpPr>
+        <p:spPr>
+          <a:xfrm>
+            <a:off x="10332720" y="3913632"/>
+            <a:ext cx="1188720" cy="182880"/>
+          </a:xfrm>
+          <a:prstGeom prst="rect">
+            <a:avLst/>
+          </a:prstGeom>
+          <a:noFill/>
+        </p:spPr>
+        <p:txBody>
+          <a:bodyPr wrap="square"/>
+          <a:lstStyle/>
+          <a:p>
+            <a:pPr algn="l">
+              <a:defRPr sz="800" b="0">
+                <a:solidFill>
+                  <a:srgbClr val="6B7280"/>
+                </a:solidFill>
+                <a:latin typeface="Calibri"/>
+              </a:defRPr>
+            </a:pPr>
+            <a:r>
+              <a:t>Better lower bound</a:t>
+            </a:r>
+          </a:p>
+        </p:txBody>
+      </p:sp>
+      <p:sp>
+        <p:nvSpPr>
+          <p:cNvPr id="70" name="TextBox 69"/>
+          <p:cNvSpPr txBox="1"/>
+          <p:nvPr/>
+        </p:nvSpPr>
+        <p:spPr>
+          <a:xfrm>
+            <a:off x="7772400" y="4261104"/>
+            <a:ext cx="1828800" cy="182880"/>
+          </a:xfrm>
+          <a:prstGeom prst="rect">
+            <a:avLst/>
+          </a:prstGeom>
+          <a:noFill/>
+        </p:spPr>
+        <p:txBody>
+          <a:bodyPr wrap="square"/>
+          <a:lstStyle/>
+          <a:p>
+            <a:pPr algn="l">
+              <a:defRPr sz="900" b="1">
+                <a:solidFill>
+                  <a:srgbClr val="111827"/>
+                </a:solidFill>
+                <a:latin typeface="Consolas"/>
+              </a:defRPr>
+            </a:pPr>
+            <a:r>
+              <a:t>(Optimal, GSP)</a:t>
+            </a:r>
+          </a:p>
+        </p:txBody>
+      </p:sp>
+      <p:sp>
+        <p:nvSpPr>
+          <p:cNvPr id="71" name="TextBox 70"/>
+          <p:cNvSpPr txBox="1"/>
+          <p:nvPr/>
+        </p:nvSpPr>
+        <p:spPr>
+          <a:xfrm>
+            <a:off x="9601200" y="4261104"/>
+            <a:ext cx="731520" cy="182880"/>
+          </a:xfrm>
+          <a:prstGeom prst="rect">
+            <a:avLst/>
+          </a:prstGeom>
+          <a:noFill/>
+        </p:spPr>
+        <p:txBody>
+          <a:bodyPr wrap="square"/>
+          <a:lstStyle/>
+          <a:p>
+            <a:pPr algn="l">
+              <a:defRPr sz="900" b="1">
+                <a:solidFill>
+                  <a:srgbClr val="1D4ED8"/>
+                </a:solidFill>
+                <a:latin typeface="Consolas"/>
+              </a:defRPr>
+            </a:pPr>
+            <a:r>
+              <a:t>[4/3, ∞]</a:t>
+            </a:r>
+          </a:p>
+        </p:txBody>
+      </p:sp>
+      <p:sp>
+        <p:nvSpPr>
+          <p:cNvPr id="72" name="TextBox 71"/>
+          <p:cNvSpPr txBox="1"/>
+          <p:nvPr/>
+        </p:nvSpPr>
+        <p:spPr>
+          <a:xfrm>
+            <a:off x="10332720" y="4261104"/>
+            <a:ext cx="1188720" cy="182880"/>
+          </a:xfrm>
+          <a:prstGeom prst="rect">
+            <a:avLst/>
+          </a:prstGeom>
+          <a:noFill/>
+        </p:spPr>
+        <p:txBody>
+          <a:bodyPr wrap="square"/>
+          <a:lstStyle/>
+          <a:p>
+            <a:pPr algn="l">
+              <a:defRPr sz="800" b="0">
+                <a:solidFill>
+                  <a:srgbClr val="6B7280"/>
+                </a:solidFill>
+                <a:latin typeface="Calibri"/>
+              </a:defRPr>
+            </a:pPr>
+            <a:r>
+              <a:t>Instance-dependent upper</a:t>
+            </a:r>
+          </a:p>
+        </p:txBody>
+      </p:sp>
+      <p:sp>
+        <p:nvSpPr>
+          <p:cNvPr id="73" name="TextBox 72"/>
+          <p:cNvSpPr txBox="1"/>
+          <p:nvPr/>
+        </p:nvSpPr>
+        <p:spPr>
+          <a:xfrm>
+            <a:off x="7772400" y="4608576"/>
+            <a:ext cx="1828800" cy="182880"/>
+          </a:xfrm>
+          <a:prstGeom prst="rect">
+            <a:avLst/>
+          </a:prstGeom>
+          <a:noFill/>
+        </p:spPr>
+        <p:txBody>
+          <a:bodyPr wrap="square"/>
+          <a:lstStyle/>
+          <a:p>
+            <a:pPr algn="l">
+              <a:defRPr sz="900" b="1">
+                <a:solidFill>
+                  <a:srgbClr val="111827"/>
+                </a:solidFill>
+                <a:latin typeface="Consolas"/>
+              </a:defRPr>
+            </a:pPr>
+            <a:r>
+              <a:t>(Optimal, VCG)</a:t>
+            </a:r>
+          </a:p>
+        </p:txBody>
+      </p:sp>
+      <p:sp>
+        <p:nvSpPr>
+          <p:cNvPr id="74" name="TextBox 73"/>
+          <p:cNvSpPr txBox="1"/>
+          <p:nvPr/>
+        </p:nvSpPr>
+        <p:spPr>
+          <a:xfrm>
+            <a:off x="9601200" y="4608576"/>
+            <a:ext cx="731520" cy="182880"/>
+          </a:xfrm>
+          <a:prstGeom prst="rect">
+            <a:avLst/>
+          </a:prstGeom>
+          <a:noFill/>
+        </p:spPr>
+        <p:txBody>
+          <a:bodyPr wrap="square"/>
+          <a:lstStyle/>
+          <a:p>
+            <a:pPr algn="l">
+              <a:defRPr sz="900" b="1">
+                <a:solidFill>
+                  <a:srgbClr val="1D4ED8"/>
+                </a:solidFill>
+                <a:latin typeface="Consolas"/>
+              </a:defRPr>
+            </a:pPr>
+            <a:r>
+              <a:t>[1, 1]</a:t>
+            </a:r>
+          </a:p>
+        </p:txBody>
+      </p:sp>
+      <p:sp>
+        <p:nvSpPr>
+          <p:cNvPr id="75" name="TextBox 74"/>
+          <p:cNvSpPr txBox="1"/>
+          <p:nvPr/>
+        </p:nvSpPr>
+        <p:spPr>
+          <a:xfrm>
+            <a:off x="10332720" y="4608576"/>
+            <a:ext cx="1188720" cy="182880"/>
+          </a:xfrm>
+          <a:prstGeom prst="rect">
+            <a:avLst/>
+          </a:prstGeom>
+          <a:noFill/>
+        </p:spPr>
+        <p:txBody>
+          <a:bodyPr wrap="square"/>
+          <a:lstStyle/>
+          <a:p>
+            <a:pPr algn="l">
+              <a:defRPr sz="800" b="0">
+                <a:solidFill>
+                  <a:srgbClr val="6B7280"/>
+                </a:solidFill>
+                <a:latin typeface="Calibri"/>
+              </a:defRPr>
+            </a:pPr>
+            <a:r>
+              <a:t>Truthful → optimal welfare</a:t>
+            </a:r>
+          </a:p>
+        </p:txBody>
+      </p:sp>
+      <p:sp>
+        <p:nvSpPr>
+          <p:cNvPr id="76" name="Rectangle 75"/>
+          <p:cNvSpPr/>
+          <p:nvPr/>
+        </p:nvSpPr>
+        <p:spPr>
+          <a:xfrm>
+            <a:off x="548640" y="5212080"/>
+            <a:ext cx="11064240" cy="1097280"/>
+          </a:xfrm>
+          <a:prstGeom prst="rect">
+            <a:avLst/>
+          </a:prstGeom>
+          <a:solidFill>
+            <a:srgbClr val="DBEAFE"/>
+          </a:solidFill>
+          <a:ln>
+            <a:noFill/>
+          </a:ln>
+        </p:spPr>
+        <p:style>
+          <a:lnRef idx="1">
+            <a:schemeClr val="accent1"/>
+          </a:lnRef>
+          <a:fillRef idx="3">
+            <a:schemeClr val="accent1"/>
+          </a:fillRef>
+          <a:effectRef idx="2">
+            <a:schemeClr val="accent1"/>
+          </a:effectRef>
+          <a:fontRef idx="minor">
+            <a:schemeClr val="lt1"/>
+          </a:fontRef>
+        </p:style>
+        <p:txBody>
+          <a:bodyPr rtlCol="0" anchor="ctr"/>
+          <a:lstStyle/>
+          <a:p>
+            <a:pPr algn="ctr"/>
+          </a:p>
+        </p:txBody>
+      </p:sp>
+      <p:sp>
+        <p:nvSpPr>
+          <p:cNvPr id="77" name="Rectangle 76"/>
+          <p:cNvSpPr/>
+          <p:nvPr/>
+        </p:nvSpPr>
+        <p:spPr>
+          <a:xfrm>
+            <a:off x="548640" y="5212080"/>
+            <a:ext cx="54864" cy="1097280"/>
+          </a:xfrm>
+          <a:prstGeom prst="rect">
+            <a:avLst/>
+          </a:prstGeom>
+          <a:solidFill>
+            <a:srgbClr val="1D4ED8"/>
+          </a:solidFill>
+          <a:ln>
+            <a:noFill/>
+          </a:ln>
+        </p:spPr>
+        <p:style>
+          <a:lnRef idx="1">
+            <a:schemeClr val="accent1"/>
+          </a:lnRef>
+          <a:fillRef idx="3">
+            <a:schemeClr val="accent1"/>
+          </a:fillRef>
+          <a:effectRef idx="2">
+            <a:schemeClr val="accent1"/>
+          </a:effectRef>
+          <a:fontRef idx="minor">
+            <a:schemeClr val="lt1"/>
+          </a:fontRef>
+        </p:style>
+        <p:txBody>
+          <a:bodyPr rtlCol="0" anchor="ctr"/>
+          <a:lstStyle/>
+          <a:p>
+            <a:pPr algn="ctr"/>
+          </a:p>
+        </p:txBody>
+      </p:sp>
+      <p:sp>
+        <p:nvSpPr>
+          <p:cNvPr id="78" name="TextBox 77"/>
+          <p:cNvSpPr txBox="1"/>
+          <p:nvPr/>
+        </p:nvSpPr>
+        <p:spPr>
+          <a:xfrm>
+            <a:off x="777240" y="5303520"/>
+            <a:ext cx="10515600" cy="228600"/>
+          </a:xfrm>
+          <a:prstGeom prst="rect">
+            <a:avLst/>
+          </a:prstGeom>
+          <a:noFill/>
+        </p:spPr>
+        <p:txBody>
+          <a:bodyPr wrap="square"/>
+          <a:lstStyle/>
+          <a:p>
+            <a:pPr algn="l">
+              <a:defRPr sz="1100" b="1">
+                <a:solidFill>
+                  <a:srgbClr val="142850"/>
+                </a:solidFill>
+                <a:latin typeface="Calibri"/>
+              </a:defRPr>
+            </a:pPr>
+            <a:r>
+              <a:t>Semi-Separable CTR Model: CTR(ad_i, slot_s) = δ^s_{τ_i} × β_i</a:t>
+            </a:r>
+          </a:p>
+        </p:txBody>
+      </p:sp>
+      <p:sp>
+        <p:nvSpPr>
+          <p:cNvPr id="79" name="TextBox 78"/>
+          <p:cNvSpPr txBox="1"/>
+          <p:nvPr/>
+        </p:nvSpPr>
+        <p:spPr>
+          <a:xfrm>
+            <a:off x="777240" y="5577840"/>
+            <a:ext cx="10515600" cy="594360"/>
+          </a:xfrm>
+          <a:prstGeom prst="rect">
+            <a:avLst/>
+          </a:prstGeom>
+          <a:noFill/>
+        </p:spPr>
+        <p:txBody>
+          <a:bodyPr wrap="square"/>
+          <a:lstStyle/>
+          <a:p>
+            <a:pPr algn="l">
+              <a:defRPr sz="1000" b="0">
+                <a:solidFill>
+                  <a:srgbClr val="142850"/>
+                </a:solidFill>
+                <a:latin typeface="Calibri"/>
+              </a:defRPr>
+            </a:pPr>
+            <a:r>
+              <a:t>The standard position auction assumes all ads share the same discount curve — but video ads decay 18% per position while impression ads decay only 7%. This breaks separability, making greedy allocation suboptimal and requiring bipartite matching. VCG pricing with optimal allocation achieves welfare factor 1.0 (theoretical optimum), while greedy+GSP empirically achieves 1.3-1.8× PoA — significantly better than the worst-case bound of 4×.</a:t>
+            </a:r>
+          </a:p>
+        </p:txBody>
+      </p:sp>
+    </p:spTree>
+  </p:cSld>
+  <p:clrMapOvr>
+    <a:masterClrMapping/>
+  </p:clrMapOvr>
+</p:sld>
+</file>
+
+<file path=ppt/slides/slide14.xml><?xml version="1.0" encoding="utf-8"?>
+<p:sld xmlns:a="http://schemas.openxmlformats.org/drawingml/2006/main" xmlns:p="http://schemas.openxmlformats.org/presentationml/2006/main" xmlns:r="http://schemas.openxmlformats.org/officeDocument/2006/relationships">
+  <p:cSld>
+    <p:spTree>
+      <p:nvGrpSpPr>
+        <p:cNvPr id="1" name=""/>
+        <p:cNvGrpSpPr/>
+        <p:nvPr/>
+      </p:nvGrpSpPr>
+      <p:grpSpPr/>
+      <p:sp>
+        <p:nvSpPr>
           <p:cNvPr id="2" name="Rectangle 1"/>
           <p:cNvSpPr/>
           <p:nvPr/>
@@ -12705,7 +15575,7 @@
               </a:defRPr>
             </a:pPr>
             <a:r>
-              <a:t>23</a:t>
+              <a:t>26</a:t>
             </a:r>
           </a:p>
         </p:txBody>
@@ -12909,7 +15779,7 @@
               </a:defRPr>
             </a:pPr>
             <a:r>
-              <a:t>4</a:t>
+              <a:t>5</a:t>
             </a:r>
           </a:p>
         </p:txBody>
@@ -12943,7 +15813,7 @@
               </a:defRPr>
             </a:pPr>
             <a:r>
-              <a:t>Model Architectures</a:t>
+              <a:t>Ad Types</a:t>
             </a:r>
           </a:p>
         </p:txBody>
@@ -12977,7 +15847,7 @@
               </a:defRPr>
             </a:pPr>
             <a:r>
-              <a:t>11</a:t>
+              <a:t>12</a:t>
             </a:r>
           </a:p>
         </p:txBody>

--- a/Ad_Auction_Simulator_Dashboard.pptx
+++ b/Ad_Auction_Simulator_Dashboard.pptx
@@ -16231,15 +16231,15 @@
               </a:defRPr>
             </a:pPr>
             <a:r>
-              <a:t>GSP &amp; VCG mechanisms with</a:t>
+              <a:t>VCG production mechanism</a:t>
             </a:r>
             <a:br/>
             <a:r>
-              <a:t>quality-weighted bids, reserve</a:t>
+              <a:t>with externality pricing,</a:t>
             </a:r>
             <a:br/>
             <a:r>
-              <a:t>prices, budget-aware shading</a:t>
+              <a:t>reserves, budget-aware shading</a:t>
             </a:r>
           </a:p>
         </p:txBody>
@@ -17279,7 +17279,7 @@
               </a:defRPr>
             </a:pPr>
             <a:r>
-              <a:t>GSP vs VCG comparison across 8 user segments with 80 synthetic advertisers</a:t>
+              <a:t>VCG vs GSP comparison across 8 user segments with 80 synthetic advertisers</a:t>
             </a:r>
           </a:p>
         </p:txBody>
@@ -18296,7 +18296,7 @@
               </a:defRPr>
             </a:pPr>
             <a:r>
-              <a:t>Revenue by Segment: GSP vs VCG</a:t>
+              <a:t>Revenue by Segment: VCG vs GSP</a:t>
             </a:r>
           </a:p>
         </p:txBody>
@@ -18407,7 +18407,7 @@
               </a:defRPr>
             </a:pPr>
             <a:r>
-              <a:t>GSP Rev</a:t>
+              <a:t>VCG Rev</a:t>
             </a:r>
           </a:p>
         </p:txBody>
@@ -18441,7 +18441,7 @@
               </a:defRPr>
             </a:pPr>
             <a:r>
-              <a:t>VCG Rev</a:t>
+              <a:t>GSP Rev</a:t>
             </a:r>
           </a:p>
         </p:txBody>
@@ -18475,7 +18475,7 @@
               </a:defRPr>
             </a:pPr>
             <a:r>
-              <a:t>Delta</a:t>
+              <a:t>VCG Tradeoff</a:t>
             </a:r>
           </a:p>
         </p:txBody>
@@ -18543,7 +18543,7 @@
               </a:defRPr>
             </a:pPr>
             <a:r>
-              <a:t>$642.18</a:t>
+              <a:t>$598.42</a:t>
             </a:r>
           </a:p>
         </p:txBody>
@@ -18577,7 +18577,7 @@
               </a:defRPr>
             </a:pPr>
             <a:r>
-              <a:t>$598.42</a:t>
+              <a:t>$642.18</a:t>
             </a:r>
           </a:p>
         </p:txBody>
@@ -18722,7 +18722,7 @@
               </a:defRPr>
             </a:pPr>
             <a:r>
-              <a:t>$538.91</a:t>
+              <a:t>$501.77</a:t>
             </a:r>
           </a:p>
         </p:txBody>
@@ -18756,7 +18756,7 @@
               </a:defRPr>
             </a:pPr>
             <a:r>
-              <a:t>$501.77</a:t>
+              <a:t>$538.91</a:t>
             </a:r>
           </a:p>
         </p:txBody>
@@ -18901,7 +18901,7 @@
               </a:defRPr>
             </a:pPr>
             <a:r>
-              <a:t>$712.34</a:t>
+              <a:t>$665.89</a:t>
             </a:r>
           </a:p>
         </p:txBody>
@@ -18935,7 +18935,7 @@
               </a:defRPr>
             </a:pPr>
             <a:r>
-              <a:t>$665.89</a:t>
+              <a:t>$712.34</a:t>
             </a:r>
           </a:p>
         </p:txBody>
@@ -19080,7 +19080,7 @@
               </a:defRPr>
             </a:pPr>
             <a:r>
-              <a:t>$423.56</a:t>
+              <a:t>$398.12</a:t>
             </a:r>
           </a:p>
         </p:txBody>
@@ -19114,7 +19114,7 @@
               </a:defRPr>
             </a:pPr>
             <a:r>
-              <a:t>$398.12</a:t>
+              <a:t>$423.56</a:t>
             </a:r>
           </a:p>
         </p:txBody>
@@ -19259,7 +19259,7 @@
               </a:defRPr>
             </a:pPr>
             <a:r>
-              <a:t>$487.23</a:t>
+              <a:t>$454.91</a:t>
             </a:r>
           </a:p>
         </p:txBody>
@@ -19293,7 +19293,7 @@
               </a:defRPr>
             </a:pPr>
             <a:r>
-              <a:t>$454.91</a:t>
+              <a:t>$487.23</a:t>
             </a:r>
           </a:p>
         </p:txBody>
@@ -19438,7 +19438,7 @@
               </a:defRPr>
             </a:pPr>
             <a:r>
-              <a:t>$689.71</a:t>
+              <a:t>$643.22</a:t>
             </a:r>
           </a:p>
         </p:txBody>
@@ -19472,7 +19472,7 @@
               </a:defRPr>
             </a:pPr>
             <a:r>
-              <a:t>$643.22</a:t>
+              <a:t>$689.71</a:t>
             </a:r>
           </a:p>
         </p:txBody>
@@ -20468,7 +20468,7 @@
               </a:defRPr>
             </a:pPr>
             <a:r>
-              <a:t>GSP yields 6-7% higher revenue than VCG across all segments due to non-truthful bidding dynamics. The revenue-optimal reserve ($2.50) differs from the welfare-optimal reserve ($1.50) — this tension between monetization and user experience is fundamental to auction system design.</a:t>
+              <a:t>VCG is the production mechanism for feed-based platforms: truthful bidding eliminates adversarial complexity, externality pricing ensures ads only win when value exceeds organic content opportunity cost, and welfare maximization aligns platform incentives with user experience. The ~6-7% revenue gap vs GSP is the cost of a healthier long-term marketplace.</a:t>
             </a:r>
           </a:p>
         </p:txBody>
@@ -28489,7 +28489,7 @@
               </a:defRPr>
             </a:pPr>
             <a:r>
-              <a:t>GSP Mechanism</a:t>
+              <a:t>VCG Mechanism</a:t>
             </a:r>
           </a:p>
         </p:txBody>
@@ -32599,7 +32599,7 @@
               </a:defRPr>
             </a:pPr>
             <a:r>
-              <a:t>Execute GSP/VCG with custom parameters</a:t>
+              <a:t>Execute VCG/GSP with custom parameters</a:t>
             </a:r>
           </a:p>
         </p:txBody>
@@ -32710,7 +32710,7 @@
               </a:defRPr>
             </a:pPr>
             <a:r>
-              <a:t>Side-by-side GSP vs VCG analysis</a:t>
+              <a:t>Side-by-side VCG vs GSP analysis</a:t>
             </a:r>
           </a:p>
         </p:txBody>
